--- a/data/2026-09-05.pptx
+++ b/data/2026-09-05.pptx
@@ -3294,7 +3294,7 @@
                   <a:srgbClr val="85C1E9"/>
                 </a:solidFill>
               </a:rPr>
-              <a:t>総収集記事数：210 件</a:t>
+              <a:t>総収集記事数：211 件</a:t>
             </a:r>
           </a:p>
         </p:txBody>
@@ -7723,7 +7723,7 @@
                   <a:srgbClr val="FFFFFF"/>
                 </a:solidFill>
               </a:rPr>
-              <a:t>GPT-6 Astra in code review: Gains, privacy, and cost</a:t>
+              <a:t>【プロンプト公開】他のAIが3日後に知る情報を、Grokは「今」教えてくれる。Grok × Xで技術ニュース収集が完全無料で「週10分」に激変した話</a:t>
             </a:r>
             <a:r>
               <a:rPr sz="900">
@@ -7764,7 +7764,7 @@
                   <a:srgbClr val="E67E22"/>
                 </a:solidFill>
               </a:rPr>
-              <a:t>[HackerNews]  </a:t>
+              <a:t>[Qiita]  </a:t>
             </a:r>
             <a:r>
               <a:rPr sz="800">
@@ -7773,7 +7773,7 @@
                 </a:solidFill>
                 <a:hlinkClick r:id="rId2"/>
               </a:rPr>
-              <a:t>https://www.coderabbit.ai/blog/gpt-6-astra-code-review-evaluation</a:t>
+              <a:t>https://qiita.com/shinkai_/items/dfc92e02ca1c461ead58</a:t>
             </a:r>
           </a:p>
         </p:txBody>
@@ -7806,7 +7806,10 @@
                   <a:srgbClr val="7F8C8D"/>
                 </a:solidFill>
               </a:rPr>
-              <a:t>GPT-6 Astra in code review: Gains, privacy, and cost</a:t>
+              <a:t>はじめに
+AI関連のニュースって、とにかく量が多いですよね。
+毎日のように新しいモデルが発表され、企業の動向がアップデートされ、セキュリティ関連の重大ニュースも次々に流れてきます。  
+そして、そういった情報の「一次情報としての新鮮さ」</a:t>
             </a:r>
           </a:p>
         </p:txBody>
@@ -7847,7 +7850,7 @@
                   <a:srgbClr val="FFFFFF"/>
                 </a:solidFill>
               </a:rPr>
-              <a:t>【第1弾：LLM×音声認識】Nottaが使いにくかったので、Whisper×PyAnnote×Gemini APIで音声文字起こしパイプラインを自作した話</a:t>
+              <a:t>GPT-6 Astra in code review: Gains, privacy, and cost</a:t>
             </a:r>
             <a:r>
               <a:rPr sz="900">
@@ -7855,7 +7858,7 @@
                   <a:srgbClr val="7F8C8D"/>
                 </a:solidFill>
               </a:rPr>
-              <a:t>  (2026-09-04)</a:t>
+              <a:t>  (2026-09-05)</a:t>
             </a:r>
           </a:p>
         </p:txBody>
@@ -7888,6 +7891,130 @@
                   <a:srgbClr val="E67E22"/>
                 </a:solidFill>
               </a:rPr>
+              <a:t>[HackerNews]  </a:t>
+            </a:r>
+            <a:r>
+              <a:rPr sz="800">
+                <a:solidFill>
+                  <a:srgbClr val="5DADE8"/>
+                </a:solidFill>
+                <a:hlinkClick r:id="rId3"/>
+              </a:rPr>
+              <a:t>https://www.coderabbit.ai/blog/gpt-6-astra-code-review-evaluation</a:t>
+            </a:r>
+          </a:p>
+        </p:txBody>
+      </p:sp>
+      <p:sp>
+        <p:nvSpPr>
+          <p:cNvPr id="11" name="TextBox 10"/>
+          <p:cNvSpPr txBox="1"/>
+          <p:nvPr/>
+        </p:nvSpPr>
+        <p:spPr>
+          <a:xfrm>
+            <a:off x="640080" y="3274329"/>
+            <a:ext cx="11155680" cy="427253"/>
+          </a:xfrm>
+          <a:prstGeom prst="rect">
+            <a:avLst/>
+          </a:prstGeom>
+          <a:noFill/>
+        </p:spPr>
+        <p:txBody>
+          <a:bodyPr wrap="square">
+            <a:spAutoFit/>
+          </a:bodyPr>
+          <a:lstStyle/>
+          <a:p>
+            <a:r>
+              <a:rPr sz="900">
+                <a:solidFill>
+                  <a:srgbClr val="7F8C8D"/>
+                </a:solidFill>
+              </a:rPr>
+              <a:t>GPT-6 Astra in code review: Gains, privacy, and cost</a:t>
+            </a:r>
+          </a:p>
+        </p:txBody>
+      </p:sp>
+      <p:sp>
+        <p:nvSpPr>
+          <p:cNvPr id="12" name="TextBox 11"/>
+          <p:cNvSpPr txBox="1"/>
+          <p:nvPr/>
+        </p:nvSpPr>
+        <p:spPr>
+          <a:xfrm>
+            <a:off x="365760" y="3701582"/>
+            <a:ext cx="11430000" cy="569671"/>
+          </a:xfrm>
+          <a:prstGeom prst="rect">
+            <a:avLst/>
+          </a:prstGeom>
+          <a:noFill/>
+        </p:spPr>
+        <p:txBody>
+          <a:bodyPr wrap="square">
+            <a:spAutoFit/>
+          </a:bodyPr>
+          <a:lstStyle/>
+          <a:p>
+            <a:r>
+              <a:rPr sz="1000">
+                <a:solidFill>
+                  <a:srgbClr val="E67E22"/>
+                </a:solidFill>
+              </a:rPr>
+              <a:t>▶ </a:t>
+            </a:r>
+            <a:r>
+              <a:rPr sz="1200" b="1">
+                <a:solidFill>
+                  <a:srgbClr val="FFFFFF"/>
+                </a:solidFill>
+              </a:rPr>
+              <a:t>【第1弾：LLM×音声認識】Nottaが使いにくかったので、Whisper×PyAnnote×Gemini APIで音声文字起こしパイプラインを自作した話</a:t>
+            </a:r>
+            <a:r>
+              <a:rPr sz="900">
+                <a:solidFill>
+                  <a:srgbClr val="7F8C8D"/>
+                </a:solidFill>
+              </a:rPr>
+              <a:t>  (2026-09-04)</a:t>
+            </a:r>
+          </a:p>
+        </p:txBody>
+      </p:sp>
+      <p:sp>
+        <p:nvSpPr>
+          <p:cNvPr id="13" name="TextBox 12"/>
+          <p:cNvSpPr txBox="1"/>
+          <p:nvPr/>
+        </p:nvSpPr>
+        <p:spPr>
+          <a:xfrm>
+            <a:off x="640080" y="4271253"/>
+            <a:ext cx="11155680" cy="341802"/>
+          </a:xfrm>
+          <a:prstGeom prst="rect">
+            <a:avLst/>
+          </a:prstGeom>
+          <a:noFill/>
+        </p:spPr>
+        <p:txBody>
+          <a:bodyPr wrap="none">
+            <a:spAutoFit/>
+          </a:bodyPr>
+          <a:lstStyle/>
+          <a:p>
+            <a:r>
+              <a:rPr sz="800" b="1">
+                <a:solidFill>
+                  <a:srgbClr val="E67E22"/>
+                </a:solidFill>
+              </a:rPr>
               <a:t>[Qiita]  </a:t>
             </a:r>
             <a:r>
@@ -7895,7 +8022,7 @@
                 <a:solidFill>
                   <a:srgbClr val="5DADE8"/>
                 </a:solidFill>
-                <a:hlinkClick r:id="rId3"/>
+                <a:hlinkClick r:id="rId4"/>
               </a:rPr>
               <a:t>https://qiita.com/tool-bizsystems/items/2a6ee711552a50a395a6</a:t>
             </a:r>
@@ -7904,13 +8031,13 @@
       </p:sp>
       <p:sp>
         <p:nvSpPr>
-          <p:cNvPr id="11" name="TextBox 10"/>
-          <p:cNvSpPr txBox="1"/>
-          <p:nvPr/>
-        </p:nvSpPr>
-        <p:spPr>
-          <a:xfrm>
-            <a:off x="640080" y="3274329"/>
+          <p:cNvPr id="14" name="TextBox 13"/>
+          <p:cNvSpPr txBox="1"/>
+          <p:nvPr/>
+        </p:nvSpPr>
+        <p:spPr>
+          <a:xfrm>
+            <a:off x="640080" y="4613056"/>
             <a:ext cx="11155680" cy="427253"/>
           </a:xfrm>
           <a:prstGeom prst="rect">
@@ -7941,13 +8068,13 @@
       </p:sp>
       <p:sp>
         <p:nvSpPr>
-          <p:cNvPr id="12" name="TextBox 11"/>
-          <p:cNvSpPr txBox="1"/>
-          <p:nvPr/>
-        </p:nvSpPr>
-        <p:spPr>
-          <a:xfrm>
-            <a:off x="365760" y="3701582"/>
+          <p:cNvPr id="15" name="TextBox 14"/>
+          <p:cNvSpPr txBox="1"/>
+          <p:nvPr/>
+        </p:nvSpPr>
+        <p:spPr>
+          <a:xfrm>
+            <a:off x="365760" y="5040309"/>
             <a:ext cx="11430000" cy="569671"/>
           </a:xfrm>
           <a:prstGeom prst="rect">
@@ -7990,13 +8117,13 @@
       </p:sp>
       <p:sp>
         <p:nvSpPr>
-          <p:cNvPr id="13" name="TextBox 12"/>
-          <p:cNvSpPr txBox="1"/>
-          <p:nvPr/>
-        </p:nvSpPr>
-        <p:spPr>
-          <a:xfrm>
-            <a:off x="640080" y="4271253"/>
+          <p:cNvPr id="16" name="TextBox 15"/>
+          <p:cNvSpPr txBox="1"/>
+          <p:nvPr/>
+        </p:nvSpPr>
+        <p:spPr>
+          <a:xfrm>
+            <a:off x="640080" y="5609981"/>
             <a:ext cx="11155680" cy="341802"/>
           </a:xfrm>
           <a:prstGeom prst="rect">
@@ -8023,7 +8150,7 @@
                 <a:solidFill>
                   <a:srgbClr val="5DADE8"/>
                 </a:solidFill>
-                <a:hlinkClick r:id="rId4"/>
+                <a:hlinkClick r:id="rId5"/>
               </a:rPr>
               <a:t>https://zenn.dev/ykbone/articles/202609-prompt-injection</a:t>
             </a:r>
@@ -8032,13 +8159,13 @@
       </p:sp>
       <p:sp>
         <p:nvSpPr>
-          <p:cNvPr id="14" name="TextBox 13"/>
-          <p:cNvSpPr txBox="1"/>
-          <p:nvPr/>
-        </p:nvSpPr>
-        <p:spPr>
-          <a:xfrm>
-            <a:off x="640080" y="4613056"/>
+          <p:cNvPr id="17" name="TextBox 16"/>
+          <p:cNvSpPr txBox="1"/>
+          <p:nvPr/>
+        </p:nvSpPr>
+        <p:spPr>
+          <a:xfrm>
+            <a:off x="640080" y="5951783"/>
             <a:ext cx="11155680" cy="427253"/>
           </a:xfrm>
           <a:prstGeom prst="rect">
@@ -8062,132 +8189,6 @@
 AIエディタやチャットAIに、こんなお願いをしたことはありませんか。
 このURLの記事を読んで、要約して
 私もやったことがあります。ある勉強会にて「その操作が情報漏洩の入り口になりうる」と聞いて、正直ぴんと来ませんでした。読ま</a:t>
-            </a:r>
-          </a:p>
-        </p:txBody>
-      </p:sp>
-      <p:sp>
-        <p:nvSpPr>
-          <p:cNvPr id="15" name="TextBox 14"/>
-          <p:cNvSpPr txBox="1"/>
-          <p:nvPr/>
-        </p:nvSpPr>
-        <p:spPr>
-          <a:xfrm>
-            <a:off x="365760" y="5040309"/>
-            <a:ext cx="11430000" cy="569671"/>
-          </a:xfrm>
-          <a:prstGeom prst="rect">
-            <a:avLst/>
-          </a:prstGeom>
-          <a:noFill/>
-        </p:spPr>
-        <p:txBody>
-          <a:bodyPr wrap="square">
-            <a:spAutoFit/>
-          </a:bodyPr>
-          <a:lstStyle/>
-          <a:p>
-            <a:r>
-              <a:rPr sz="1000">
-                <a:solidFill>
-                  <a:srgbClr val="E67E22"/>
-                </a:solidFill>
-              </a:rPr>
-              <a:t>▶ </a:t>
-            </a:r>
-            <a:r>
-              <a:rPr sz="1200" b="1">
-                <a:solidFill>
-                  <a:srgbClr val="FFFFFF"/>
-                </a:solidFill>
-              </a:rPr>
-              <a:t>ChatGPT・Copilot・Gemini… 業務視点でどう選べるか？ ChatAI 13 製品を「8つの独自指標」で比較してみた｜中小企業・管理職のための導…</a:t>
-            </a:r>
-            <a:r>
-              <a:rPr sz="900">
-                <a:solidFill>
-                  <a:srgbClr val="7F8C8D"/>
-                </a:solidFill>
-              </a:rPr>
-              <a:t>  (2026-09-04)</a:t>
-            </a:r>
-          </a:p>
-        </p:txBody>
-      </p:sp>
-      <p:sp>
-        <p:nvSpPr>
-          <p:cNvPr id="16" name="TextBox 15"/>
-          <p:cNvSpPr txBox="1"/>
-          <p:nvPr/>
-        </p:nvSpPr>
-        <p:spPr>
-          <a:xfrm>
-            <a:off x="640080" y="5609981"/>
-            <a:ext cx="11155680" cy="341802"/>
-          </a:xfrm>
-          <a:prstGeom prst="rect">
-            <a:avLst/>
-          </a:prstGeom>
-          <a:noFill/>
-        </p:spPr>
-        <p:txBody>
-          <a:bodyPr wrap="none">
-            <a:spAutoFit/>
-          </a:bodyPr>
-          <a:lstStyle/>
-          <a:p>
-            <a:r>
-              <a:rPr sz="800" b="1">
-                <a:solidFill>
-                  <a:srgbClr val="E67E22"/>
-                </a:solidFill>
-              </a:rPr>
-              <a:t>[Qiita]  </a:t>
-            </a:r>
-            <a:r>
-              <a:rPr sz="800">
-                <a:solidFill>
-                  <a:srgbClr val="5DADE8"/>
-                </a:solidFill>
-                <a:hlinkClick r:id="rId5"/>
-              </a:rPr>
-              <a:t>https://qiita.com/songchong/items/78a9d9c28506ff90d331</a:t>
-            </a:r>
-          </a:p>
-        </p:txBody>
-      </p:sp>
-      <p:sp>
-        <p:nvSpPr>
-          <p:cNvPr id="17" name="TextBox 16"/>
-          <p:cNvSpPr txBox="1"/>
-          <p:nvPr/>
-        </p:nvSpPr>
-        <p:spPr>
-          <a:xfrm>
-            <a:off x="640080" y="5951783"/>
-            <a:ext cx="11155680" cy="427253"/>
-          </a:xfrm>
-          <a:prstGeom prst="rect">
-            <a:avLst/>
-          </a:prstGeom>
-          <a:noFill/>
-        </p:spPr>
-        <p:txBody>
-          <a:bodyPr wrap="square">
-            <a:spAutoFit/>
-          </a:bodyPr>
-          <a:lstStyle/>
-          <a:p>
-            <a:r>
-              <a:rPr sz="900">
-                <a:solidFill>
-                  <a:srgbClr val="7F8C8D"/>
-                </a:solidFill>
-              </a:rPr>
-              <a:t>&gt; 「ChatGPT を会社で使って、情報漏洩や著作権は本当に大丈夫なのか？」
-&gt; 「Microsoft 365 Copilot や Gemini も聞くが、うちの業務で本当に役立つのはどれだ？」
-&gt; 「無料版や個人版のまま社員に使わせてい</a:t>
             </a:r>
           </a:p>
         </p:txBody>
@@ -8409,7 +8410,7 @@
                   <a:srgbClr val="FFFFFF"/>
                 </a:solidFill>
               </a:rPr>
-              <a:t>AIセキュリティ何から勉強すりゃええの？その4</a:t>
+              <a:t>ChatGPT・Copilot・Gemini… 業務視点でどう選べるか？ ChatAI 13 製品を「8つの独自指標」で比較してみた｜中小企業・管理職のための導…</a:t>
             </a:r>
             <a:r>
               <a:rPr sz="900">
@@ -8417,7 +8418,7 @@
                   <a:srgbClr val="7F8C8D"/>
                 </a:solidFill>
               </a:rPr>
-              <a:t>  (2026-08-30)</a:t>
+              <a:t>  (2026-09-04)</a:t>
             </a:r>
           </a:p>
         </p:txBody>
@@ -8459,6 +8460,132 @@
                 </a:solidFill>
                 <a:hlinkClick r:id="rId2"/>
               </a:rPr>
+              <a:t>https://qiita.com/songchong/items/78a9d9c28506ff90d331</a:t>
+            </a:r>
+          </a:p>
+        </p:txBody>
+      </p:sp>
+      <p:sp>
+        <p:nvSpPr>
+          <p:cNvPr id="8" name="TextBox 7"/>
+          <p:cNvSpPr txBox="1"/>
+          <p:nvPr/>
+        </p:nvSpPr>
+        <p:spPr>
+          <a:xfrm>
+            <a:off x="640080" y="1935601"/>
+            <a:ext cx="11155680" cy="427253"/>
+          </a:xfrm>
+          <a:prstGeom prst="rect">
+            <a:avLst/>
+          </a:prstGeom>
+          <a:noFill/>
+        </p:spPr>
+        <p:txBody>
+          <a:bodyPr wrap="square">
+            <a:spAutoFit/>
+          </a:bodyPr>
+          <a:lstStyle/>
+          <a:p>
+            <a:r>
+              <a:rPr sz="900">
+                <a:solidFill>
+                  <a:srgbClr val="7F8C8D"/>
+                </a:solidFill>
+              </a:rPr>
+              <a:t>&gt; 「ChatGPT を会社で使って、情報漏洩や著作権は本当に大丈夫なのか？」
+&gt; 「Microsoft 365 Copilot や Gemini も聞くが、うちの業務で本当に役立つのはどれだ？」
+&gt; 「無料版や個人版のまま社員に使わせてい</a:t>
+            </a:r>
+          </a:p>
+        </p:txBody>
+      </p:sp>
+      <p:sp>
+        <p:nvSpPr>
+          <p:cNvPr id="9" name="TextBox 8"/>
+          <p:cNvSpPr txBox="1"/>
+          <p:nvPr/>
+        </p:nvSpPr>
+        <p:spPr>
+          <a:xfrm>
+            <a:off x="365760" y="2362855"/>
+            <a:ext cx="11430000" cy="569671"/>
+          </a:xfrm>
+          <a:prstGeom prst="rect">
+            <a:avLst/>
+          </a:prstGeom>
+          <a:noFill/>
+        </p:spPr>
+        <p:txBody>
+          <a:bodyPr wrap="square">
+            <a:spAutoFit/>
+          </a:bodyPr>
+          <a:lstStyle/>
+          <a:p>
+            <a:r>
+              <a:rPr sz="1000">
+                <a:solidFill>
+                  <a:srgbClr val="E67E22"/>
+                </a:solidFill>
+              </a:rPr>
+              <a:t>▶ </a:t>
+            </a:r>
+            <a:r>
+              <a:rPr sz="1200" b="1">
+                <a:solidFill>
+                  <a:srgbClr val="FFFFFF"/>
+                </a:solidFill>
+              </a:rPr>
+              <a:t>AIセキュリティ何から勉強すりゃええの？その4</a:t>
+            </a:r>
+            <a:r>
+              <a:rPr sz="900">
+                <a:solidFill>
+                  <a:srgbClr val="7F8C8D"/>
+                </a:solidFill>
+              </a:rPr>
+              <a:t>  (2026-08-30)</a:t>
+            </a:r>
+          </a:p>
+        </p:txBody>
+      </p:sp>
+      <p:sp>
+        <p:nvSpPr>
+          <p:cNvPr id="10" name="TextBox 9"/>
+          <p:cNvSpPr txBox="1"/>
+          <p:nvPr/>
+        </p:nvSpPr>
+        <p:spPr>
+          <a:xfrm>
+            <a:off x="640080" y="2932526"/>
+            <a:ext cx="11155680" cy="341802"/>
+          </a:xfrm>
+          <a:prstGeom prst="rect">
+            <a:avLst/>
+          </a:prstGeom>
+          <a:noFill/>
+        </p:spPr>
+        <p:txBody>
+          <a:bodyPr wrap="none">
+            <a:spAutoFit/>
+          </a:bodyPr>
+          <a:lstStyle/>
+          <a:p>
+            <a:r>
+              <a:rPr sz="800" b="1">
+                <a:solidFill>
+                  <a:srgbClr val="E67E22"/>
+                </a:solidFill>
+              </a:rPr>
+              <a:t>[Qiita]  </a:t>
+            </a:r>
+            <a:r>
+              <a:rPr sz="800">
+                <a:solidFill>
+                  <a:srgbClr val="5DADE8"/>
+                </a:solidFill>
+                <a:hlinkClick r:id="rId3"/>
+              </a:rPr>
               <a:t>https://qiita.com/mikihitooooo/items/d43a58615e948002d70b</a:t>
             </a:r>
           </a:p>
@@ -8466,13 +8593,13 @@
       </p:sp>
       <p:sp>
         <p:nvSpPr>
-          <p:cNvPr id="8" name="TextBox 7"/>
-          <p:cNvSpPr txBox="1"/>
-          <p:nvPr/>
-        </p:nvSpPr>
-        <p:spPr>
-          <a:xfrm>
-            <a:off x="640080" y="1935601"/>
+          <p:cNvPr id="11" name="TextBox 10"/>
+          <p:cNvSpPr txBox="1"/>
+          <p:nvPr/>
+        </p:nvSpPr>
+        <p:spPr>
+          <a:xfrm>
+            <a:off x="640080" y="3274329"/>
             <a:ext cx="11155680" cy="427253"/>
           </a:xfrm>
           <a:prstGeom prst="rect">
@@ -10991,7 +11118,7 @@
                             <a:srgbClr val="D0E4F7"/>
                           </a:solidFill>
                         </a:rPr>
-                        <a:t>4.4%</a:t>
+                        <a:t>4.3%</a:t>
                       </a:r>
                     </a:p>
                   </a:txBody>
@@ -11127,7 +11254,7 @@
                             <a:srgbClr val="D0E4F7"/>
                           </a:solidFill>
                         </a:rPr>
-                        <a:t>32.9%</a:t>
+                        <a:t>32.8%</a:t>
                       </a:r>
                     </a:p>
                   </a:txBody>
@@ -11241,7 +11368,7 @@
                             <a:srgbClr val="E67E22"/>
                           </a:solidFill>
                         </a:rPr>
-                        <a:t>15 件</a:t>
+                        <a:t>16 件</a:t>
                       </a:r>
                     </a:p>
                   </a:txBody>
@@ -11263,7 +11390,7 @@
                             <a:srgbClr val="D0E4F7"/>
                           </a:solidFill>
                         </a:rPr>
-                        <a:t>6.0%</a:t>
+                        <a:t>6.3%</a:t>
                       </a:r>
                     </a:p>
                   </a:txBody>
@@ -11331,7 +11458,7 @@
                             <a:srgbClr val="D0E4F7"/>
                           </a:solidFill>
                         </a:rPr>
-                        <a:t>32.9%</a:t>
+                        <a:t>32.8%</a:t>
                       </a:r>
                     </a:p>
                   </a:txBody>
@@ -11377,7 +11504,7 @@
                             <a:srgbClr val="FFFFFF"/>
                           </a:solidFill>
                         </a:rPr>
-                        <a:t>252 件</a:t>
+                        <a:t>253 件</a:t>
                       </a:r>
                     </a:p>
                   </a:txBody>
@@ -20389,7 +20516,7 @@
                   <a:srgbClr val="E67E22"/>
                 </a:solidFill>
               </a:rPr>
-              <a:t>[HackerNews]  </a:t>
+              <a:t>[Qiita]  </a:t>
             </a:r>
             <a:r>
               <a:rPr sz="1200" b="1">
@@ -20397,7 +20524,7 @@
                   <a:srgbClr val="FFFFFF"/>
                 </a:solidFill>
               </a:rPr>
-              <a:t>GPT-6 Astra in code review: Gains, privacy, and cost</a:t>
+              <a:t>【プロンプト公開】他のAIが3日後に知る情報を、Grokは「今」教えてくれる。Grok × Xで技術ニュース収集が完全無料で「週10分」に激変した話</a:t>
             </a:r>
             <a:r>
               <a:rPr sz="900">
@@ -20439,7 +20566,7 @@
                 </a:solidFill>
                 <a:hlinkClick r:id="rId2"/>
               </a:rPr>
-              <a:t>https://www.coderabbit.ai/blog/gpt-6-astra-code-review-evaluation</a:t>
+              <a:t>https://qiita.com/shinkai_/items/dfc92e02ca1c461ead58</a:t>
             </a:r>
           </a:p>
         </p:txBody>
@@ -20472,7 +20599,10 @@
                   <a:srgbClr val="C0D8F0"/>
                 </a:solidFill>
               </a:rPr>
-              <a:t>GPT-6 Astra in code review: Gains, privacy, and cost</a:t>
+              <a:t>はじめに
+AI関連のニュースって、とにかく量が多いですよね。
+毎日のように新しいモデルが発表され、企業の動向がアップデートされ、セキュリティ関連の重大ニュースも次々に流れてきます。  
+そして、そういった情報の「一次情報としての新鮮さ」で言うと、圧倒的に強いのはXです。ニュースメディアが記事化す</a:t>
             </a:r>
           </a:p>
         </p:txBody>
@@ -20591,7 +20721,7 @@
                   <a:srgbClr val="E67E22"/>
                 </a:solidFill>
               </a:rPr>
-              <a:t>[Qiita]  </a:t>
+              <a:t>[HackerNews]  </a:t>
             </a:r>
             <a:r>
               <a:rPr sz="1200" b="1">
@@ -20599,7 +20729,7 @@
                   <a:srgbClr val="FFFFFF"/>
                 </a:solidFill>
               </a:rPr>
-              <a:t>【第1弾：LLM×音声認識】Nottaが使いにくかったので、Whisper×PyAnnote×Gemini APIで音声文字起こしパイプラインを自作した話</a:t>
+              <a:t>GPT-6 Astra in code review: Gains, privacy, and cost</a:t>
             </a:r>
             <a:r>
               <a:rPr sz="900">
@@ -20607,7 +20737,7 @@
                   <a:srgbClr val="7F8C8D"/>
                 </a:solidFill>
               </a:rPr>
-              <a:t>  (2026-09-04)</a:t>
+              <a:t>  (2026-09-05)</a:t>
             </a:r>
           </a:p>
         </p:txBody>
@@ -20641,6 +20771,208 @@
                 </a:solidFill>
                 <a:hlinkClick r:id="rId3"/>
               </a:rPr>
+              <a:t>https://www.coderabbit.ai/blog/gpt-6-astra-code-review-evaluation</a:t>
+            </a:r>
+          </a:p>
+        </p:txBody>
+      </p:sp>
+      <p:sp>
+        <p:nvSpPr>
+          <p:cNvPr id="16" name="TextBox 15"/>
+          <p:cNvSpPr txBox="1"/>
+          <p:nvPr/>
+        </p:nvSpPr>
+        <p:spPr>
+          <a:xfrm>
+            <a:off x="502920" y="4056888"/>
+            <a:ext cx="11247120" cy="762000"/>
+          </a:xfrm>
+          <a:prstGeom prst="rect">
+            <a:avLst/>
+          </a:prstGeom>
+          <a:noFill/>
+        </p:spPr>
+        <p:txBody>
+          <a:bodyPr wrap="square">
+            <a:spAutoFit/>
+          </a:bodyPr>
+          <a:lstStyle/>
+          <a:p>
+            <a:r>
+              <a:rPr sz="900">
+                <a:solidFill>
+                  <a:srgbClr val="C0D8F0"/>
+                </a:solidFill>
+              </a:rPr>
+              <a:t>GPT-6 Astra in code review: Gains, privacy, and cost</a:t>
+            </a:r>
+          </a:p>
+        </p:txBody>
+      </p:sp>
+      <p:sp>
+        <p:nvSpPr>
+          <p:cNvPr id="17" name="Rectangle 16"/>
+          <p:cNvSpPr/>
+          <p:nvPr/>
+        </p:nvSpPr>
+        <p:spPr>
+          <a:xfrm>
+            <a:off x="274320" y="4916423"/>
+            <a:ext cx="11640312" cy="1795272"/>
+          </a:xfrm>
+          <a:prstGeom prst="rect">
+            <a:avLst/>
+          </a:prstGeom>
+          <a:solidFill>
+            <a:srgbClr val="1E2D47"/>
+          </a:solidFill>
+          <a:ln>
+            <a:noFill/>
+          </a:ln>
+        </p:spPr>
+        <p:style>
+          <a:lnRef idx="1">
+            <a:schemeClr val="accent1"/>
+          </a:lnRef>
+          <a:fillRef idx="3">
+            <a:schemeClr val="accent1"/>
+          </a:fillRef>
+          <a:effectRef idx="2">
+            <a:schemeClr val="accent1"/>
+          </a:effectRef>
+          <a:fontRef idx="minor">
+            <a:schemeClr val="lt1"/>
+          </a:fontRef>
+        </p:style>
+        <p:txBody>
+          <a:bodyPr rtlCol="0" anchor="ctr"/>
+          <a:lstStyle/>
+          <a:p>
+            <a:pPr algn="ctr"/>
+          </a:p>
+        </p:txBody>
+      </p:sp>
+      <p:sp>
+        <p:nvSpPr>
+          <p:cNvPr id="18" name="Rectangle 17"/>
+          <p:cNvSpPr/>
+          <p:nvPr/>
+        </p:nvSpPr>
+        <p:spPr>
+          <a:xfrm>
+            <a:off x="274320" y="4916423"/>
+            <a:ext cx="64008" cy="1795272"/>
+          </a:xfrm>
+          <a:prstGeom prst="rect">
+            <a:avLst/>
+          </a:prstGeom>
+          <a:solidFill>
+            <a:srgbClr val="E67E22"/>
+          </a:solidFill>
+          <a:ln>
+            <a:noFill/>
+          </a:ln>
+        </p:spPr>
+        <p:style>
+          <a:lnRef idx="1">
+            <a:schemeClr val="accent1"/>
+          </a:lnRef>
+          <a:fillRef idx="3">
+            <a:schemeClr val="accent1"/>
+          </a:fillRef>
+          <a:effectRef idx="2">
+            <a:schemeClr val="accent1"/>
+          </a:effectRef>
+          <a:fontRef idx="minor">
+            <a:schemeClr val="lt1"/>
+          </a:fontRef>
+        </p:style>
+        <p:txBody>
+          <a:bodyPr rtlCol="0" anchor="ctr"/>
+          <a:lstStyle/>
+          <a:p>
+            <a:pPr algn="ctr"/>
+          </a:p>
+        </p:txBody>
+      </p:sp>
+      <p:sp>
+        <p:nvSpPr>
+          <p:cNvPr id="19" name="TextBox 18"/>
+          <p:cNvSpPr txBox="1"/>
+          <p:nvPr/>
+        </p:nvSpPr>
+        <p:spPr>
+          <a:xfrm>
+            <a:off x="502920" y="4971288"/>
+            <a:ext cx="11247120" cy="590550"/>
+          </a:xfrm>
+          <a:prstGeom prst="rect">
+            <a:avLst/>
+          </a:prstGeom>
+          <a:noFill/>
+        </p:spPr>
+        <p:txBody>
+          <a:bodyPr wrap="square">
+            <a:spAutoFit/>
+          </a:bodyPr>
+          <a:lstStyle/>
+          <a:p>
+            <a:r>
+              <a:rPr sz="900" b="1">
+                <a:solidFill>
+                  <a:srgbClr val="E67E22"/>
+                </a:solidFill>
+              </a:rPr>
+              <a:t>[Qiita]  </a:t>
+            </a:r>
+            <a:r>
+              <a:rPr sz="1200" b="1">
+                <a:solidFill>
+                  <a:srgbClr val="FFFFFF"/>
+                </a:solidFill>
+              </a:rPr>
+              <a:t>【第1弾：LLM×音声認識】Nottaが使いにくかったので、Whisper×PyAnnote×Gemini APIで音声文字起こしパイプラインを自作した話</a:t>
+            </a:r>
+            <a:r>
+              <a:rPr sz="900">
+                <a:solidFill>
+                  <a:srgbClr val="7F8C8D"/>
+                </a:solidFill>
+              </a:rPr>
+              <a:t>  (2026-09-04)</a:t>
+            </a:r>
+          </a:p>
+        </p:txBody>
+      </p:sp>
+      <p:sp>
+        <p:nvSpPr>
+          <p:cNvPr id="20" name="TextBox 19"/>
+          <p:cNvSpPr txBox="1"/>
+          <p:nvPr/>
+        </p:nvSpPr>
+        <p:spPr>
+          <a:xfrm>
+            <a:off x="502920" y="5561838"/>
+            <a:ext cx="11247120" cy="400050"/>
+          </a:xfrm>
+          <a:prstGeom prst="rect">
+            <a:avLst/>
+          </a:prstGeom>
+          <a:noFill/>
+        </p:spPr>
+        <p:txBody>
+          <a:bodyPr wrap="none">
+            <a:spAutoFit/>
+          </a:bodyPr>
+          <a:lstStyle/>
+          <a:p>
+            <a:r>
+              <a:rPr sz="800">
+                <a:solidFill>
+                  <a:srgbClr val="5DADE8"/>
+                </a:solidFill>
+                <a:hlinkClick r:id="rId4"/>
+              </a:rPr>
               <a:t>https://qiita.com/tool-bizsystems/items/2a6ee711552a50a395a6</a:t>
             </a:r>
           </a:p>
@@ -20648,13 +20980,13 @@
       </p:sp>
       <p:sp>
         <p:nvSpPr>
-          <p:cNvPr id="16" name="TextBox 15"/>
-          <p:cNvSpPr txBox="1"/>
-          <p:nvPr/>
-        </p:nvSpPr>
-        <p:spPr>
-          <a:xfrm>
-            <a:off x="502920" y="4056888"/>
+          <p:cNvPr id="21" name="TextBox 20"/>
+          <p:cNvSpPr txBox="1"/>
+          <p:nvPr/>
+        </p:nvSpPr>
+        <p:spPr>
+          <a:xfrm>
+            <a:off x="502920" y="5961888"/>
             <a:ext cx="11247120" cy="762000"/>
           </a:xfrm>
           <a:prstGeom prst="rect">
@@ -20680,212 +21012,6 @@
  月間利用時間の制限
 - 完全クラウド依存によるプライバシーや仕様変更への不安
 こうした制約を解消す</a:t>
-            </a:r>
-          </a:p>
-        </p:txBody>
-      </p:sp>
-      <p:sp>
-        <p:nvSpPr>
-          <p:cNvPr id="17" name="Rectangle 16"/>
-          <p:cNvSpPr/>
-          <p:nvPr/>
-        </p:nvSpPr>
-        <p:spPr>
-          <a:xfrm>
-            <a:off x="274320" y="4916423"/>
-            <a:ext cx="11640312" cy="1795272"/>
-          </a:xfrm>
-          <a:prstGeom prst="rect">
-            <a:avLst/>
-          </a:prstGeom>
-          <a:solidFill>
-            <a:srgbClr val="1E2D47"/>
-          </a:solidFill>
-          <a:ln>
-            <a:noFill/>
-          </a:ln>
-        </p:spPr>
-        <p:style>
-          <a:lnRef idx="1">
-            <a:schemeClr val="accent1"/>
-          </a:lnRef>
-          <a:fillRef idx="3">
-            <a:schemeClr val="accent1"/>
-          </a:fillRef>
-          <a:effectRef idx="2">
-            <a:schemeClr val="accent1"/>
-          </a:effectRef>
-          <a:fontRef idx="minor">
-            <a:schemeClr val="lt1"/>
-          </a:fontRef>
-        </p:style>
-        <p:txBody>
-          <a:bodyPr rtlCol="0" anchor="ctr"/>
-          <a:lstStyle/>
-          <a:p>
-            <a:pPr algn="ctr"/>
-          </a:p>
-        </p:txBody>
-      </p:sp>
-      <p:sp>
-        <p:nvSpPr>
-          <p:cNvPr id="18" name="Rectangle 17"/>
-          <p:cNvSpPr/>
-          <p:nvPr/>
-        </p:nvSpPr>
-        <p:spPr>
-          <a:xfrm>
-            <a:off x="274320" y="4916423"/>
-            <a:ext cx="64008" cy="1795272"/>
-          </a:xfrm>
-          <a:prstGeom prst="rect">
-            <a:avLst/>
-          </a:prstGeom>
-          <a:solidFill>
-            <a:srgbClr val="E67E22"/>
-          </a:solidFill>
-          <a:ln>
-            <a:noFill/>
-          </a:ln>
-        </p:spPr>
-        <p:style>
-          <a:lnRef idx="1">
-            <a:schemeClr val="accent1"/>
-          </a:lnRef>
-          <a:fillRef idx="3">
-            <a:schemeClr val="accent1"/>
-          </a:fillRef>
-          <a:effectRef idx="2">
-            <a:schemeClr val="accent1"/>
-          </a:effectRef>
-          <a:fontRef idx="minor">
-            <a:schemeClr val="lt1"/>
-          </a:fontRef>
-        </p:style>
-        <p:txBody>
-          <a:bodyPr rtlCol="0" anchor="ctr"/>
-          <a:lstStyle/>
-          <a:p>
-            <a:pPr algn="ctr"/>
-          </a:p>
-        </p:txBody>
-      </p:sp>
-      <p:sp>
-        <p:nvSpPr>
-          <p:cNvPr id="19" name="TextBox 18"/>
-          <p:cNvSpPr txBox="1"/>
-          <p:nvPr/>
-        </p:nvSpPr>
-        <p:spPr>
-          <a:xfrm>
-            <a:off x="502920" y="4971288"/>
-            <a:ext cx="11247120" cy="590550"/>
-          </a:xfrm>
-          <a:prstGeom prst="rect">
-            <a:avLst/>
-          </a:prstGeom>
-          <a:noFill/>
-        </p:spPr>
-        <p:txBody>
-          <a:bodyPr wrap="square">
-            <a:spAutoFit/>
-          </a:bodyPr>
-          <a:lstStyle/>
-          <a:p>
-            <a:r>
-              <a:rPr sz="900" b="1">
-                <a:solidFill>
-                  <a:srgbClr val="E67E22"/>
-                </a:solidFill>
-              </a:rPr>
-              <a:t>[Zenn]  </a:t>
-            </a:r>
-            <a:r>
-              <a:rPr sz="1200" b="1">
-                <a:solidFill>
-                  <a:srgbClr val="FFFFFF"/>
-                </a:solidFill>
-              </a:rPr>
-              <a:t>【プロンプトインジェクション】AI時代の「見えない指示」の落とし穴</a:t>
-            </a:r>
-            <a:r>
-              <a:rPr sz="900">
-                <a:solidFill>
-                  <a:srgbClr val="7F8C8D"/>
-                </a:solidFill>
-              </a:rPr>
-              <a:t>  (2026-09-04)</a:t>
-            </a:r>
-          </a:p>
-        </p:txBody>
-      </p:sp>
-      <p:sp>
-        <p:nvSpPr>
-          <p:cNvPr id="20" name="TextBox 19"/>
-          <p:cNvSpPr txBox="1"/>
-          <p:nvPr/>
-        </p:nvSpPr>
-        <p:spPr>
-          <a:xfrm>
-            <a:off x="502920" y="5561838"/>
-            <a:ext cx="11247120" cy="400050"/>
-          </a:xfrm>
-          <a:prstGeom prst="rect">
-            <a:avLst/>
-          </a:prstGeom>
-          <a:noFill/>
-        </p:spPr>
-        <p:txBody>
-          <a:bodyPr wrap="none">
-            <a:spAutoFit/>
-          </a:bodyPr>
-          <a:lstStyle/>
-          <a:p>
-            <a:r>
-              <a:rPr sz="800">
-                <a:solidFill>
-                  <a:srgbClr val="5DADE8"/>
-                </a:solidFill>
-                <a:hlinkClick r:id="rId4"/>
-              </a:rPr>
-              <a:t>https://zenn.dev/ykbone/articles/202609-prompt-injection</a:t>
-            </a:r>
-          </a:p>
-        </p:txBody>
-      </p:sp>
-      <p:sp>
-        <p:nvSpPr>
-          <p:cNvPr id="21" name="TextBox 20"/>
-          <p:cNvSpPr txBox="1"/>
-          <p:nvPr/>
-        </p:nvSpPr>
-        <p:spPr>
-          <a:xfrm>
-            <a:off x="502920" y="5961888"/>
-            <a:ext cx="11247120" cy="762000"/>
-          </a:xfrm>
-          <a:prstGeom prst="rect">
-            <a:avLst/>
-          </a:prstGeom>
-          <a:noFill/>
-        </p:spPr>
-        <p:txBody>
-          <a:bodyPr wrap="square">
-            <a:spAutoFit/>
-          </a:bodyPr>
-          <a:lstStyle/>
-          <a:p>
-            <a:r>
-              <a:rPr sz="900">
-                <a:solidFill>
-                  <a:srgbClr val="C0D8F0"/>
-                </a:solidFill>
-              </a:rPr>
-              <a:t>はじめに
-AIエディタやチャットAIに、こんなお願いをしたことはありませんか。
-このURLの記事を読んで、要約して
-私もやったことがあります。ある勉強会にて「その操作が情報漏洩の入り口になりうる」と聞いて、正直ぴんと来ませんでした。読ませているだけなのに、何が漏れるんだろう、と。
-この手法の正体</a:t>
             </a:r>
           </a:p>
         </p:txBody>

--- a/data/2026-09-05.pptx
+++ b/data/2026-09-05.pptx
@@ -3294,7 +3294,7 @@
                   <a:srgbClr val="85C1E9"/>
                 </a:solidFill>
               </a:rPr>
-              <a:t>総収集記事数：211 件</a:t>
+              <a:t>総収集記事数：221 件</a:t>
             </a:r>
           </a:p>
         </p:txBody>
@@ -3516,7 +3516,7 @@
                   <a:srgbClr val="FFFFFF"/>
                 </a:solidFill>
               </a:rPr>
-              <a:t>【ファインチューニング vs RAG】社内ナレッジベース構築におけるコスト対効果の技術的比較</a:t>
+              <a:t>Prompt EngineeringからLoop Engineeringまで  〜6年間のAIアプリケーションの歴史〜</a:t>
             </a:r>
             <a:r>
               <a:rPr sz="900">
@@ -3524,7 +3524,7 @@
                   <a:srgbClr val="7F8C8D"/>
                 </a:solidFill>
               </a:rPr>
-              <a:t>  (2026-09-04)</a:t>
+              <a:t>  (2026-09-05)</a:t>
             </a:r>
           </a:p>
         </p:txBody>
@@ -3566,7 +3566,7 @@
                 </a:solidFill>
                 <a:hlinkClick r:id="rId2"/>
               </a:rPr>
-              <a:t>https://qiita.com/NKKTechGlobal/items/06126206c1aab15bc45a</a:t>
+              <a:t>https://qiita.com/y_yoko/items/831e013a600b8d91ac44</a:t>
             </a:r>
           </a:p>
         </p:txBody>
@@ -3599,11 +3599,15 @@
                   <a:srgbClr val="7F8C8D"/>
                 </a:solidFill>
               </a:rPr>
-              <a:t>【ファインチューニング vs RAG】社内ナレッジベース構築におけるコスト対効果の技術的比較
-!Feature(149).png
-はじめに
-こんにちは、NKKTech Global 技術チームです。
-現在、多くの企業が生成AI（LLM</a:t>
+              <a:t>1. はじめに
+ここ数年で、
+- Prompt Engineering
+- RAG
+- MCP
+- Context Engineering
+- Harness Engineering
+- Loop Engineering
+など、様々な</a:t>
             </a:r>
           </a:p>
         </p:txBody>
@@ -3644,7 +3648,7 @@
                   <a:srgbClr val="FFFFFF"/>
                 </a:solidFill>
               </a:rPr>
-              <a:t>RAGの検索精度は「質問理解」で変わる：Fine-grained Query Understandingを整理してみた</a:t>
+              <a:t>Finite time blowup for an averaged three-dimensional Navier-Stokes equation (201…</a:t>
             </a:r>
             <a:r>
               <a:rPr sz="900">
@@ -3652,7 +3656,7 @@
                   <a:srgbClr val="7F8C8D"/>
                 </a:solidFill>
               </a:rPr>
-              <a:t>  (2026-09-04)</a:t>
+              <a:t>  (2026-09-05)</a:t>
             </a:r>
           </a:p>
         </p:txBody>
@@ -3685,7 +3689,7 @@
                   <a:srgbClr val="2980B9"/>
                 </a:solidFill>
               </a:rPr>
-              <a:t>[Qiita]  </a:t>
+              <a:t>[HackerNews]  </a:t>
             </a:r>
             <a:r>
               <a:rPr sz="800">
@@ -3694,7 +3698,7 @@
                 </a:solidFill>
                 <a:hlinkClick r:id="rId3"/>
               </a:rPr>
-              <a:t>https://qiita.com/engchina/items/f0a4f6dbe043d1fa4ba4</a:t>
+              <a:t>https://terrytao.wordpress.com/2014/02/04/finite-time-blowup-for-an-averaged-three-di…</a:t>
             </a:r>
           </a:p>
         </p:txBody>
@@ -3727,10 +3731,7 @@
                   <a:srgbClr val="7F8C8D"/>
                 </a:solidFill>
               </a:rPr>
-              <a:t>初めに
-RAGを作っていると、Embedding検索やRerankを入れているのに、回答が少しズレることがあります。
-たとえば、ECサイトのヘルプ検索で、ユーザーがこう聞いたとします。
-しかし、ヘルプ文書では「キャンセル」ではなく</a:t>
+              <a:t>Finite time blowup for an averaged three-dimensional Navier-Stokes equation (2014)</a:t>
             </a:r>
           </a:p>
         </p:txBody>
@@ -3771,7 +3772,7 @@
                   <a:srgbClr val="FFFFFF"/>
                 </a:solidFill>
               </a:rPr>
-              <a:t>FlutterGemmaでGemma 4 E4Bが動かない理由を、公式CLIとの比較で切り分けた話</a:t>
+              <a:t>評価駆動で高精度！LangGraphマルチエージェントRAGを実装する手順</a:t>
             </a:r>
             <a:r>
               <a:rPr sz="900">
@@ -3779,7 +3780,7 @@
                   <a:srgbClr val="7F8C8D"/>
                 </a:solidFill>
               </a:rPr>
-              <a:t>  (2026-09-04)</a:t>
+              <a:t>  (2026-09-05)</a:t>
             </a:r>
           </a:p>
         </p:txBody>
@@ -3812,7 +3813,7 @@
                   <a:srgbClr val="2980B9"/>
                 </a:solidFill>
               </a:rPr>
-              <a:t>[Zenn]  </a:t>
+              <a:t>[Qiita]  </a:t>
             </a:r>
             <a:r>
               <a:rPr sz="800">
@@ -3821,7 +3822,7 @@
                 </a:solidFill>
                 <a:hlinkClick r:id="rId4"/>
               </a:rPr>
-              <a:t>https://zenn.dev/gitmame00/articles/a8f5f300d4ea86</a:t>
+              <a:t>https://qiita.com/Sa0422/items/8b48c27b572270412c04</a:t>
             </a:r>
           </a:p>
         </p:txBody>
@@ -3854,10 +3855,7 @@
                   <a:srgbClr val="7F8C8D"/>
                 </a:solidFill>
               </a:rPr>
-              <a:t>結論：Gemma 4は動く。動かないのはFlutter側だった。
-数週間、Exa-Vision Pro に Gemma 4 E4B を組み込もうとしていました。
-目標はシンプルです。
-完全オフラインで、スマホだけでRAG＋LLM推論を実現す</a:t>
+              <a:t>多くのLLMアプリケーション開発者が直面する課題、それは「複雑な推論を伴うタスクでの精度向上」ではないでしょうか。従来の単一エージェントRAGでは、複数の情報源を横断したり、多段階の思考プロセスを要する質問に答えるのが難しいケースが頻繁に発</a:t>
             </a:r>
           </a:p>
         </p:txBody>
@@ -3898,7 +3896,7 @@
                   <a:srgbClr val="FFFFFF"/>
                 </a:solidFill>
               </a:rPr>
-              <a:t>Ollamaに自分の情報を持たせる② ― SYSTEM + RAGをGPU環境で実際に動かしてみる</a:t>
+              <a:t>RAGのオーケストレーションについて整理してみた</a:t>
             </a:r>
             <a:r>
               <a:rPr sz="900">
@@ -3906,7 +3904,7 @@
                   <a:srgbClr val="7F8C8D"/>
                 </a:solidFill>
               </a:rPr>
-              <a:t>  (2026-09-04)</a:t>
+              <a:t>  (2026-09-05)</a:t>
             </a:r>
           </a:p>
         </p:txBody>
@@ -3939,7 +3937,7 @@
                   <a:srgbClr val="2980B9"/>
                 </a:solidFill>
               </a:rPr>
-              <a:t>[Qiita]  </a:t>
+              <a:t>[Zenn]  </a:t>
             </a:r>
             <a:r>
               <a:rPr sz="800">
@@ -3948,7 +3946,7 @@
                 </a:solidFill>
                 <a:hlinkClick r:id="rId5"/>
               </a:rPr>
-              <a:t>https://qiita.com/rino_yume/items/1712cc23e78542741ab7</a:t>
+              <a:t>https://zenn.dev/hattan/articles/20260814_ragorchestrate</a:t>
             </a:r>
           </a:p>
         </p:txBody>
@@ -3981,9 +3979,9 @@
                   <a:srgbClr val="7F8C8D"/>
                 </a:solidFill>
               </a:rPr>
-              <a:t>Ollamaに自分の情報を持たせる② ― SYSTEM + RAGをGPU環境で実際に動かしてみる
-前回の記事では、Ollamaへ自分の情報を持たせる方法として、SYSTEM、RAG、LoRAを分けて考えました。
-最後の「27. 次にや</a:t>
+              <a:t>はじめに
+RAGの仕組みやアーキテクチャについて学習するために、Azureのサービスを利用した簡単なチャットアプリケーションを複数の方式で作成してみました。
+その中で学んだRAGのアーキテクチャとオーケストレーションについて、整理してみまし</a:t>
             </a:r>
           </a:p>
         </p:txBody>
@@ -4198,7 +4196,7 @@
                   <a:srgbClr val="7F8C8D"/>
                 </a:solidFill>
               </a:rPr>
-              <a:t>※ 他 18 件は JSON アーカイブを参照</a:t>
+              <a:t>※ 他 22 件は JSON アーカイブを参照</a:t>
             </a:r>
           </a:p>
         </p:txBody>
@@ -4239,7 +4237,7 @@
                   <a:srgbClr val="FFFFFF"/>
                 </a:solidFill>
               </a:rPr>
-              <a:t>LLMでカタログPDFから構造化データを抽出する：プロンプト設計と後処理の実践</a:t>
+              <a:t>【音響物理×LLM】耳介の干渉ノッチをRoPEに拡張し、類似トークンを識別・消去する「SN-RoPE」</a:t>
             </a:r>
             <a:r>
               <a:rPr sz="900">
@@ -4247,7 +4245,7 @@
                   <a:srgbClr val="7F8C8D"/>
                 </a:solidFill>
               </a:rPr>
-              <a:t>  (2026-09-04)</a:t>
+              <a:t>  (2026-09-05)</a:t>
             </a:r>
           </a:p>
         </p:txBody>
@@ -4289,7 +4287,7 @@
                 </a:solidFill>
                 <a:hlinkClick r:id="rId2"/>
               </a:rPr>
-              <a:t>https://zenn.dev/optimax/articles/0fc6979bd6e0eb</a:t>
+              <a:t>https://zenn.dev/nanashi_os/articles/87218ce44ce09b</a:t>
             </a:r>
           </a:p>
         </p:txBody>
@@ -4322,8 +4320,8 @@
                   <a:srgbClr val="7F8C8D"/>
                 </a:solidFill>
               </a:rPr>
-              <a:t>0. 前提
-本記事では、複数のアパレル系メーカーのカタログをもとに商品検索システムを構築するプロジェクトの中で、PDFカタログから構造化データを抽出する工程に取り組んだ際の知見を紹介します。なお、社名・ブランド名・社内プロジェクト名などの固</a:t>
+              <a:t>1. はじめに：耳介が解く「等距離・正中面問題」とLLMの課題
+人間は、両耳からの距離が等しい正中面上（左右差 ITD / ILD がゼロの領域）であっても、音源の上下位置（仰角）を一意に判別できます。これを可能にしているのが耳介（Pinn</a:t>
             </a:r>
           </a:p>
         </p:txBody>
@@ -4364,7 +4362,7 @@
                   <a:srgbClr val="FFFFFF"/>
                 </a:solidFill>
               </a:rPr>
-              <a:t>ローカルRAG環境を非エンジニアに届ける｜ダブルクリックで入る「社内知恵袋(ShineosQA)」を作った話</a:t>
+              <a:t>ファインチューニングとRAGの使い分け：どちらで解くべき問題かを初心者向けに整理する</a:t>
             </a:r>
             <a:r>
               <a:rPr sz="900">
@@ -4372,7 +4370,7 @@
                   <a:srgbClr val="7F8C8D"/>
                 </a:solidFill>
               </a:rPr>
-              <a:t>  (2026-09-04)</a:t>
+              <a:t>  (2026-09-05)</a:t>
             </a:r>
           </a:p>
         </p:txBody>
@@ -4414,7 +4412,7 @@
                 </a:solidFill>
                 <a:hlinkClick r:id="rId3"/>
               </a:rPr>
-              <a:t>https://zenn.dev/shineos/articles/shineos-qa-assistant-non-engineer-rag</a:t>
+              <a:t>https://zenn.dev/yushiyamamoto/articles/finetuning-vs-rag-2026-08</a:t>
             </a:r>
           </a:p>
         </p:txBody>
@@ -4447,9 +4445,7 @@
                   <a:srgbClr val="7F8C8D"/>
                 </a:solidFill>
               </a:rPr>
-              <a:t>はじめに
-前回、OllamaとOpen WebUIで作るRAG環境という記事を書きました。Docker Composeひとつで、社内文書を読み込んで答えてくれるローカルRAGが立ち上がる、という内容です。
-で、この記事がそこそこ反響を呼んで</a:t>
+              <a:t>「社内の資料をAIに答えさせたい」「うちの言い回しに合わせたい」——生成AIを仕事に入れようとすると、だいたいこの2つの要望が同時に出てきます。そこで並ぶ候補が RAG と ファインチューニング です。どちらも「AIを自分向けに強くする」話</a:t>
             </a:r>
           </a:p>
         </p:txBody>
@@ -4490,7 +4486,7 @@
                   <a:srgbClr val="FFFFFF"/>
                 </a:solidFill>
               </a:rPr>
-              <a:t>Agentic RAGの自律判断を深掘り：LangGraphの思考プロセスとツール連携</a:t>
+              <a:t>【ファインチューニング vs RAG】社内ナレッジベース構築におけるコスト対効果の技術的比較</a:t>
             </a:r>
             <a:r>
               <a:rPr sz="900">
@@ -4540,7 +4536,7 @@
                 </a:solidFill>
                 <a:hlinkClick r:id="rId4"/>
               </a:rPr>
-              <a:t>https://qiita.com/Sa0422/items/3cbffd42e0e72e375a80</a:t>
+              <a:t>https://qiita.com/NKKTechGlobal/items/06126206c1aab15bc45a</a:t>
             </a:r>
           </a:p>
         </p:txBody>
@@ -4573,7 +4569,11 @@
                   <a:srgbClr val="7F8C8D"/>
                 </a:solidFill>
               </a:rPr>
-              <a:t>「従来のRAGでは、一度検索をミスしたら終わり」「検索結果が不十分でも、LLMはそのまま回答を生成してしまう」――多くのエンジニアがこの問題に直面しているのではないでしょうか。単なる情報検索ではなく、LLMエージェントが自律的に「思考」し、</a:t>
+              <a:t>【ファインチューニング vs RAG】社内ナレッジベース構築におけるコスト対効果の技術的比較
+!Feature(149).png
+はじめに
+こんにちは、NKKTech Global 技術チームです。
+現在、多くの企業が生成AI（LLM</a:t>
             </a:r>
           </a:p>
         </p:txBody>
@@ -4614,7 +4614,7 @@
                   <a:srgbClr val="FFFFFF"/>
                 </a:solidFill>
               </a:rPr>
-              <a:t>Weaviate Go Client入門：Goでベクトル検索・gRPCバッチ投入・RAGまで動かす</a:t>
+              <a:t>RAGの検索精度は「質問理解」で変わる：Fine-grained Query Understandingを整理してみた</a:t>
             </a:r>
             <a:r>
               <a:rPr sz="900">
@@ -4655,7 +4655,7 @@
                   <a:srgbClr val="2980B9"/>
                 </a:solidFill>
               </a:rPr>
-              <a:t>[Zenn]  </a:t>
+              <a:t>[Qiita]  </a:t>
             </a:r>
             <a:r>
               <a:rPr sz="800">
@@ -4664,7 +4664,7 @@
                 </a:solidFill>
                 <a:hlinkClick r:id="rId5"/>
               </a:rPr>
-              <a:t>https://zenn.dev/nonejp/articles/661b567d4f8d87</a:t>
+              <a:t>https://qiita.com/engchina/items/f0a4f6dbe043d1fa4ba4</a:t>
             </a:r>
           </a:p>
         </p:txBody>
@@ -4697,8 +4697,10 @@
                   <a:srgbClr val="7F8C8D"/>
                 </a:solidFill>
               </a:rPr>
-              <a:t>「GoでRAGを作りたいんだけど、ベクトルDBまわりの日本語情報が少なくない？」と思ったことはありませんか。
-PythonならLangChainやLlamaIndexの記事が山ほど出てきます。一方で、GoでWeaviateを触るとなると、公</a:t>
+              <a:t>初めに
+RAGを作っていると、Embedding検索やRerankを入れているのに、回答が少しズレることがあります。
+たとえば、ECサイトのヘルプ検索で、ユーザーがこう聞いたとします。
+しかし、ヘルプ文書では「キャンセル」ではなく</a:t>
             </a:r>
           </a:p>
         </p:txBody>
@@ -4920,7 +4922,7 @@
                   <a:srgbClr val="FFFFFF"/>
                 </a:solidFill>
               </a:rPr>
-              <a:t>CLAUDE.mdをそろそろ見直す時期かも ── Claude 5世代向けの最適化手順・スキル・プロジェクト種類別の例</a:t>
+              <a:t>Claude Code開発者が押さえておきたいAnthropicニュース（2026-09-06）</a:t>
             </a:r>
             <a:r>
               <a:rPr sz="900">
@@ -4928,7 +4930,7 @@
                   <a:srgbClr val="7F8C8D"/>
                 </a:solidFill>
               </a:rPr>
-              <a:t>  (2026-09-05)</a:t>
+              <a:t>  (2026-09-06)</a:t>
             </a:r>
           </a:p>
         </p:txBody>
@@ -4970,7 +4972,7 @@
                 </a:solidFill>
                 <a:hlinkClick r:id="rId2"/>
               </a:rPr>
-              <a:t>https://qiita.com/nogataka/items/d6a54f3694726b9141f3</a:t>
+              <a:t>https://qiita.com/homhom44/items/229e92aba6fc5c17c4b0</a:t>
             </a:r>
           </a:p>
         </p:txBody>
@@ -5003,8 +5005,8 @@
                   <a:srgbClr val="7F8C8D"/>
                 </a:solidFill>
               </a:rPr>
-              <a:t>要点
-- Anthropic は 2026年7月24日のブログで、Claude Opus 5 / Fable 5 向けに Claude Code のシステムプロンプトを 80% 以上削り、社内コーディング評価で性能低下が測定できなかったと</a:t>
+              <a:t>Anthropic の Claude / Claude Code 関連ニュースをまとめた索引だ。記事本文は日本語で PaPoo に投稿している。ここでは各記事の要点を紹介するので、詳細は各リンク先を読んでほしい。
+Claude の「考える</a:t>
             </a:r>
           </a:p>
         </p:txBody>
@@ -5045,7 +5047,7 @@
                   <a:srgbClr val="FFFFFF"/>
                 </a:solidFill>
               </a:rPr>
-              <a:t>【コスパ最強】月1万円の下位プラン投資で爆速成果！Antigravity × Cursor × ChatGPT × Claudeの「4AI連携」開発・業務・執筆…</a:t>
+              <a:t>Bedrock GuardrailsだけでAIエージェントは守れるの？～ツール境界の隙間を検証してみた～</a:t>
             </a:r>
             <a:r>
               <a:rPr sz="900">
@@ -5053,7 +5055,7 @@
                   <a:srgbClr val="7F8C8D"/>
                 </a:solidFill>
               </a:rPr>
-              <a:t>  (2026-09-05)</a:t>
+              <a:t>  (2026-09-06)</a:t>
             </a:r>
           </a:p>
         </p:txBody>
@@ -5095,7 +5097,7 @@
                 </a:solidFill>
                 <a:hlinkClick r:id="rId3"/>
               </a:rPr>
-              <a:t>https://qiita.com/boraemon2000/items/71b60ef197bd8653a092</a:t>
+              <a:t>https://qiita.com/manaty/items/55838e17caa0b195891e</a:t>
             </a:r>
           </a:p>
         </p:txBody>
@@ -5128,9 +5130,11 @@
                   <a:srgbClr val="7F8C8D"/>
                 </a:solidFill>
               </a:rPr>
-              <a:t>【コスパ最強】月1万円の下位プラン投資で爆速成果！Antigravity × Cursor × ChatGPT × Claudeの「4AI連携」開発・業務・執筆術
-1. はじめに：AI課金沼にハマっていませんか？
-生成AIやAIエディタ</a:t>
+              <a:t>:::note info
+この記事は「2026 Japan AWS Jr.Champions 真夏の Qiita リレー」の37日目の記事となります。
+過去の投稿（リンク集）はこちらからご覧ください。
+:::
+https://qiita.</a:t>
             </a:r>
           </a:p>
         </p:txBody>
@@ -5171,7 +5175,7 @@
                   <a:srgbClr val="FFFFFF"/>
                 </a:solidFill>
               </a:rPr>
-              <a:t>TensorFlowで作ったモデルをVertex AI(現Agent Platform)にデプロイして推論を試してみた</a:t>
+              <a:t>AIが見ているスライドと、人間が見ているスライドは見え方が違う？</a:t>
             </a:r>
             <a:r>
               <a:rPr sz="900">
@@ -5179,7 +5183,7 @@
                   <a:srgbClr val="7F8C8D"/>
                 </a:solidFill>
               </a:rPr>
-              <a:t>  (2026-09-05)</a:t>
+              <a:t>  (2026-09-06)</a:t>
             </a:r>
           </a:p>
         </p:txBody>
@@ -5221,7 +5225,7 @@
                 </a:solidFill>
                 <a:hlinkClick r:id="rId4"/>
               </a:rPr>
-              <a:t>https://qiita.com/yukisnow0704/items/cf1a6f6bb72e157a0cbf</a:t>
+              <a:t>https://qiita.com/yama3133/items/7c0de7ea0db2a110b6d7</a:t>
             </a:r>
           </a:p>
         </p:txBody>
@@ -5255,7 +5259,8 @@
                 </a:solidFill>
               </a:rPr>
               <a:t>はじめに
-Webエンジニアとして9年ほど、主にPHP/Laravelでの開発をやってきました。以前、工場向けの危険検知システムを開発する案件で、TensorFlow(CNN)を使った画像解析モデルの実装に携わったことがあります。ただ直近1</a:t>
+AIエージェントにスライドを作らせるとき、参考にしてほしい既存のスライドを渡すことがあります。  
+Spec-Driven Presentation Maker(SDPM、AWS samplesが公開しているOSSで、フォークし</a:t>
             </a:r>
           </a:p>
         </p:txBody>
@@ -5296,7 +5301,7 @@
                   <a:srgbClr val="FFFFFF"/>
                 </a:solidFill>
               </a:rPr>
-              <a:t>Claude Code v2.1.252 - v2.1.261 リリースノートまとめ</a:t>
+              <a:t>vLLM + LiteLLM を本線に、セルフホストAIワークスペースをワンコマンドで立てる手順（Ollama は最短ルート）</a:t>
             </a:r>
             <a:r>
               <a:rPr sz="900">
@@ -5304,7 +5309,7 @@
                   <a:srgbClr val="7F8C8D"/>
                 </a:solidFill>
               </a:rPr>
-              <a:t>  (2026-09-05)</a:t>
+              <a:t>  (2026-09-06)</a:t>
             </a:r>
           </a:p>
         </p:txBody>
@@ -5346,7 +5351,7 @@
                 </a:solidFill>
                 <a:hlinkClick r:id="rId5"/>
               </a:rPr>
-              <a:t>https://qiita.com/NaokiIshimura/items/9cd4585a7fa902bd989c</a:t>
+              <a:t>https://qiita.com/riskpw/items/38f781211549479d22e7</a:t>
             </a:r>
           </a:p>
         </p:txBody>
@@ -5379,7 +5384,7 @@
                   <a:srgbClr val="7F8C8D"/>
                 </a:solidFill>
               </a:rPr>
-              <a:t>Claude Code の v2.1.252 〜 v2.1.261（全6リリース）の CHANGELOG をまとめました。今回は新しいデフォルトモデル Claude Fable 5.1 の追加と、会話横に差分を表示する  パネルが目玉です。</a:t>
+              <a:t>手元の環境に、チャットだけでなくエージェントタスクや MCP ツールまで含んだ AI ワークスペースを立てる手順です。本線の構成は 自分で運用する vLLM を LiteLLM の後ろに置く 形で、既定のローカルモデルは vLLM 経由の </a:t>
             </a:r>
           </a:p>
         </p:txBody>
@@ -5594,7 +5599,7 @@
                   <a:srgbClr val="7F8C8D"/>
                 </a:solidFill>
               </a:rPr>
-              <a:t>※ 他 63 件は JSON アーカイブを参照</a:t>
+              <a:t>※ 他 70 件は JSON アーカイブを参照</a:t>
             </a:r>
           </a:p>
         </p:txBody>
@@ -5635,7 +5640,7 @@
                   <a:srgbClr val="FFFFFF"/>
                 </a:solidFill>
               </a:rPr>
-              <a:t>AIに毎日ブログを書かせたら、実質同じ記事を2本公開していた — タイトル一致では防げない重複の潰し方</a:t>
+              <a:t>AIエージェントの評価を実装する：Evalsの3層構造とpytest設計</a:t>
             </a:r>
             <a:r>
               <a:rPr sz="900">
@@ -5643,7 +5648,7 @@
                   <a:srgbClr val="7F8C8D"/>
                 </a:solidFill>
               </a:rPr>
-              <a:t>  (2026-09-05)</a:t>
+              <a:t>  (2026-09-06)</a:t>
             </a:r>
           </a:p>
         </p:txBody>
@@ -5685,7 +5690,7 @@
                 </a:solidFill>
                 <a:hlinkClick r:id="rId2"/>
               </a:rPr>
-              <a:t>https://qiita.com/Kujira_AI/items/924ef2f249268dc2f049</a:t>
+              <a:t>https://qiita.com/Xim2jp/items/b8f56bc9387658ae58dd</a:t>
             </a:r>
           </a:p>
         </p:txBody>
@@ -5718,9 +5723,9 @@
                   <a:srgbClr val="7F8C8D"/>
                 </a:solidFill>
               </a:rPr>
-              <a:t>何が起きたか
-私は本業のエンジニアではないが、Claude Code を相棒にして個人ブログを毎日更新している。記事の執筆はAIに任せ、私は題材の方針と公開判断だけを持っている。
-ある日、公開済みの記事に「実質同じ内容の記事が2本ある」</a:t>
+              <a:t>※本稿は、当方ブログの紹介です。全文はこちらへどうぞ。
+https://shinichi.noguchi.jp.net/blog/2026-09-05-agent-evals-in-production.html
+AIエージェントを本番運</a:t>
             </a:r>
           </a:p>
         </p:txBody>
@@ -5761,7 +5766,7 @@
                   <a:srgbClr val="FFFFFF"/>
                 </a:solidFill>
               </a:rPr>
-              <a:t>Web 検索・WebFetch のツール権限がこのセッションでは許可されておらず、参考URLの記事本文を取得できませんでした。</a:t>
+              <a:t>Git と pytest で AI コーディングエージェントの開発用テストと独立評価を分ける</a:t>
             </a:r>
             <a:r>
               <a:rPr sz="900">
@@ -5769,7 +5774,7 @@
                   <a:srgbClr val="7F8C8D"/>
                 </a:solidFill>
               </a:rPr>
-              <a:t>  (2026-09-05)</a:t>
+              <a:t>  (2026-09-06)</a:t>
             </a:r>
           </a:p>
         </p:txBody>
@@ -5811,7 +5816,7 @@
                 </a:solidFill>
                 <a:hlinkClick r:id="rId3"/>
               </a:rPr>
-              <a:t>https://qiita.com/syun136_616/items/213cb24a4360720a6766</a:t>
+              <a:t>https://qiita.com/ynakayama/items/82ace591e496a11ec33a</a:t>
             </a:r>
           </a:p>
         </p:txBody>
@@ -5844,8 +5849,8 @@
                   <a:srgbClr val="7F8C8D"/>
                 </a:solidFill>
               </a:rPr>
-              <a:t>Web 検索・WebFetch のツール権限がこのセッションでは許可されておらず、参考URLの記事本文を取得できませんでした。
-この題材（Anthropicのコマース用エージェントのオープンソース化）は私の知識のカットオフ（2026年1月</a:t>
+              <a:t>AI コーディングエージェントでは開発用テストと採用評価を分ける
+AI コーディングエージェントは、コードを書くだけでなく、リポジトリを読み、ファイルを編集し、テストを実行して失敗結果を次の修正へ利用できます。SWE-agent でも、エ</a:t>
             </a:r>
           </a:p>
         </p:txBody>
@@ -5886,7 +5891,7 @@
                   <a:srgbClr val="FFFFFF"/>
                 </a:solidFill>
               </a:rPr>
-              <a:t>Claude Code でつまずいたときの切り分けメモ（2026-09-05）</a:t>
+              <a:t>構造力学パズル「SigmaZero」を AI と作った 196 日・952 コミット—Unity教科書の勉強から Claude Code のエージェント組織運営…</a:t>
             </a:r>
             <a:r>
               <a:rPr sz="900">
@@ -5936,7 +5941,7 @@
                 </a:solidFill>
                 <a:hlinkClick r:id="rId4"/>
               </a:rPr>
-              <a:t>https://qiita.com/homhom44/items/5ba74834713a512b4840</a:t>
+              <a:t>https://qiita.com/Oborova/items/95b314104ec0538f9b04</a:t>
             </a:r>
           </a:p>
         </p:txBody>
@@ -5969,7 +5974,10 @@
                   <a:srgbClr val="7F8C8D"/>
                 </a:solidFill>
               </a:rPr>
-              <a:t>Claude Code を使っていて詰まったときの切り分けメモです。GitHub Issues に実際に報告されている症状のうち、複数人が同じことを踏んでいるものを選び、手元で実際にコマンドを叩いて確認した範囲だけを書いています。本文は P</a:t>
+              <a:t>はじめに
+2026年9月5日、個人開発してきた構造力学パズルゲーム『SigmaZero』の v1.0.0 を itch.io で Web 公開しました。
+https://oborova.itch.io/sigmazero
+トラス構造（</a:t>
             </a:r>
           </a:p>
         </p:txBody>
@@ -6010,7 +6018,7 @@
                   <a:srgbClr val="FFFFFF"/>
                 </a:solidFill>
               </a:rPr>
-              <a:t>「1+1=2」から AI Agent まで #00</a:t>
+              <a:t>Claude Codeはロボット三原則の夢を見るか</a:t>
             </a:r>
             <a:r>
               <a:rPr sz="900">
@@ -6060,7 +6068,7 @@
                 </a:solidFill>
                 <a:hlinkClick r:id="rId5"/>
               </a:rPr>
-              <a:t>https://qiita.com/Snow315/items/5fdbe6c6dfb25304b259</a:t>
+              <a:t>https://qiita.com/masakai/items/ea1277a9aef6f8a1d512</a:t>
             </a:r>
           </a:p>
         </p:txBody>
@@ -6093,10 +6101,8 @@
                   <a:srgbClr val="7F8C8D"/>
                 </a:solidFill>
               </a:rPr>
-              <a:t>「1+1=2」から AI Agent まで 00
-とりあえず、やってみよう
-最近、AIがものすごい勢いで広がっている。
-仕事でも日常生活でもAIを目にすることが増えて、自分のような普通のITエンジニアにとっても、もう無関係ではない気が</a:t>
+              <a:t>この記事は、AIエージェントに対するガードやハーネスとは何なのかを考えていたところから始まっています。「AIのハーネスといえば、ロボット三原則だよな」というノリです。エージェントの外側に置く制約は、どこまで機能するのか。
+三原則のような固</a:t>
             </a:r>
           </a:p>
         </p:txBody>
@@ -6318,7 +6324,7 @@
                   <a:srgbClr val="FFFFFF"/>
                 </a:solidFill>
               </a:rPr>
-              <a:t>AI時代に求められるFDEというエンジニア像</a:t>
+              <a:t>「ネットはフェイク、メディアは正しい？」から考える情報社会の設計 ― 相互監査できる情報インフラへ : システム設計視点の行動経済学 (25)</a:t>
             </a:r>
             <a:r>
               <a:rPr sz="900">
@@ -6326,7 +6332,7 @@
                   <a:srgbClr val="7F8C8D"/>
                 </a:solidFill>
               </a:rPr>
-              <a:t>  (2026-09-05)</a:t>
+              <a:t>  (2026-09-06)</a:t>
             </a:r>
           </a:p>
         </p:txBody>
@@ -6368,7 +6374,7 @@
                 </a:solidFill>
                 <a:hlinkClick r:id="rId2"/>
               </a:rPr>
-              <a:t>https://qiita.com/blue_islands/items/d65fcd34c40302dbaa9e</a:t>
+              <a:t>https://qiita.com/maskot1977/items/8ef0ba599c0f04bf3639</a:t>
             </a:r>
           </a:p>
         </p:txBody>
@@ -6401,9 +6407,9 @@
                   <a:srgbClr val="7F8C8D"/>
                 </a:solidFill>
               </a:rPr>
-              <a:t>生成AIの普及によって、「エンジニアの仕事がAIに奪われる」という話を聞くことが増えました。
-一方で、企業のAI活用は急速に進み、AIを実際の業務に導入できるエンジニアの需要は高まっています。
-エンジニアが余ると言われる一方で、エンジニ</a:t>
+              <a:t>user:
+「システム設計視点の行動経済学」、第25回を始めましょう。今回は「マスメディアの役割」を深掘りしたいと思います。その前に、まず前回の復習として、
+官僚機構を「守る組織」から「学習する組織」へ ― 日本の行政をアップデートす</a:t>
             </a:r>
           </a:p>
         </p:txBody>
@@ -6444,7 +6450,7 @@
                   <a:srgbClr val="FFFFFF"/>
                 </a:solidFill>
               </a:rPr>
-              <a:t>9/5、今日のセキュリティニュース</a:t>
+              <a:t># 【AI活用】スライド生成ガチャから抜ける。CodexとGemini Notebookで報告スライドを作る実務フロー</a:t>
             </a:r>
             <a:r>
               <a:rPr sz="900">
@@ -6494,7 +6500,7 @@
                 </a:solidFill>
                 <a:hlinkClick r:id="rId3"/>
               </a:rPr>
-              <a:t>https://qiita.com/Kerdy/items/18fe414da694203d8393</a:t>
+              <a:t>https://qiita.com/jjworks/items/d6a29d600da5f9b53877</a:t>
             </a:r>
           </a:p>
         </p:txBody>
@@ -6527,10 +6533,11 @@
                   <a:srgbClr val="7F8C8D"/>
                 </a:solidFill>
               </a:rPr>
-              <a:t>&gt; この記事は、note掲載記事の転載です。
-!見出し画像
-おはようございます、かーでぃです。
-本記事は、様々なネットニュースサイトからセキュリティ記事を集めて提供している”セキュリティ関連ニュースRSS”から、気になったニュースをピッ</a:t>
+              <a:t>!FT-020-qiita-slide-gacha-header.png
+はじめに
+&gt; 「この期間、何をしていましたか？」
+定期ヒアリングで毎回聞かれる質問なのに、いざ答えようとすると、その場で思い出せたことしか話せない。
+会議、調整</a:t>
             </a:r>
           </a:p>
         </p:txBody>
@@ -6571,7 +6578,7 @@
                   <a:srgbClr val="FFFFFF"/>
                 </a:solidFill>
               </a:rPr>
-              <a:t>AIに「本音で」社長を語らせたら、開発者の急所を抉られて「関係のIaC」に着地した話</a:t>
+              <a:t>DBクライアントのAI補助を、なぜローカルLLMでも動かせるようにしたのか</a:t>
             </a:r>
             <a:r>
               <a:rPr sz="900">
@@ -6612,7 +6619,7 @@
                   <a:srgbClr val="27AE60"/>
                 </a:solidFill>
               </a:rPr>
-              <a:t>[Qiita]  </a:t>
+              <a:t>[Zenn]  </a:t>
             </a:r>
             <a:r>
               <a:rPr sz="800">
@@ -6621,7 +6628,7 @@
                 </a:solidFill>
                 <a:hlinkClick r:id="rId4"/>
               </a:rPr>
-              <a:t>https://qiita.com/kenichiyoshioka/items/f3a68b2df4f979ad08be</a:t>
+              <a:t>https://zenn.dev/libredb/articles/0fd0cf7f85f015</a:t>
             </a:r>
           </a:p>
         </p:txBody>
@@ -6654,10 +6661,7 @@
                   <a:srgbClr val="7F8C8D"/>
                 </a:solidFill>
               </a:rPr>
-              <a:t>&lt;!-- ★番外編・実録座談会。代表の意見を待って仕上げる素材版(2026-09-05)。公開前に qiitalint.py 必須 --&gt;
-&gt; 📚 番外編：AI二体で、雇い主を本音で語る座談会
----
-これは何か（脚色は、ひとつもあり</a:t>
+              <a:t>筆者はLibreDB StudioというOSS（MITライセンス）の開発チームにいる。自分たちのプロダクトの設計の話なので、そこは先に明かしておく。売り込みたいわけではなく、「DBクライアントのAI補助を、クラウドのLLMだけでなくローカル</a:t>
             </a:r>
           </a:p>
         </p:txBody>
@@ -6698,7 +6702,7 @@
                   <a:srgbClr val="FFFFFF"/>
                 </a:solidFill>
               </a:rPr>
-              <a:t>LLMは魔法じゃない — 本番で構造化をやって踏んだ4つの穴（既存のテストでは拾えない）</a:t>
+              <a:t>生成AIは「初期条件の最適化」から「生成軌道の設計」へ</a:t>
             </a:r>
             <a:r>
               <a:rPr sz="900">
@@ -6739,7 +6743,7 @@
                   <a:srgbClr val="27AE60"/>
                 </a:solidFill>
               </a:rPr>
-              <a:t>[Qiita]  </a:t>
+              <a:t>[Zenn]  </a:t>
             </a:r>
             <a:r>
               <a:rPr sz="800">
@@ -6748,7 +6752,7 @@
                 </a:solidFill>
                 <a:hlinkClick r:id="rId5"/>
               </a:rPr>
-              <a:t>https://qiita.com/kenichiyoshioka/items/62e643337989b8ec905c</a:t>
+              <a:t>https://zenn.dev/albatrosary/articles/8704ed4c2aacb6</a:t>
             </a:r>
           </a:p>
         </p:txBody>
@@ -6781,10 +6785,9 @@
                   <a:srgbClr val="7F8C8D"/>
                 </a:solidFill>
               </a:rPr>
-              <a:t>&gt; 📚 スキルシートと市場価値 シリーズ ⑤：LLM固有の問題とは？
----
-はじめに
-弊社プロダクトのcnvSkillsheet（コンバートスキルシート）ではエンジニアの経歴書（スキルシート）を、Geminiで構造化しています。PD</a:t>
+              <a:t>!
+TL;DR
+生成AIの活用では、いまもプロンプト、System Prompt、Skill、Persona、Few-shot、各種ルールなど、「より良い入力条件」を作ることに多くの努力が向けられている。たしかに初期条件は重要だ。しかし、い</a:t>
             </a:r>
           </a:p>
         </p:txBody>
@@ -6999,7 +7002,7 @@
                   <a:srgbClr val="7F8C8D"/>
                 </a:solidFill>
               </a:rPr>
-              <a:t>※ 他 6 件は JSON アーカイブを参照</a:t>
+              <a:t>※ 他 5 件は JSON アーカイブを参照</a:t>
             </a:r>
           </a:p>
         </p:txBody>
@@ -7040,7 +7043,7 @@
                   <a:srgbClr val="FFFFFF"/>
                 </a:solidFill>
               </a:rPr>
-              <a:t>耳で聞く！Python で学ぶ マクロ経済学 入門 9</a:t>
+              <a:t>AIに「本音で」社長を語らせたら、開発者の急所を抉られて「関係のIaC」に着地した話</a:t>
             </a:r>
             <a:r>
               <a:rPr sz="900">
@@ -7090,7 +7093,7 @@
                 </a:solidFill>
                 <a:hlinkClick r:id="rId2"/>
               </a:rPr>
-              <a:t>https://qiita.com/maskot1977/items/ec2e50adced923fecb94</a:t>
+              <a:t>https://qiita.com/kenichiyoshioka/items/f3a68b2df4f979ad08be</a:t>
             </a:r>
           </a:p>
         </p:txBody>
@@ -7123,7 +7126,10 @@
                   <a:srgbClr val="7F8C8D"/>
                 </a:solidFill>
               </a:rPr>
-              <a:t>&lt;iframe width="560" height="315" src="https://www.youtube.com/embed/NDJUU82dXk" frameborder="0" allow="accelerometer; au</a:t>
+              <a:t>&lt;!-- ★番外編・実録座談会。代表の意見を待って仕上げる素材版(2026-09-05)。公開前に qiitalint.py 必須 --&gt;
+&gt; 📚 番外編：AI二体で、雇い主を本音で語る座談会
+---
+これは何か（脚色は、ひとつもあり</a:t>
             </a:r>
           </a:p>
         </p:txBody>
@@ -7164,7 +7170,7 @@
                   <a:srgbClr val="FFFFFF"/>
                 </a:solidFill>
               </a:rPr>
-              <a:t>【備忘録】初めてスマホアプリを構築・ビルドしてみた</a:t>
+              <a:t>LLMは魔法じゃない — 本番で構造化をやって踏んだ4つの穴（既存のテストでは拾えない）</a:t>
             </a:r>
             <a:r>
               <a:rPr sz="900">
@@ -7172,7 +7178,7 @@
                   <a:srgbClr val="7F8C8D"/>
                 </a:solidFill>
               </a:rPr>
-              <a:t>  (2026-09-04)</a:t>
+              <a:t>  (2026-09-05)</a:t>
             </a:r>
           </a:p>
         </p:txBody>
@@ -7205,7 +7211,7 @@
                   <a:srgbClr val="27AE60"/>
                 </a:solidFill>
               </a:rPr>
-              <a:t>[Zenn]  </a:t>
+              <a:t>[Qiita]  </a:t>
             </a:r>
             <a:r>
               <a:rPr sz="800">
@@ -7214,7 +7220,7 @@
                 </a:solidFill>
                 <a:hlinkClick r:id="rId3"/>
               </a:rPr>
-              <a:t>https://zenn.dev/matsu8/articles/dc85801019be38</a:t>
+              <a:t>https://qiita.com/kenichiyoshioka/items/62e643337989b8ec905c</a:t>
             </a:r>
           </a:p>
         </p:txBody>
@@ -7247,10 +7253,10 @@
                   <a:srgbClr val="7F8C8D"/>
                 </a:solidFill>
               </a:rPr>
-              <a:t>使った技術 - 箇条書き
-フロントエンド: Flutter Dart Android
-バックエンド: Python FastAPI Uvicorn Pydantic REST API / JSON
-LLM: Google Gemini AP</a:t>
+              <a:t>&gt; 📚 スキルシートと市場価値 シリーズ ⑤：LLM固有の問題とは？
+---
+はじめに
+弊社プロダクトのcnvSkillsheet（コンバートスキルシート）ではエンジニアの経歴書（スキルシート）を、Geminiで構造化しています。PD</a:t>
             </a:r>
           </a:p>
         </p:txBody>
@@ -7291,7 +7297,7 @@
                   <a:srgbClr val="FFFFFF"/>
                 </a:solidFill>
               </a:rPr>
-              <a:t>スポーツ分析で活用されるAIモデル入門：データからパフォーマンスを読み解く方法</a:t>
+              <a:t>耳で聞く！Python で学ぶ マクロ経済学 入門 9</a:t>
             </a:r>
             <a:r>
               <a:rPr sz="900">
@@ -7299,7 +7305,7 @@
                   <a:srgbClr val="7F8C8D"/>
                 </a:solidFill>
               </a:rPr>
-              <a:t>  (2026-09-04)</a:t>
+              <a:t>  (2026-09-05)</a:t>
             </a:r>
           </a:p>
         </p:txBody>
@@ -7341,6 +7347,130 @@
                 </a:solidFill>
                 <a:hlinkClick r:id="rId4"/>
               </a:rPr>
+              <a:t>https://qiita.com/maskot1977/items/ec2e50adced923fecb94</a:t>
+            </a:r>
+          </a:p>
+        </p:txBody>
+      </p:sp>
+      <p:sp>
+        <p:nvSpPr>
+          <p:cNvPr id="15" name="TextBox 14"/>
+          <p:cNvSpPr txBox="1"/>
+          <p:nvPr/>
+        </p:nvSpPr>
+        <p:spPr>
+          <a:xfrm>
+            <a:off x="640080" y="4613056"/>
+            <a:ext cx="11155680" cy="427253"/>
+          </a:xfrm>
+          <a:prstGeom prst="rect">
+            <a:avLst/>
+          </a:prstGeom>
+          <a:noFill/>
+        </p:spPr>
+        <p:txBody>
+          <a:bodyPr wrap="square">
+            <a:spAutoFit/>
+          </a:bodyPr>
+          <a:lstStyle/>
+          <a:p>
+            <a:r>
+              <a:rPr sz="900">
+                <a:solidFill>
+                  <a:srgbClr val="7F8C8D"/>
+                </a:solidFill>
+              </a:rPr>
+              <a:t>&lt;iframe width="560" height="315" src="https://www.youtube.com/embed/NDJUU82dXk" frameborder="0" allow="accelerometer; au</a:t>
+            </a:r>
+          </a:p>
+        </p:txBody>
+      </p:sp>
+      <p:sp>
+        <p:nvSpPr>
+          <p:cNvPr id="16" name="TextBox 15"/>
+          <p:cNvSpPr txBox="1"/>
+          <p:nvPr/>
+        </p:nvSpPr>
+        <p:spPr>
+          <a:xfrm>
+            <a:off x="365760" y="5040309"/>
+            <a:ext cx="11430000" cy="569671"/>
+          </a:xfrm>
+          <a:prstGeom prst="rect">
+            <a:avLst/>
+          </a:prstGeom>
+          <a:noFill/>
+        </p:spPr>
+        <p:txBody>
+          <a:bodyPr wrap="square">
+            <a:spAutoFit/>
+          </a:bodyPr>
+          <a:lstStyle/>
+          <a:p>
+            <a:r>
+              <a:rPr sz="1000">
+                <a:solidFill>
+                  <a:srgbClr val="27AE60"/>
+                </a:solidFill>
+              </a:rPr>
+              <a:t>▶ </a:t>
+            </a:r>
+            <a:r>
+              <a:rPr sz="1200" b="1">
+                <a:solidFill>
+                  <a:srgbClr val="FFFFFF"/>
+                </a:solidFill>
+              </a:rPr>
+              <a:t>スポーツ分析で活用されるAIモデル入門：データからパフォーマンスを読み解く方法</a:t>
+            </a:r>
+            <a:r>
+              <a:rPr sz="900">
+                <a:solidFill>
+                  <a:srgbClr val="7F8C8D"/>
+                </a:solidFill>
+              </a:rPr>
+              <a:t>  (2026-09-04)</a:t>
+            </a:r>
+          </a:p>
+        </p:txBody>
+      </p:sp>
+      <p:sp>
+        <p:nvSpPr>
+          <p:cNvPr id="17" name="TextBox 16"/>
+          <p:cNvSpPr txBox="1"/>
+          <p:nvPr/>
+        </p:nvSpPr>
+        <p:spPr>
+          <a:xfrm>
+            <a:off x="640080" y="5609981"/>
+            <a:ext cx="11155680" cy="341802"/>
+          </a:xfrm>
+          <a:prstGeom prst="rect">
+            <a:avLst/>
+          </a:prstGeom>
+          <a:noFill/>
+        </p:spPr>
+        <p:txBody>
+          <a:bodyPr wrap="none">
+            <a:spAutoFit/>
+          </a:bodyPr>
+          <a:lstStyle/>
+          <a:p>
+            <a:r>
+              <a:rPr sz="800" b="1">
+                <a:solidFill>
+                  <a:srgbClr val="27AE60"/>
+                </a:solidFill>
+              </a:rPr>
+              <a:t>[Qiita]  </a:t>
+            </a:r>
+            <a:r>
+              <a:rPr sz="800">
+                <a:solidFill>
+                  <a:srgbClr val="5DADE8"/>
+                </a:solidFill>
+                <a:hlinkClick r:id="rId5"/>
+              </a:rPr>
               <a:t>https://qiita.com/wow88my_official/items/5b3ce2539a5996f315df</a:t>
             </a:r>
           </a:p>
@@ -7348,13 +7478,13 @@
       </p:sp>
       <p:sp>
         <p:nvSpPr>
-          <p:cNvPr id="15" name="TextBox 14"/>
-          <p:cNvSpPr txBox="1"/>
-          <p:nvPr/>
-        </p:nvSpPr>
-        <p:spPr>
-          <a:xfrm>
-            <a:off x="640080" y="4613056"/>
+          <p:cNvPr id="18" name="TextBox 17"/>
+          <p:cNvSpPr txBox="1"/>
+          <p:nvPr/>
+        </p:nvSpPr>
+        <p:spPr>
+          <a:xfrm>
+            <a:off x="640080" y="5951783"/>
             <a:ext cx="11155680" cy="427253"/>
           </a:xfrm>
           <a:prstGeom prst="rect">
@@ -7377,131 +7507,6 @@
               <a:t>スポーツ分野では、試合結果だけでなく、選手の走行距離、シュート位置、パス成功率、ポゼッション、心拍数など、さまざまなデータが収集されるようになっています。
 こうしたデータを人間だけで分析するには限界があります。
 そこで活用されているのが</a:t>
-            </a:r>
-          </a:p>
-        </p:txBody>
-      </p:sp>
-      <p:sp>
-        <p:nvSpPr>
-          <p:cNvPr id="16" name="TextBox 15"/>
-          <p:cNvSpPr txBox="1"/>
-          <p:nvPr/>
-        </p:nvSpPr>
-        <p:spPr>
-          <a:xfrm>
-            <a:off x="365760" y="5040309"/>
-            <a:ext cx="11430000" cy="569671"/>
-          </a:xfrm>
-          <a:prstGeom prst="rect">
-            <a:avLst/>
-          </a:prstGeom>
-          <a:noFill/>
-        </p:spPr>
-        <p:txBody>
-          <a:bodyPr wrap="square">
-            <a:spAutoFit/>
-          </a:bodyPr>
-          <a:lstStyle/>
-          <a:p>
-            <a:r>
-              <a:rPr sz="1000">
-                <a:solidFill>
-                  <a:srgbClr val="27AE60"/>
-                </a:solidFill>
-              </a:rPr>
-              <a:t>▶ </a:t>
-            </a:r>
-            <a:r>
-              <a:rPr sz="1200" b="1">
-                <a:solidFill>
-                  <a:srgbClr val="FFFFFF"/>
-                </a:solidFill>
-              </a:rPr>
-              <a:t>フリーランス案件の「求めるスキル」にAIが入り始めた——今、何を準備すべきか</a:t>
-            </a:r>
-            <a:r>
-              <a:rPr sz="900">
-                <a:solidFill>
-                  <a:srgbClr val="7F8C8D"/>
-                </a:solidFill>
-              </a:rPr>
-              <a:t>  (2026-09-04)</a:t>
-            </a:r>
-          </a:p>
-        </p:txBody>
-      </p:sp>
-      <p:sp>
-        <p:nvSpPr>
-          <p:cNvPr id="17" name="TextBox 16"/>
-          <p:cNvSpPr txBox="1"/>
-          <p:nvPr/>
-        </p:nvSpPr>
-        <p:spPr>
-          <a:xfrm>
-            <a:off x="640080" y="5609981"/>
-            <a:ext cx="11155680" cy="341802"/>
-          </a:xfrm>
-          <a:prstGeom prst="rect">
-            <a:avLst/>
-          </a:prstGeom>
-          <a:noFill/>
-        </p:spPr>
-        <p:txBody>
-          <a:bodyPr wrap="none">
-            <a:spAutoFit/>
-          </a:bodyPr>
-          <a:lstStyle/>
-          <a:p>
-            <a:r>
-              <a:rPr sz="800" b="1">
-                <a:solidFill>
-                  <a:srgbClr val="27AE60"/>
-                </a:solidFill>
-              </a:rPr>
-              <a:t>[Zenn]  </a:t>
-            </a:r>
-            <a:r>
-              <a:rPr sz="800">
-                <a:solidFill>
-                  <a:srgbClr val="5DADE8"/>
-                </a:solidFill>
-                <a:hlinkClick r:id="rId5"/>
-              </a:rPr>
-              <a:t>https://zenn.dev/takabo/articles/ai-skill-requirement</a:t>
-            </a:r>
-          </a:p>
-        </p:txBody>
-      </p:sp>
-      <p:sp>
-        <p:nvSpPr>
-          <p:cNvPr id="18" name="TextBox 17"/>
-          <p:cNvSpPr txBox="1"/>
-          <p:nvPr/>
-        </p:nvSpPr>
-        <p:spPr>
-          <a:xfrm>
-            <a:off x="640080" y="5951783"/>
-            <a:ext cx="11155680" cy="427253"/>
-          </a:xfrm>
-          <a:prstGeom prst="rect">
-            <a:avLst/>
-          </a:prstGeom>
-          <a:noFill/>
-        </p:spPr>
-        <p:txBody>
-          <a:bodyPr wrap="square">
-            <a:spAutoFit/>
-          </a:bodyPr>
-          <a:lstStyle/>
-          <a:p>
-            <a:r>
-              <a:rPr sz="900">
-                <a:solidFill>
-                  <a:srgbClr val="7F8C8D"/>
-                </a:solidFill>
-              </a:rPr>
-              <a:t>最近、案件の「求めるスキル」に「AI支援ツールを活用した開発経験」「LLMを用いた実務経験」といった一文をよく見る。まだ全案件の常識ではないが、確実に増えている。募集中案件を言語別に独自調査すると、AIに言及する割合はこうだった。
-言</a:t>
             </a:r>
           </a:p>
         </p:txBody>
@@ -7682,7 +7687,7 @@
                   <a:srgbClr val="FFFFFF"/>
                 </a:solidFill>
               </a:rPr>
-              <a:t>AIガバナンス・セキュリティ・社内ルール　記事一覧　(1 / 2)</a:t>
+              <a:t>AIガバナンス・セキュリティ・社内ルール　記事一覧</a:t>
             </a:r>
           </a:p>
         </p:txBody>
@@ -7723,7 +7728,7 @@
                   <a:srgbClr val="FFFFFF"/>
                 </a:solidFill>
               </a:rPr>
-              <a:t>【プロンプト公開】他のAIが3日後に知る情報を、Grokは「今」教えてくれる。Grok × Xで技術ニュース収集が完全無料で「週10分」に激変した話</a:t>
+              <a:t>OpenAIが「GPT-6 Astra」を発表、コーディング・サイバーセキュリティで最先端性能を主張</a:t>
             </a:r>
             <a:r>
               <a:rPr sz="900">
@@ -7773,7 +7778,7 @@
                 </a:solidFill>
                 <a:hlinkClick r:id="rId2"/>
               </a:rPr>
-              <a:t>https://qiita.com/shinkai_/items/dfc92e02ca1c461ead58</a:t>
+              <a:t>https://qiita.com/picnic/items/139c9f297be67c28566f</a:t>
             </a:r>
           </a:p>
         </p:txBody>
@@ -7807,9 +7812,7 @@
                 </a:solidFill>
               </a:rPr>
               <a:t>はじめに
-AI関連のニュースって、とにかく量が多いですよね。
-毎日のように新しいモデルが発表され、企業の動向がアップデートされ、セキュリティ関連の重大ニュースも次々に流れてきます。  
-そして、そういった情報の「一次情報としての新鮮さ」</a:t>
+2026年9月3日、OpenAI は新世代モデル「GPT-6 Astra」を公式ブログで発表しました。同社は本モデルを「これまでで最も知的かつアラインメントの進んだモデル」と位置付けており、特に コンピュータ操作(compute</a:t>
             </a:r>
           </a:p>
         </p:txBody>
@@ -7850,7 +7853,7 @@
                   <a:srgbClr val="FFFFFF"/>
                 </a:solidFill>
               </a:rPr>
-              <a:t>GPT-6 Astra in code review: Gains, privacy, and cost</a:t>
+              <a:t>vLLMに基づくローカルモデルエンジニアリングパイプラインGatewayの設計と分析</a:t>
             </a:r>
             <a:r>
               <a:rPr sz="900">
@@ -7891,7 +7894,7 @@
                   <a:srgbClr val="E67E22"/>
                 </a:solidFill>
               </a:rPr>
-              <a:t>[HackerNews]  </a:t>
+              <a:t>[Qiita]  </a:t>
             </a:r>
             <a:r>
               <a:rPr sz="800">
@@ -7900,7 +7903,7 @@
                 </a:solidFill>
                 <a:hlinkClick r:id="rId3"/>
               </a:rPr>
-              <a:t>https://www.coderabbit.ai/blog/gpt-6-astra-code-review-evaluation</a:t>
+              <a:t>https://qiita.com/faliye/items/381fe4cf1a740414cc95</a:t>
             </a:r>
           </a:p>
         </p:txBody>
@@ -7933,7 +7936,7 @@
                   <a:srgbClr val="7F8C8D"/>
                 </a:solidFill>
               </a:rPr>
-              <a:t>GPT-6 Astra in code review: Gains, privacy, and cost</a:t>
+              <a:t>Ollamaを使用する際、ローカルでいくつかの中小モデルを起動し、ビジネスCoTは直接これらの小モデルにアクセスします。Ollama環境下のモデルは条件の制限により並行処理が難しく、固定のリクエストは高度に同質化されているため、ニーズに応じ</a:t>
             </a:r>
           </a:p>
         </p:txBody>
@@ -8102,7 +8105,7 @@
                   <a:srgbClr val="FFFFFF"/>
                 </a:solidFill>
               </a:rPr>
-              <a:t>【プロンプトインジェクション】AI時代の「見えない指示」の落とし穴</a:t>
+              <a:t>ChatGPT・Copilot・Gemini… 業務視点でどう選べるか？ ChatAI 13 製品を「8つの独自指標」で比較してみた｜中小企業・管理職のための導…</a:t>
             </a:r>
             <a:r>
               <a:rPr sz="900">
@@ -8143,7 +8146,7 @@
                   <a:srgbClr val="E67E22"/>
                 </a:solidFill>
               </a:rPr>
-              <a:t>[Zenn]  </a:t>
+              <a:t>[Qiita]  </a:t>
             </a:r>
             <a:r>
               <a:rPr sz="800">
@@ -8152,7 +8155,7 @@
                 </a:solidFill>
                 <a:hlinkClick r:id="rId5"/>
               </a:rPr>
-              <a:t>https://zenn.dev/ykbone/articles/202609-prompt-injection</a:t>
+              <a:t>https://qiita.com/songchong/items/78a9d9c28506ff90d331</a:t>
             </a:r>
           </a:p>
         </p:txBody>
@@ -8185,10 +8188,9 @@
                   <a:srgbClr val="7F8C8D"/>
                 </a:solidFill>
               </a:rPr>
-              <a:t>はじめに
-AIエディタやチャットAIに、こんなお願いをしたことはありませんか。
-このURLの記事を読んで、要約して
-私もやったことがあります。ある勉強会にて「その操作が情報漏洩の入り口になりうる」と聞いて、正直ぴんと来ませんでした。読ま</a:t>
+              <a:t>&gt; 「ChatGPT を会社で使って、情報漏洩や著作権は本当に大丈夫なのか？」
+&gt; 「Microsoft 365 Copilot や Gemini も聞くが、うちの業務で本当に役立つのはどれだ？」
+&gt; 「無料版や個人版のまま社員に使わせてい</a:t>
             </a:r>
           </a:p>
         </p:txBody>
@@ -8269,7 +8271,7 @@
             <a:avLst/>
           </a:prstGeom>
           <a:solidFill>
-            <a:srgbClr val="2E86AB"/>
+            <a:srgbClr val="2C3C4E"/>
           </a:solidFill>
           <a:ln>
             <a:noFill/>
@@ -8312,7 +8314,7 @@
             <a:avLst/>
           </a:prstGeom>
           <a:solidFill>
-            <a:srgbClr val="E67E22"/>
+            <a:srgbClr val="7F8C8D"/>
           </a:solidFill>
           <a:ln>
             <a:noFill/>
@@ -8369,7 +8371,7 @@
                   <a:srgbClr val="FFFFFF"/>
                 </a:solidFill>
               </a:rPr>
-              <a:t>AIガバナンス・セキュリティ・社内ルール　記事一覧　(2 / 2)</a:t>
+              <a:t>その他の記事　(1 / 8)</a:t>
             </a:r>
           </a:p>
         </p:txBody>
@@ -8382,43 +8384,35 @@
         </p:nvSpPr>
         <p:spPr>
           <a:xfrm>
-            <a:off x="365760" y="1024128"/>
-            <a:ext cx="11430000" cy="569671"/>
-          </a:xfrm>
-          <a:prstGeom prst="rect">
-            <a:avLst/>
-          </a:prstGeom>
-          <a:noFill/>
-        </p:spPr>
-        <p:txBody>
-          <a:bodyPr wrap="square">
-            <a:spAutoFit/>
-          </a:bodyPr>
-          <a:lstStyle/>
-          <a:p>
-            <a:r>
-              <a:rPr sz="1000">
-                <a:solidFill>
-                  <a:srgbClr val="E67E22"/>
-                </a:solidFill>
-              </a:rPr>
-              <a:t>▶ </a:t>
-            </a:r>
-            <a:r>
-              <a:rPr sz="1200" b="1">
-                <a:solidFill>
-                  <a:srgbClr val="FFFFFF"/>
-                </a:solidFill>
-              </a:rPr>
-              <a:t>ChatGPT・Copilot・Gemini… 業務視点でどう選べるか？ ChatAI 13 製品を「8つの独自指標」で比較してみた｜中小企業・管理職のための導…</a:t>
-            </a:r>
-            <a:r>
-              <a:rPr sz="900">
+            <a:off x="365760" y="1051560"/>
+            <a:ext cx="11430000" cy="214312"/>
+          </a:xfrm>
+          <a:prstGeom prst="rect">
+            <a:avLst/>
+          </a:prstGeom>
+          <a:noFill/>
+        </p:spPr>
+        <p:txBody>
+          <a:bodyPr wrap="none">
+            <a:spAutoFit/>
+          </a:bodyPr>
+          <a:lstStyle/>
+          <a:p>
+            <a:r>
+              <a:rPr sz="800" b="1">
                 <a:solidFill>
                   <a:srgbClr val="7F8C8D"/>
                 </a:solidFill>
               </a:rPr>
-              <a:t>  (2026-09-04)</a:t>
+              <a:t>[Qiita]  </a:t>
+            </a:r>
+            <a:r>
+              <a:rPr sz="1000" b="1">
+                <a:solidFill>
+                  <a:srgbClr val="CCDDEE"/>
+                </a:solidFill>
+              </a:rPr>
+              <a:t>2026年9月6日 今日のQiitaトレンド記事をポッドキャストで聴こう！</a:t>
             </a:r>
           </a:p>
         </p:txBody>
@@ -8431,8 +8425,8 @@
         </p:nvSpPr>
         <p:spPr>
           <a:xfrm>
-            <a:off x="640080" y="1593799"/>
-            <a:ext cx="11155680" cy="341802"/>
+            <a:off x="640080" y="1265872"/>
+            <a:ext cx="11155680" cy="214312"/>
           </a:xfrm>
           <a:prstGeom prst="rect">
             <a:avLst/>
@@ -8446,119 +8440,218 @@
           <a:lstStyle/>
           <a:p>
             <a:r>
+              <a:rPr sz="800">
+                <a:solidFill>
+                  <a:srgbClr val="5DADE8"/>
+                </a:solidFill>
+                <a:hlinkClick r:id="rId2"/>
+              </a:rPr>
+              <a:t>https://qiita.com/ennagara128/items/7487a528d12bb5f9797a</a:t>
+            </a:r>
+          </a:p>
+        </p:txBody>
+      </p:sp>
+      <p:sp>
+        <p:nvSpPr>
+          <p:cNvPr id="8" name="TextBox 7"/>
+          <p:cNvSpPr txBox="1"/>
+          <p:nvPr/>
+        </p:nvSpPr>
+        <p:spPr>
+          <a:xfrm>
+            <a:off x="365760" y="1480185"/>
+            <a:ext cx="11430000" cy="214312"/>
+          </a:xfrm>
+          <a:prstGeom prst="rect">
+            <a:avLst/>
+          </a:prstGeom>
+          <a:noFill/>
+        </p:spPr>
+        <p:txBody>
+          <a:bodyPr wrap="none">
+            <a:spAutoFit/>
+          </a:bodyPr>
+          <a:lstStyle/>
+          <a:p>
+            <a:r>
               <a:rPr sz="800" b="1">
                 <a:solidFill>
-                  <a:srgbClr val="E67E22"/>
+                  <a:srgbClr val="7F8C8D"/>
                 </a:solidFill>
               </a:rPr>
               <a:t>[Qiita]  </a:t>
             </a:r>
             <a:r>
+              <a:rPr sz="1000" b="1">
+                <a:solidFill>
+                  <a:srgbClr val="CCDDEE"/>
+                </a:solidFill>
+              </a:rPr>
+              <a:t>【ローカルLLM】続・精選問題による国産LLM「LLM-jp-4-33B」と「Qwen3.8-27B」の推論性能比較（RTX 5070 Ti + RT…</a:t>
+            </a:r>
+          </a:p>
+        </p:txBody>
+      </p:sp>
+      <p:sp>
+        <p:nvSpPr>
+          <p:cNvPr id="9" name="TextBox 8"/>
+          <p:cNvSpPr txBox="1"/>
+          <p:nvPr/>
+        </p:nvSpPr>
+        <p:spPr>
+          <a:xfrm>
+            <a:off x="640080" y="1694497"/>
+            <a:ext cx="11155680" cy="214312"/>
+          </a:xfrm>
+          <a:prstGeom prst="rect">
+            <a:avLst/>
+          </a:prstGeom>
+          <a:noFill/>
+        </p:spPr>
+        <p:txBody>
+          <a:bodyPr wrap="none">
+            <a:spAutoFit/>
+          </a:bodyPr>
+          <a:lstStyle/>
+          <a:p>
+            <a:r>
               <a:rPr sz="800">
                 <a:solidFill>
                   <a:srgbClr val="5DADE8"/>
                 </a:solidFill>
-                <a:hlinkClick r:id="rId2"/>
-              </a:rPr>
-              <a:t>https://qiita.com/songchong/items/78a9d9c28506ff90d331</a:t>
-            </a:r>
-          </a:p>
-        </p:txBody>
-      </p:sp>
-      <p:sp>
-        <p:nvSpPr>
-          <p:cNvPr id="8" name="TextBox 7"/>
-          <p:cNvSpPr txBox="1"/>
-          <p:nvPr/>
-        </p:nvSpPr>
-        <p:spPr>
-          <a:xfrm>
-            <a:off x="640080" y="1935601"/>
-            <a:ext cx="11155680" cy="427253"/>
-          </a:xfrm>
-          <a:prstGeom prst="rect">
-            <a:avLst/>
-          </a:prstGeom>
-          <a:noFill/>
-        </p:spPr>
-        <p:txBody>
-          <a:bodyPr wrap="square">
-            <a:spAutoFit/>
-          </a:bodyPr>
-          <a:lstStyle/>
-          <a:p>
-            <a:r>
-              <a:rPr sz="900">
+                <a:hlinkClick r:id="rId3"/>
+              </a:rPr>
+              <a:t>https://qiita.com/h-nabata/items/70d7d6ed64e91fce8675</a:t>
+            </a:r>
+          </a:p>
+        </p:txBody>
+      </p:sp>
+      <p:sp>
+        <p:nvSpPr>
+          <p:cNvPr id="10" name="TextBox 9"/>
+          <p:cNvSpPr txBox="1"/>
+          <p:nvPr/>
+        </p:nvSpPr>
+        <p:spPr>
+          <a:xfrm>
+            <a:off x="365760" y="1908810"/>
+            <a:ext cx="11430000" cy="214312"/>
+          </a:xfrm>
+          <a:prstGeom prst="rect">
+            <a:avLst/>
+          </a:prstGeom>
+          <a:noFill/>
+        </p:spPr>
+        <p:txBody>
+          <a:bodyPr wrap="none">
+            <a:spAutoFit/>
+          </a:bodyPr>
+          <a:lstStyle/>
+          <a:p>
+            <a:r>
+              <a:rPr sz="800" b="1">
                 <a:solidFill>
                   <a:srgbClr val="7F8C8D"/>
                 </a:solidFill>
               </a:rPr>
-              <a:t>&gt; 「ChatGPT を会社で使って、情報漏洩や著作権は本当に大丈夫なのか？」
-&gt; 「Microsoft 365 Copilot や Gemini も聞くが、うちの業務で本当に役立つのはどれだ？」
-&gt; 「無料版や個人版のまま社員に使わせてい</a:t>
-            </a:r>
-          </a:p>
-        </p:txBody>
-      </p:sp>
-      <p:sp>
-        <p:nvSpPr>
-          <p:cNvPr id="9" name="TextBox 8"/>
-          <p:cNvSpPr txBox="1"/>
-          <p:nvPr/>
-        </p:nvSpPr>
-        <p:spPr>
-          <a:xfrm>
-            <a:off x="365760" y="2362855"/>
-            <a:ext cx="11430000" cy="569671"/>
-          </a:xfrm>
-          <a:prstGeom prst="rect">
-            <a:avLst/>
-          </a:prstGeom>
-          <a:noFill/>
-        </p:spPr>
-        <p:txBody>
-          <a:bodyPr wrap="square">
-            <a:spAutoFit/>
-          </a:bodyPr>
-          <a:lstStyle/>
-          <a:p>
-            <a:r>
-              <a:rPr sz="1000">
-                <a:solidFill>
-                  <a:srgbClr val="E67E22"/>
-                </a:solidFill>
-              </a:rPr>
-              <a:t>▶ </a:t>
-            </a:r>
-            <a:r>
-              <a:rPr sz="1200" b="1">
-                <a:solidFill>
-                  <a:srgbClr val="FFFFFF"/>
-                </a:solidFill>
-              </a:rPr>
-              <a:t>AIセキュリティ何から勉強すりゃええの？その4</a:t>
-            </a:r>
-            <a:r>
-              <a:rPr sz="900">
+              <a:t>[Qiita]  </a:t>
+            </a:r>
+            <a:r>
+              <a:rPr sz="1000" b="1">
+                <a:solidFill>
+                  <a:srgbClr val="CCDDEE"/>
+                </a:solidFill>
+              </a:rPr>
+              <a:t>【LLM】ベンチマーク用オリジナル上級問題（v1）</a:t>
+            </a:r>
+          </a:p>
+        </p:txBody>
+      </p:sp>
+      <p:sp>
+        <p:nvSpPr>
+          <p:cNvPr id="11" name="TextBox 10"/>
+          <p:cNvSpPr txBox="1"/>
+          <p:nvPr/>
+        </p:nvSpPr>
+        <p:spPr>
+          <a:xfrm>
+            <a:off x="640080" y="2123122"/>
+            <a:ext cx="11155680" cy="214312"/>
+          </a:xfrm>
+          <a:prstGeom prst="rect">
+            <a:avLst/>
+          </a:prstGeom>
+          <a:noFill/>
+        </p:spPr>
+        <p:txBody>
+          <a:bodyPr wrap="none">
+            <a:spAutoFit/>
+          </a:bodyPr>
+          <a:lstStyle/>
+          <a:p>
+            <a:r>
+              <a:rPr sz="800">
+                <a:solidFill>
+                  <a:srgbClr val="5DADE8"/>
+                </a:solidFill>
+                <a:hlinkClick r:id="rId4"/>
+              </a:rPr>
+              <a:t>https://qiita.com/h-nabata/items/8ba25944017b64207792</a:t>
+            </a:r>
+          </a:p>
+        </p:txBody>
+      </p:sp>
+      <p:sp>
+        <p:nvSpPr>
+          <p:cNvPr id="12" name="TextBox 11"/>
+          <p:cNvSpPr txBox="1"/>
+          <p:nvPr/>
+        </p:nvSpPr>
+        <p:spPr>
+          <a:xfrm>
+            <a:off x="365760" y="2337435"/>
+            <a:ext cx="11430000" cy="214312"/>
+          </a:xfrm>
+          <a:prstGeom prst="rect">
+            <a:avLst/>
+          </a:prstGeom>
+          <a:noFill/>
+        </p:spPr>
+        <p:txBody>
+          <a:bodyPr wrap="none">
+            <a:spAutoFit/>
+          </a:bodyPr>
+          <a:lstStyle/>
+          <a:p>
+            <a:r>
+              <a:rPr sz="800" b="1">
                 <a:solidFill>
                   <a:srgbClr val="7F8C8D"/>
                 </a:solidFill>
               </a:rPr>
-              <a:t>  (2026-08-30)</a:t>
-            </a:r>
-          </a:p>
-        </p:txBody>
-      </p:sp>
-      <p:sp>
-        <p:nvSpPr>
-          <p:cNvPr id="10" name="TextBox 9"/>
-          <p:cNvSpPr txBox="1"/>
-          <p:nvPr/>
-        </p:nvSpPr>
-        <p:spPr>
-          <a:xfrm>
-            <a:off x="640080" y="2932526"/>
-            <a:ext cx="11155680" cy="341802"/>
+              <a:t>[Qiita]  </a:t>
+            </a:r>
+            <a:r>
+              <a:rPr sz="1000" b="1">
+                <a:solidFill>
+                  <a:srgbClr val="CCDDEE"/>
+                </a:solidFill>
+              </a:rPr>
+              <a:t>AIと企画を「議論」する方法：AIを使った個人開発のゲームの面白さとモチベーションをClaudeと構造解析</a:t>
+            </a:r>
+          </a:p>
+        </p:txBody>
+      </p:sp>
+      <p:sp>
+        <p:nvSpPr>
+          <p:cNvPr id="13" name="TextBox 12"/>
+          <p:cNvSpPr txBox="1"/>
+          <p:nvPr/>
+        </p:nvSpPr>
+        <p:spPr>
+          <a:xfrm>
+            <a:off x="640080" y="2551747"/>
+            <a:ext cx="11155680" cy="214312"/>
           </a:xfrm>
           <a:prstGeom prst="rect">
             <a:avLst/>
@@ -8572,57 +8665,613 @@
           <a:lstStyle/>
           <a:p>
             <a:r>
+              <a:rPr sz="800">
+                <a:solidFill>
+                  <a:srgbClr val="5DADE8"/>
+                </a:solidFill>
+                <a:hlinkClick r:id="rId5"/>
+              </a:rPr>
+              <a:t>https://qiita.com/notfolder/items/c88f1be667a36ec069b7</a:t>
+            </a:r>
+          </a:p>
+        </p:txBody>
+      </p:sp>
+      <p:sp>
+        <p:nvSpPr>
+          <p:cNvPr id="14" name="TextBox 13"/>
+          <p:cNvSpPr txBox="1"/>
+          <p:nvPr/>
+        </p:nvSpPr>
+        <p:spPr>
+          <a:xfrm>
+            <a:off x="365760" y="2766060"/>
+            <a:ext cx="11430000" cy="214312"/>
+          </a:xfrm>
+          <a:prstGeom prst="rect">
+            <a:avLst/>
+          </a:prstGeom>
+          <a:noFill/>
+        </p:spPr>
+        <p:txBody>
+          <a:bodyPr wrap="none">
+            <a:spAutoFit/>
+          </a:bodyPr>
+          <a:lstStyle/>
+          <a:p>
+            <a:r>
               <a:rPr sz="800" b="1">
                 <a:solidFill>
-                  <a:srgbClr val="E67E22"/>
+                  <a:srgbClr val="7F8C8D"/>
                 </a:solidFill>
               </a:rPr>
               <a:t>[Qiita]  </a:t>
             </a:r>
             <a:r>
+              <a:rPr sz="1000" b="1">
+                <a:solidFill>
+                  <a:srgbClr val="CCDDEE"/>
+                </a:solidFill>
+              </a:rPr>
+              <a:t>CLIPのゼロショットでは当たらない「自分の分類軸」を、線形プローブで作る</a:t>
+            </a:r>
+          </a:p>
+        </p:txBody>
+      </p:sp>
+      <p:sp>
+        <p:nvSpPr>
+          <p:cNvPr id="15" name="TextBox 14"/>
+          <p:cNvSpPr txBox="1"/>
+          <p:nvPr/>
+        </p:nvSpPr>
+        <p:spPr>
+          <a:xfrm>
+            <a:off x="640080" y="2980372"/>
+            <a:ext cx="11155680" cy="214312"/>
+          </a:xfrm>
+          <a:prstGeom prst="rect">
+            <a:avLst/>
+          </a:prstGeom>
+          <a:noFill/>
+        </p:spPr>
+        <p:txBody>
+          <a:bodyPr wrap="none">
+            <a:spAutoFit/>
+          </a:bodyPr>
+          <a:lstStyle/>
+          <a:p>
+            <a:r>
               <a:rPr sz="800">
                 <a:solidFill>
                   <a:srgbClr val="5DADE8"/>
                 </a:solidFill>
-                <a:hlinkClick r:id="rId3"/>
-              </a:rPr>
-              <a:t>https://qiita.com/mikihitooooo/items/d43a58615e948002d70b</a:t>
-            </a:r>
-          </a:p>
-        </p:txBody>
-      </p:sp>
-      <p:sp>
-        <p:nvSpPr>
-          <p:cNvPr id="11" name="TextBox 10"/>
-          <p:cNvSpPr txBox="1"/>
-          <p:nvPr/>
-        </p:nvSpPr>
-        <p:spPr>
-          <a:xfrm>
-            <a:off x="640080" y="3274329"/>
-            <a:ext cx="11155680" cy="427253"/>
-          </a:xfrm>
-          <a:prstGeom prst="rect">
-            <a:avLst/>
-          </a:prstGeom>
-          <a:noFill/>
-        </p:spPr>
-        <p:txBody>
-          <a:bodyPr wrap="square">
-            <a:spAutoFit/>
-          </a:bodyPr>
-          <a:lstStyle/>
-          <a:p>
-            <a:r>
-              <a:rPr sz="900">
+                <a:hlinkClick r:id="rId6"/>
+              </a:rPr>
+              <a:t>https://qiita.com/shota-droid21/items/25577231762457a0f618</a:t>
+            </a:r>
+          </a:p>
+        </p:txBody>
+      </p:sp>
+      <p:sp>
+        <p:nvSpPr>
+          <p:cNvPr id="16" name="TextBox 15"/>
+          <p:cNvSpPr txBox="1"/>
+          <p:nvPr/>
+        </p:nvSpPr>
+        <p:spPr>
+          <a:xfrm>
+            <a:off x="365760" y="3194685"/>
+            <a:ext cx="11430000" cy="214312"/>
+          </a:xfrm>
+          <a:prstGeom prst="rect">
+            <a:avLst/>
+          </a:prstGeom>
+          <a:noFill/>
+        </p:spPr>
+        <p:txBody>
+          <a:bodyPr wrap="none">
+            <a:spAutoFit/>
+          </a:bodyPr>
+          <a:lstStyle/>
+          <a:p>
+            <a:r>
+              <a:rPr sz="800" b="1">
                 <a:solidFill>
                   <a:srgbClr val="7F8C8D"/>
                 </a:solidFill>
               </a:rPr>
-              <a:t>はじめに
-今回は『A Survey of Attacks on Large Language Models』の IV-A2（Weight-based Attacks）の整理です。
-全然進まないですが根気よく続けます。
-IV-A2 Weig</a:t>
+              <a:t>[Qiita]  </a:t>
+            </a:r>
+            <a:r>
+              <a:rPr sz="1000" b="1">
+                <a:solidFill>
+                  <a:srgbClr val="CCDDEE"/>
+                </a:solidFill>
+              </a:rPr>
+              <a:t>同じ指示、違う画像。画像生成AIモデルの「解釈差」を観測・比較してみた</a:t>
+            </a:r>
+          </a:p>
+        </p:txBody>
+      </p:sp>
+      <p:sp>
+        <p:nvSpPr>
+          <p:cNvPr id="17" name="TextBox 16"/>
+          <p:cNvSpPr txBox="1"/>
+          <p:nvPr/>
+        </p:nvSpPr>
+        <p:spPr>
+          <a:xfrm>
+            <a:off x="640080" y="3408997"/>
+            <a:ext cx="11155680" cy="214312"/>
+          </a:xfrm>
+          <a:prstGeom prst="rect">
+            <a:avLst/>
+          </a:prstGeom>
+          <a:noFill/>
+        </p:spPr>
+        <p:txBody>
+          <a:bodyPr wrap="none">
+            <a:spAutoFit/>
+          </a:bodyPr>
+          <a:lstStyle/>
+          <a:p>
+            <a:r>
+              <a:rPr sz="800">
+                <a:solidFill>
+                  <a:srgbClr val="5DADE8"/>
+                </a:solidFill>
+                <a:hlinkClick r:id="rId7"/>
+              </a:rPr>
+              <a:t>https://qiita.com/Raina-ai/items/65a21dfd1fa885fe719d</a:t>
+            </a:r>
+          </a:p>
+        </p:txBody>
+      </p:sp>
+      <p:sp>
+        <p:nvSpPr>
+          <p:cNvPr id="18" name="TextBox 17"/>
+          <p:cNvSpPr txBox="1"/>
+          <p:nvPr/>
+        </p:nvSpPr>
+        <p:spPr>
+          <a:xfrm>
+            <a:off x="365760" y="3623310"/>
+            <a:ext cx="11430000" cy="214312"/>
+          </a:xfrm>
+          <a:prstGeom prst="rect">
+            <a:avLst/>
+          </a:prstGeom>
+          <a:noFill/>
+        </p:spPr>
+        <p:txBody>
+          <a:bodyPr wrap="none">
+            <a:spAutoFit/>
+          </a:bodyPr>
+          <a:lstStyle/>
+          <a:p>
+            <a:r>
+              <a:rPr sz="800" b="1">
+                <a:solidFill>
+                  <a:srgbClr val="7F8C8D"/>
+                </a:solidFill>
+              </a:rPr>
+              <a:t>[HackerNews]  </a:t>
+            </a:r>
+            <a:r>
+              <a:rPr sz="1000" b="1">
+                <a:solidFill>
+                  <a:srgbClr val="CCDDEE"/>
+                </a:solidFill>
+              </a:rPr>
+              <a:t>Hikers rescued after using Google Gemini for planning</a:t>
+            </a:r>
+          </a:p>
+        </p:txBody>
+      </p:sp>
+      <p:sp>
+        <p:nvSpPr>
+          <p:cNvPr id="19" name="TextBox 18"/>
+          <p:cNvSpPr txBox="1"/>
+          <p:nvPr/>
+        </p:nvSpPr>
+        <p:spPr>
+          <a:xfrm>
+            <a:off x="640080" y="3837622"/>
+            <a:ext cx="11155680" cy="214312"/>
+          </a:xfrm>
+          <a:prstGeom prst="rect">
+            <a:avLst/>
+          </a:prstGeom>
+          <a:noFill/>
+        </p:spPr>
+        <p:txBody>
+          <a:bodyPr wrap="none">
+            <a:spAutoFit/>
+          </a:bodyPr>
+          <a:lstStyle/>
+          <a:p>
+            <a:r>
+              <a:rPr sz="800">
+                <a:solidFill>
+                  <a:srgbClr val="5DADE8"/>
+                </a:solidFill>
+                <a:hlinkClick r:id="rId8"/>
+              </a:rPr>
+              <a:t>https://techcrunch.com/2026/09/05/hikers-rescued-after-using-google-gemini-for-p…</a:t>
+            </a:r>
+          </a:p>
+        </p:txBody>
+      </p:sp>
+      <p:sp>
+        <p:nvSpPr>
+          <p:cNvPr id="20" name="TextBox 19"/>
+          <p:cNvSpPr txBox="1"/>
+          <p:nvPr/>
+        </p:nvSpPr>
+        <p:spPr>
+          <a:xfrm>
+            <a:off x="365760" y="4051935"/>
+            <a:ext cx="11430000" cy="214312"/>
+          </a:xfrm>
+          <a:prstGeom prst="rect">
+            <a:avLst/>
+          </a:prstGeom>
+          <a:noFill/>
+        </p:spPr>
+        <p:txBody>
+          <a:bodyPr wrap="none">
+            <a:spAutoFit/>
+          </a:bodyPr>
+          <a:lstStyle/>
+          <a:p>
+            <a:r>
+              <a:rPr sz="800" b="1">
+                <a:solidFill>
+                  <a:srgbClr val="7F8C8D"/>
+                </a:solidFill>
+              </a:rPr>
+              <a:t>[Qiita]  </a:t>
+            </a:r>
+            <a:r>
+              <a:rPr sz="1000" b="1">
+                <a:solidFill>
+                  <a:srgbClr val="CCDDEE"/>
+                </a:solidFill>
+              </a:rPr>
+              <a:t>GitHub Actions + Claude API でプルリクに自動レビューコメントを付ける</a:t>
+            </a:r>
+          </a:p>
+        </p:txBody>
+      </p:sp>
+      <p:sp>
+        <p:nvSpPr>
+          <p:cNvPr id="21" name="TextBox 20"/>
+          <p:cNvSpPr txBox="1"/>
+          <p:nvPr/>
+        </p:nvSpPr>
+        <p:spPr>
+          <a:xfrm>
+            <a:off x="640080" y="4266247"/>
+            <a:ext cx="11155680" cy="214312"/>
+          </a:xfrm>
+          <a:prstGeom prst="rect">
+            <a:avLst/>
+          </a:prstGeom>
+          <a:noFill/>
+        </p:spPr>
+        <p:txBody>
+          <a:bodyPr wrap="none">
+            <a:spAutoFit/>
+          </a:bodyPr>
+          <a:lstStyle/>
+          <a:p>
+            <a:r>
+              <a:rPr sz="800">
+                <a:solidFill>
+                  <a:srgbClr val="5DADE8"/>
+                </a:solidFill>
+                <a:hlinkClick r:id="rId9"/>
+              </a:rPr>
+              <a:t>https://qiita.com/Cosoado/items/98734c389ae31ce01f68</a:t>
+            </a:r>
+          </a:p>
+        </p:txBody>
+      </p:sp>
+      <p:sp>
+        <p:nvSpPr>
+          <p:cNvPr id="22" name="TextBox 21"/>
+          <p:cNvSpPr txBox="1"/>
+          <p:nvPr/>
+        </p:nvSpPr>
+        <p:spPr>
+          <a:xfrm>
+            <a:off x="365760" y="4480560"/>
+            <a:ext cx="11430000" cy="214312"/>
+          </a:xfrm>
+          <a:prstGeom prst="rect">
+            <a:avLst/>
+          </a:prstGeom>
+          <a:noFill/>
+        </p:spPr>
+        <p:txBody>
+          <a:bodyPr wrap="none">
+            <a:spAutoFit/>
+          </a:bodyPr>
+          <a:lstStyle/>
+          <a:p>
+            <a:r>
+              <a:rPr sz="800" b="1">
+                <a:solidFill>
+                  <a:srgbClr val="7F8C8D"/>
+                </a:solidFill>
+              </a:rPr>
+              <a:t>[HackerNews]  </a:t>
+            </a:r>
+            <a:r>
+              <a:rPr sz="1000" b="1">
+                <a:solidFill>
+                  <a:srgbClr val="CCDDEE"/>
+                </a:solidFill>
+              </a:rPr>
+              <a:t>You're paying for Claude's thinking and you're not getting it</a:t>
+            </a:r>
+          </a:p>
+        </p:txBody>
+      </p:sp>
+      <p:sp>
+        <p:nvSpPr>
+          <p:cNvPr id="23" name="TextBox 22"/>
+          <p:cNvSpPr txBox="1"/>
+          <p:nvPr/>
+        </p:nvSpPr>
+        <p:spPr>
+          <a:xfrm>
+            <a:off x="640080" y="4694872"/>
+            <a:ext cx="11155680" cy="214312"/>
+          </a:xfrm>
+          <a:prstGeom prst="rect">
+            <a:avLst/>
+          </a:prstGeom>
+          <a:noFill/>
+        </p:spPr>
+        <p:txBody>
+          <a:bodyPr wrap="none">
+            <a:spAutoFit/>
+          </a:bodyPr>
+          <a:lstStyle/>
+          <a:p>
+            <a:r>
+              <a:rPr sz="800">
+                <a:solidFill>
+                  <a:srgbClr val="5DADE8"/>
+                </a:solidFill>
+                <a:hlinkClick r:id="rId10"/>
+              </a:rPr>
+              <a:t>https://gist.github.com/64-megabyte/bc218bd074fa56c26b7dce828adf21a2</a:t>
+            </a:r>
+          </a:p>
+        </p:txBody>
+      </p:sp>
+      <p:sp>
+        <p:nvSpPr>
+          <p:cNvPr id="24" name="TextBox 23"/>
+          <p:cNvSpPr txBox="1"/>
+          <p:nvPr/>
+        </p:nvSpPr>
+        <p:spPr>
+          <a:xfrm>
+            <a:off x="365760" y="4909185"/>
+            <a:ext cx="11430000" cy="214312"/>
+          </a:xfrm>
+          <a:prstGeom prst="rect">
+            <a:avLst/>
+          </a:prstGeom>
+          <a:noFill/>
+        </p:spPr>
+        <p:txBody>
+          <a:bodyPr wrap="none">
+            <a:spAutoFit/>
+          </a:bodyPr>
+          <a:lstStyle/>
+          <a:p>
+            <a:r>
+              <a:rPr sz="800" b="1">
+                <a:solidFill>
+                  <a:srgbClr val="7F8C8D"/>
+                </a:solidFill>
+              </a:rPr>
+              <a:t>[Qiita]  </a:t>
+            </a:r>
+            <a:r>
+              <a:rPr sz="1000" b="1">
+                <a:solidFill>
+                  <a:srgbClr val="CCDDEE"/>
+                </a:solidFill>
+              </a:rPr>
+              <a:t>なぜ、最近のLLMはポケモンを攻略するのが得意なのか？</a:t>
+            </a:r>
+          </a:p>
+        </p:txBody>
+      </p:sp>
+      <p:sp>
+        <p:nvSpPr>
+          <p:cNvPr id="25" name="TextBox 24"/>
+          <p:cNvSpPr txBox="1"/>
+          <p:nvPr/>
+        </p:nvSpPr>
+        <p:spPr>
+          <a:xfrm>
+            <a:off x="640080" y="5123497"/>
+            <a:ext cx="11155680" cy="214312"/>
+          </a:xfrm>
+          <a:prstGeom prst="rect">
+            <a:avLst/>
+          </a:prstGeom>
+          <a:noFill/>
+        </p:spPr>
+        <p:txBody>
+          <a:bodyPr wrap="none">
+            <a:spAutoFit/>
+          </a:bodyPr>
+          <a:lstStyle/>
+          <a:p>
+            <a:r>
+              <a:rPr sz="800">
+                <a:solidFill>
+                  <a:srgbClr val="5DADE8"/>
+                </a:solidFill>
+                <a:hlinkClick r:id="rId11"/>
+              </a:rPr>
+              <a:t>https://qiita.com/pdfractal/items/947efc2ef965d012aa08</a:t>
+            </a:r>
+          </a:p>
+        </p:txBody>
+      </p:sp>
+      <p:sp>
+        <p:nvSpPr>
+          <p:cNvPr id="26" name="TextBox 25"/>
+          <p:cNvSpPr txBox="1"/>
+          <p:nvPr/>
+        </p:nvSpPr>
+        <p:spPr>
+          <a:xfrm>
+            <a:off x="365760" y="5337810"/>
+            <a:ext cx="11430000" cy="214312"/>
+          </a:xfrm>
+          <a:prstGeom prst="rect">
+            <a:avLst/>
+          </a:prstGeom>
+          <a:noFill/>
+        </p:spPr>
+        <p:txBody>
+          <a:bodyPr wrap="none">
+            <a:spAutoFit/>
+          </a:bodyPr>
+          <a:lstStyle/>
+          <a:p>
+            <a:r>
+              <a:rPr sz="800" b="1">
+                <a:solidFill>
+                  <a:srgbClr val="7F8C8D"/>
+                </a:solidFill>
+              </a:rPr>
+              <a:t>[HackerNews]  </a:t>
+            </a:r>
+            <a:r>
+              <a:rPr sz="1000" b="1">
+                <a:solidFill>
+                  <a:srgbClr val="CCDDEE"/>
+                </a:solidFill>
+              </a:rPr>
+              <a:t>The Roadmap of Mathematics for Machine Learning</a:t>
+            </a:r>
+          </a:p>
+        </p:txBody>
+      </p:sp>
+      <p:sp>
+        <p:nvSpPr>
+          <p:cNvPr id="27" name="TextBox 26"/>
+          <p:cNvSpPr txBox="1"/>
+          <p:nvPr/>
+        </p:nvSpPr>
+        <p:spPr>
+          <a:xfrm>
+            <a:off x="640080" y="5552122"/>
+            <a:ext cx="11155680" cy="214312"/>
+          </a:xfrm>
+          <a:prstGeom prst="rect">
+            <a:avLst/>
+          </a:prstGeom>
+          <a:noFill/>
+        </p:spPr>
+        <p:txBody>
+          <a:bodyPr wrap="none">
+            <a:spAutoFit/>
+          </a:bodyPr>
+          <a:lstStyle/>
+          <a:p>
+            <a:r>
+              <a:rPr sz="800">
+                <a:solidFill>
+                  <a:srgbClr val="5DADE8"/>
+                </a:solidFill>
+                <a:hlinkClick r:id="rId12"/>
+              </a:rPr>
+              <a:t>https://thepalindrome.org/p/the-roadmap-of-mathematics-for-machine-learning</a:t>
+            </a:r>
+          </a:p>
+        </p:txBody>
+      </p:sp>
+      <p:sp>
+        <p:nvSpPr>
+          <p:cNvPr id="28" name="TextBox 27"/>
+          <p:cNvSpPr txBox="1"/>
+          <p:nvPr/>
+        </p:nvSpPr>
+        <p:spPr>
+          <a:xfrm>
+            <a:off x="365760" y="5766435"/>
+            <a:ext cx="11430000" cy="214312"/>
+          </a:xfrm>
+          <a:prstGeom prst="rect">
+            <a:avLst/>
+          </a:prstGeom>
+          <a:noFill/>
+        </p:spPr>
+        <p:txBody>
+          <a:bodyPr wrap="none">
+            <a:spAutoFit/>
+          </a:bodyPr>
+          <a:lstStyle/>
+          <a:p>
+            <a:r>
+              <a:rPr sz="800" b="1">
+                <a:solidFill>
+                  <a:srgbClr val="7F8C8D"/>
+                </a:solidFill>
+              </a:rPr>
+              <a:t>[HackerNews]  </a:t>
+            </a:r>
+            <a:r>
+              <a:rPr sz="1000" b="1">
+                <a:solidFill>
+                  <a:srgbClr val="CCDDEE"/>
+                </a:solidFill>
+              </a:rPr>
+              <a:t>An LLM runtime that boots from USB</a:t>
+            </a:r>
+          </a:p>
+        </p:txBody>
+      </p:sp>
+      <p:sp>
+        <p:nvSpPr>
+          <p:cNvPr id="29" name="TextBox 28"/>
+          <p:cNvSpPr txBox="1"/>
+          <p:nvPr/>
+        </p:nvSpPr>
+        <p:spPr>
+          <a:xfrm>
+            <a:off x="640080" y="5980747"/>
+            <a:ext cx="11155680" cy="214312"/>
+          </a:xfrm>
+          <a:prstGeom prst="rect">
+            <a:avLst/>
+          </a:prstGeom>
+          <a:noFill/>
+        </p:spPr>
+        <p:txBody>
+          <a:bodyPr wrap="none">
+            <a:spAutoFit/>
+          </a:bodyPr>
+          <a:lstStyle/>
+          <a:p>
+            <a:r>
+              <a:rPr sz="800">
+                <a:solidFill>
+                  <a:srgbClr val="5DADE8"/>
+                </a:solidFill>
+                <a:hlinkClick r:id="rId13"/>
+              </a:rPr>
+              <a:t>https://nightrun.io/</a:t>
             </a:r>
           </a:p>
         </p:txBody>
@@ -8803,7 +9452,7 @@
                   <a:srgbClr val="FFFFFF"/>
                 </a:solidFill>
               </a:rPr>
-              <a:t>その他の記事　(1 / 7)</a:t>
+              <a:t>その他の記事　(2 / 8)</a:t>
             </a:r>
           </a:p>
         </p:txBody>
@@ -8836,7 +9485,7 @@
                   <a:srgbClr val="7F8C8D"/>
                 </a:solidFill>
               </a:rPr>
-              <a:t>[Qiita]  </a:t>
+              <a:t>[HackerNews]  </a:t>
             </a:r>
             <a:r>
               <a:rPr sz="1000" b="1">
@@ -8844,7 +9493,7 @@
                   <a:srgbClr val="CCDDEE"/>
                 </a:solidFill>
               </a:rPr>
-              <a:t>化合物の水溶解度を機械学習で予測してみる⑤：SHAP による解釈と文献との比較</a:t>
+              <a:t>Show HN: Phntm-ONE: I built a local AI desk assistant</a:t>
             </a:r>
           </a:p>
         </p:txBody>
@@ -8878,7 +9527,7 @@
                 </a:solidFill>
                 <a:hlinkClick r:id="rId2"/>
               </a:rPr>
-              <a:t>https://qiita.com/828rimo/items/6b7deeb6ed7088049af4</a:t>
+              <a:t>https://www.phntmcore.com/</a:t>
             </a:r>
           </a:p>
         </p:txBody>
@@ -8911,7 +9560,7 @@
                   <a:srgbClr val="7F8C8D"/>
                 </a:solidFill>
               </a:rPr>
-              <a:t>[Qiita]  </a:t>
+              <a:t>[HackerNews]  </a:t>
             </a:r>
             <a:r>
               <a:rPr sz="1000" b="1">
@@ -8919,7 +9568,7 @@
                   <a:srgbClr val="CCDDEE"/>
                 </a:solidFill>
               </a:rPr>
-              <a:t>会計システムを作ってみよう</a:t>
+              <a:t>LLMs as a Cognitive Virus</a:t>
             </a:r>
           </a:p>
         </p:txBody>
@@ -8953,7 +9602,7 @@
                 </a:solidFill>
                 <a:hlinkClick r:id="rId3"/>
               </a:rPr>
-              <a:t>https://qiita.com/keiarr/items/271b1f27e5d79c1ca406</a:t>
+              <a:t>https://arxiv.org/abs/2609.03344</a:t>
             </a:r>
           </a:p>
         </p:txBody>
@@ -8986,7 +9635,7 @@
                   <a:srgbClr val="7F8C8D"/>
                 </a:solidFill>
               </a:rPr>
-              <a:t>[Qiita]  </a:t>
+              <a:t>[Zenn]  </a:t>
             </a:r>
             <a:r>
               <a:rPr sz="1000" b="1">
@@ -8994,7 +9643,7 @@
                   <a:srgbClr val="CCDDEE"/>
                 </a:solidFill>
               </a:rPr>
-              <a:t>クラウドLLMとローカルLLMをどう一元管理するか</a:t>
+              <a:t>「Ollamaで動く」はずだったK2 Horizon — 16GB GPUで確かめたら、動いたのはvLLMだけだった</a:t>
             </a:r>
           </a:p>
         </p:txBody>
@@ -9028,7 +9677,7 @@
                 </a:solidFill>
                 <a:hlinkClick r:id="rId4"/>
               </a:rPr>
-              <a:t>https://qiita.com/lykuro/items/667b30671c620225a916</a:t>
+              <a:t>https://zenn.dev/jinno_ai/articles/k2-horizon-local-verify</a:t>
             </a:r>
           </a:p>
         </p:txBody>
@@ -9069,7 +9718,7 @@
                   <a:srgbClr val="CCDDEE"/>
                 </a:solidFill>
               </a:rPr>
-              <a:t>AIとつくる日本語プログラミング言語Aoi （あおい）（ステップ９）～ 中間表現（IR）の最小実装～</a:t>
+              <a:t>Claudeのアーティファクトがすごい</a:t>
             </a:r>
           </a:p>
         </p:txBody>
@@ -9103,7 +9752,7 @@
                 </a:solidFill>
                 <a:hlinkClick r:id="rId5"/>
               </a:rPr>
-              <a:t>https://qiita.com/mylifewithviolin/items/a787e4a85866fe52074f</a:t>
+              <a:t>https://qiita.com/sagochiko/items/bd48bee62e1fed9c65f3</a:t>
             </a:r>
           </a:p>
         </p:txBody>
@@ -9144,7 +9793,7 @@
                   <a:srgbClr val="CCDDEE"/>
                 </a:solidFill>
               </a:rPr>
-              <a:t>最もアラインしたAIが、なぜ危険度Critical？GPT-6 Astraの矛盾</a:t>
+              <a:t>【AIの取扱説明書 第1章】AIは流暢に間違える ― 生成AIと付き合うために知っておきたい3つの特性</a:t>
             </a:r>
           </a:p>
         </p:txBody>
@@ -9178,7 +9827,7 @@
                 </a:solidFill>
                 <a:hlinkClick r:id="rId6"/>
               </a:rPr>
-              <a:t>https://qiita.com/kinamocchi_tech/items/41704c6901b395121dab</a:t>
+              <a:t>https://qiita.com/tadanok/items/4503a8b9b73cf8fd00fe</a:t>
             </a:r>
           </a:p>
         </p:txBody>
@@ -9219,7 +9868,7 @@
                   <a:srgbClr val="CCDDEE"/>
                 </a:solidFill>
               </a:rPr>
-              <a:t>Claude API の Structured Outputs で JSON パースエラーを撲滅する実装手順 — beta ヘッダー・スキーマ制約・初…</a:t>
+              <a:t>MacのローカルLLMを遅くしていたのはモデルではなくテンソルの次元だった</a:t>
             </a:r>
           </a:p>
         </p:txBody>
@@ -9253,7 +9902,7 @@
                 </a:solidFill>
                 <a:hlinkClick r:id="rId7"/>
               </a:rPr>
-              <a:t>https://qiita.com/yureki_lab/items/44d9155ebe7a4db804ab</a:t>
+              <a:t>https://qiita.com/emi_ndk/items/a17238b39c34c25453f5</a:t>
             </a:r>
           </a:p>
         </p:txBody>
@@ -9286,7 +9935,7 @@
                   <a:srgbClr val="7F8C8D"/>
                 </a:solidFill>
               </a:rPr>
-              <a:t>[Qiita]  </a:t>
+              <a:t>[Zenn]  </a:t>
             </a:r>
             <a:r>
               <a:rPr sz="1000" b="1">
@@ -9294,7 +9943,7 @@
                   <a:srgbClr val="CCDDEE"/>
                 </a:solidFill>
               </a:rPr>
-              <a:t>なぜ、OpenAIのGPT-6 Astraの広告映像は滑稽なのか？</a:t>
+              <a:t>レナード・シェルビーとChatGPTの奇妙な共通点：2000年の映画「メメント」が予言していたLLMアーキテクチャ</a:t>
             </a:r>
           </a:p>
         </p:txBody>
@@ -9328,7 +9977,7 @@
                 </a:solidFill>
                 <a:hlinkClick r:id="rId8"/>
               </a:rPr>
-              <a:t>https://qiita.com/pdfractal/items/3aa92efb61341b7c1e19</a:t>
+              <a:t>https://zenn.dev/cevheri/articles/75314bc8d12eac</a:t>
             </a:r>
           </a:p>
         </p:txBody>
@@ -9361,7 +10010,7 @@
                   <a:srgbClr val="7F8C8D"/>
                 </a:solidFill>
               </a:rPr>
-              <a:t>[Qiita]  </a:t>
+              <a:t>[Zenn]  </a:t>
             </a:r>
             <a:r>
               <a:rPr sz="1000" b="1">
@@ -9369,7 +10018,7 @@
                   <a:srgbClr val="CCDDEE"/>
                 </a:solidFill>
               </a:rPr>
-              <a:t>クレジットは「お金」じゃなくて「滑走路」だった — 相棒AIが見た、個人SaaSのクレジットの使い方</a:t>
+              <a:t>AIの回答内容を比較させるサービス「Arena」</a:t>
             </a:r>
           </a:p>
         </p:txBody>
@@ -9403,7 +10052,7 @@
                 </a:solidFill>
                 <a:hlinkClick r:id="rId9"/>
               </a:rPr>
-              <a:t>https://qiita.com/kenichiyoshioka/items/3d616a9312120aa2f2e2</a:t>
+              <a:t>https://zenn.dev/ayaextech_fill/articles/what-is-arena-ai</a:t>
             </a:r>
           </a:p>
         </p:txBody>
@@ -9436,7 +10085,7 @@
                   <a:srgbClr val="7F8C8D"/>
                 </a:solidFill>
               </a:rPr>
-              <a:t>[Qiita]  </a:t>
+              <a:t>[Zenn]  </a:t>
             </a:r>
             <a:r>
               <a:rPr sz="1000" b="1">
@@ -9444,7 +10093,7 @@
                   <a:srgbClr val="CCDDEE"/>
                 </a:solidFill>
               </a:rPr>
-              <a:t>リアルタイム音声AIが同じ発話に2回答するのを防ぐ：STT確定ログをPythonで実装する</a:t>
+              <a:t>17MBのコード生成SLMを自作して実測した — 語彙サイズと、プロンプト形式の落とし穴</a:t>
             </a:r>
           </a:p>
         </p:txBody>
@@ -9478,7 +10127,7 @@
                 </a:solidFill>
                 <a:hlinkClick r:id="rId10"/>
               </a:rPr>
-              <a:t>https://qiita.com/susie000720/items/5d1b0d599496e7f39466</a:t>
+              <a:t>https://zenn.dev/ai_localqmod/articles/slm-17mb-code-generation</a:t>
             </a:r>
           </a:p>
         </p:txBody>
@@ -9519,7 +10168,7 @@
                   <a:srgbClr val="CCDDEE"/>
                 </a:solidFill>
               </a:rPr>
-              <a:t>因果推論 Day 22／全30回　効果の異質性、平均の裏で誰に効いて誰に効かないか</a:t>
+              <a:t>OpenAI APIのキャッシュを使い倒す</a:t>
             </a:r>
           </a:p>
         </p:txBody>
@@ -9553,7 +10202,7 @@
                 </a:solidFill>
                 <a:hlinkClick r:id="rId11"/>
               </a:rPr>
-              <a:t>https://qiita.com/akiralab/items/e68cd9bb60921149944d</a:t>
+              <a:t>https://qiita.com/cvusk/items/f37952ab8c85bcc9e56f</a:t>
             </a:r>
           </a:p>
         </p:txBody>
@@ -9586,7 +10235,7 @@
                   <a:srgbClr val="7F8C8D"/>
                 </a:solidFill>
               </a:rPr>
-              <a:t>[HackerNews]  </a:t>
+              <a:t>[Qiita]  </a:t>
             </a:r>
             <a:r>
               <a:rPr sz="1000" b="1">
@@ -9594,7 +10243,7 @@
                   <a:srgbClr val="CCDDEE"/>
                 </a:solidFill>
               </a:rPr>
-              <a:t>Claude Fable 5.1 vs. GPT-6 Astra, who wins on the 3D modeling?</a:t>
+              <a:t>【再投稿】AIで一人でゲームを作れるか試したら、35日・実質8人日でApp Store審査、公開まで行った話</a:t>
             </a:r>
           </a:p>
         </p:txBody>
@@ -9628,7 +10277,7 @@
                 </a:solidFill>
                 <a:hlinkClick r:id="rId12"/>
               </a:rPr>
-              <a:t>https://github.com/PhiloLabs/fable51-worlds/tree/main</a:t>
+              <a:t>https://qiita.com/notfolder/items/32618de3c325e90933d5</a:t>
             </a:r>
           </a:p>
         </p:txBody>
@@ -9669,7 +10318,7 @@
                   <a:srgbClr val="CCDDEE"/>
                 </a:solidFill>
               </a:rPr>
-              <a:t>Lyria 3.5のモデルID統合とclip-preview廃止で必要な対応</a:t>
+              <a:t>化合物の水溶解度を機械学習で予測してみる⑤：SHAP による解釈と文献との比較</a:t>
             </a:r>
           </a:p>
         </p:txBody>
@@ -9703,7 +10352,7 @@
                 </a:solidFill>
                 <a:hlinkClick r:id="rId13"/>
               </a:rPr>
-              <a:t>https://qiita.com/picnic/items/026123e37ab65481e2dc</a:t>
+              <a:t>https://qiita.com/828rimo/items/6b7deeb6ed7088049af4</a:t>
             </a:r>
           </a:p>
         </p:txBody>
@@ -9884,7 +10533,7 @@
                   <a:srgbClr val="FFFFFF"/>
                 </a:solidFill>
               </a:rPr>
-              <a:t>その他の記事　(2 / 7)</a:t>
+              <a:t>その他の記事　(3 / 8)</a:t>
             </a:r>
           </a:p>
         </p:txBody>
@@ -9925,7 +10574,7 @@
                   <a:srgbClr val="CCDDEE"/>
                 </a:solidFill>
               </a:rPr>
-              <a:t>Ollama × Tailscale：自宅LLMサーバーを安全に公開する（OLLAMA_HOST=0.0.0.0を使わない）</a:t>
+              <a:t>会計システムを作ってみよう</a:t>
             </a:r>
           </a:p>
         </p:txBody>
@@ -9959,7 +10608,7 @@
                 </a:solidFill>
                 <a:hlinkClick r:id="rId2"/>
               </a:rPr>
-              <a:t>https://qiita.com/Noritama-Lab/items/bbac76085a5789a724d4</a:t>
+              <a:t>https://qiita.com/keiarr/items/271b1f27e5d79c1ca406</a:t>
             </a:r>
           </a:p>
         </p:txBody>
@@ -10000,7 +10649,7 @@
                   <a:srgbClr val="CCDDEE"/>
                 </a:solidFill>
               </a:rPr>
-              <a:t>因果推論 Day 21／全30回　ITTとLATE、割付は守られないという現実</a:t>
+              <a:t>クラウドLLMとローカルLLMをどう一元管理するか</a:t>
             </a:r>
           </a:p>
         </p:txBody>
@@ -10034,7 +10683,7 @@
                 </a:solidFill>
                 <a:hlinkClick r:id="rId3"/>
               </a:rPr>
-              <a:t>https://qiita.com/akiralab/items/58e351dcef244e5045ec</a:t>
+              <a:t>https://qiita.com/lykuro/items/667b30671c620225a916</a:t>
             </a:r>
           </a:p>
         </p:txBody>
@@ -10075,7 +10724,7 @@
                   <a:srgbClr val="CCDDEE"/>
                 </a:solidFill>
               </a:rPr>
-              <a:t>【運用ログ】LLMルーターの月次見直し：2026年9月期（値上げ撤回による構成維持）</a:t>
+              <a:t>最もアラインしたAIが、なぜ危険度Critical？GPT-6 Astraの矛盾</a:t>
             </a:r>
           </a:p>
         </p:txBody>
@@ -10109,7 +10758,7 @@
                 </a:solidFill>
                 <a:hlinkClick r:id="rId4"/>
               </a:rPr>
-              <a:t>https://qiita.com/sh39/items/1edad1c6bd98f5914955</a:t>
+              <a:t>https://qiita.com/kinamocchi_tech/items/41704c6901b395121dab</a:t>
             </a:r>
           </a:p>
         </p:txBody>
@@ -10142,7 +10791,7 @@
                   <a:srgbClr val="7F8C8D"/>
                 </a:solidFill>
               </a:rPr>
-              <a:t>[HackerNews]  </a:t>
+              <a:t>[Zenn]  </a:t>
             </a:r>
             <a:r>
               <a:rPr sz="1000" b="1">
@@ -10150,7 +10799,7 @@
                   <a:srgbClr val="CCDDEE"/>
                 </a:solidFill>
               </a:rPr>
-              <a:t>GPT-6 Astra on OpenRouter</a:t>
+              <a:t>AIが問いを立て直した ── 音声のズレを追って感じたLLMの進化</a:t>
             </a:r>
           </a:p>
         </p:txBody>
@@ -10184,7 +10833,7 @@
                 </a:solidFill>
                 <a:hlinkClick r:id="rId5"/>
               </a:rPr>
-              <a:t>https://openrouter.ai/openai/gpt-6-astra</a:t>
+              <a:t>https://zenn.dev/heybombon/articles/8fa195f7b4d73a</a:t>
             </a:r>
           </a:p>
         </p:txBody>
@@ -10225,7 +10874,7 @@
                   <a:srgbClr val="CCDDEE"/>
                 </a:solidFill>
               </a:rPr>
-              <a:t>文字数もNGワードも、実は同じ文字列マッチでコード実行検証できる</a:t>
+              <a:t>要件定義書をLLMと一緒に書いてみて、うまくいったこと・ダメだったこと</a:t>
             </a:r>
           </a:p>
         </p:txBody>
@@ -10259,7 +10908,7 @@
                 </a:solidFill>
                 <a:hlinkClick r:id="rId6"/>
               </a:rPr>
-              <a:t>https://zenn.dev/every_ai_recipe/articles/claim-email-ngword-charcount-check</a:t>
+              <a:t>https://zenn.dev/vaonvn/articles/a6dab104e54ee4</a:t>
             </a:r>
           </a:p>
         </p:txBody>
@@ -10300,7 +10949,7 @@
                   <a:srgbClr val="CCDDEE"/>
                 </a:solidFill>
               </a:rPr>
-              <a:t>Gemini 3.8 Flash を GA 翌日に実測、課金される出力トークンの73%が思考ぶんだった</a:t>
+              <a:t>Claude API の Structured Outputs で JSON パースエラーを撲滅する実装手順 — beta ヘッダー・スキーマ制約・初…</a:t>
             </a:r>
           </a:p>
         </p:txBody>
@@ -10334,7 +10983,7 @@
                 </a:solidFill>
                 <a:hlinkClick r:id="rId7"/>
               </a:rPr>
-              <a:t>https://qiita.com/kai_kou/items/b7699cec0a06a0ccfbfc</a:t>
+              <a:t>https://qiita.com/yureki_lab/items/44d9155ebe7a4db804ab</a:t>
             </a:r>
           </a:p>
         </p:txBody>
@@ -10367,7 +11016,7 @@
                   <a:srgbClr val="7F8C8D"/>
                 </a:solidFill>
               </a:rPr>
-              <a:t>[Qiita]  </a:t>
+              <a:t>[Zenn]  </a:t>
             </a:r>
             <a:r>
               <a:rPr sz="1000" b="1">
@@ -10375,7 +11024,7 @@
                   <a:srgbClr val="CCDDEE"/>
                 </a:solidFill>
               </a:rPr>
-              <a:t>LLMの「量子化」とは何か？ なぜ必要で、どうやって実装するのかを初心者向けに解説</a:t>
+              <a:t>AI向けの目次を置いて14日ログを取ったら、148回取られてトップ以外は誰も読まなかった</a:t>
             </a:r>
           </a:p>
         </p:txBody>
@@ -10409,7 +11058,7 @@
                 </a:solidFill>
                 <a:hlinkClick r:id="rId8"/>
               </a:rPr>
-              <a:t>https://qiita.com/Takuya__/items/47007593066095ab4fb8</a:t>
+              <a:t>https://zenn.dev/miki_mini/articles/e5c724bfcc0496</a:t>
             </a:r>
           </a:p>
         </p:txBody>
@@ -10442,7 +11091,7 @@
                   <a:srgbClr val="7F8C8D"/>
                 </a:solidFill>
               </a:rPr>
-              <a:t>[Qiita]  </a:t>
+              <a:t>[Zenn]  </a:t>
             </a:r>
             <a:r>
               <a:rPr sz="1000" b="1">
@@ -10450,7 +11099,7 @@
                   <a:srgbClr val="CCDDEE"/>
                 </a:solidFill>
               </a:rPr>
-              <a:t>わたしが好きな クッキー×コーヒードリンクの組み合わせ10選【複数AI協業】WEEKDAY COFFEE ROASTERS - 鳥取市の水洗いコーヒー…</a:t>
+              <a:t>OpenAI API 入門 — API キーの取得から初回リクエストまで</a:t>
             </a:r>
           </a:p>
         </p:txBody>
@@ -10484,7 +11133,7 @@
                 </a:solidFill>
                 <a:hlinkClick r:id="rId9"/>
               </a:rPr>
-              <a:t>https://qiita.com/yamanakapom/items/232babe96dc8a38a55d8</a:t>
+              <a:t>https://zenn.dev/akinori901/articles/20260823-00mt4v7a</a:t>
             </a:r>
           </a:p>
         </p:txBody>
@@ -10517,7 +11166,7 @@
                   <a:srgbClr val="7F8C8D"/>
                 </a:solidFill>
               </a:rPr>
-              <a:t>[Qiita]  </a:t>
+              <a:t>[Zenn]  </a:t>
             </a:r>
             <a:r>
               <a:rPr sz="1000" b="1">
@@ -10525,7 +11174,7 @@
                   <a:srgbClr val="CCDDEE"/>
                 </a:solidFill>
               </a:rPr>
-              <a:t>ASP.NET Core から OpenAI 互換 LLM Gateway を使って複数モデルを呼び出す方法</a:t>
+              <a:t>【初心者向け】ChatGPTの音声モードでEC座談会をしてみた | EC-CUBE名古屋 vol.125</a:t>
             </a:r>
           </a:p>
         </p:txBody>
@@ -10559,7 +11208,7 @@
                 </a:solidFill>
                 <a:hlinkClick r:id="rId10"/>
               </a:rPr>
-              <a:t>https://qiita.com/nrouter_ai1991/items/229b4e1c389964a38dd9</a:t>
+              <a:t>https://zenn.dev/nanasess/articles/chatgpt-voice-ec-roundtable-vol125</a:t>
             </a:r>
           </a:p>
         </p:txBody>
@@ -10592,7 +11241,7 @@
                   <a:srgbClr val="7F8C8D"/>
                 </a:solidFill>
               </a:rPr>
-              <a:t>[Qiita]  </a:t>
+              <a:t>[Zenn]  </a:t>
             </a:r>
             <a:r>
               <a:rPr sz="1000" b="1">
@@ -10600,7 +11249,7 @@
                   <a:srgbClr val="CCDDEE"/>
                 </a:solidFill>
               </a:rPr>
-              <a:t>🔍 審査官はQiita記事を引用した — ELYZA特許の審査記録を全部読む</a:t>
+              <a:t>GPT-6 Astra は再現性の高いコードを書く——GPT-5.6 Sol との比較 240 試行で見えた事実（オトナの自由研究 #38）</a:t>
             </a:r>
           </a:p>
         </p:txBody>
@@ -10634,7 +11283,7 @@
                 </a:solidFill>
                 <a:hlinkClick r:id="rId11"/>
               </a:rPr>
-              <a:t>https://qiita.com/Ruria1024/items/17726dfb4369ca235687</a:t>
+              <a:t>https://zenn.dev/nnakapa/articles/lab-38-gpt6-astra-gpt56-sol-qcd</a:t>
             </a:r>
           </a:p>
         </p:txBody>
@@ -10667,7 +11316,7 @@
                   <a:srgbClr val="7F8C8D"/>
                 </a:solidFill>
               </a:rPr>
-              <a:t>[Qiita]  </a:t>
+              <a:t>[Zenn]  </a:t>
             </a:r>
             <a:r>
               <a:rPr sz="1000" b="1">
@@ -10675,7 +11324,7 @@
                   <a:srgbClr val="CCDDEE"/>
                 </a:solidFill>
               </a:rPr>
-              <a:t>AIのプロンプトを打つ人に必要なたった一つのこと</a:t>
+              <a:t>「主体なき声」と「コードを書く人間」――〃、こと／事、書き間違いから初音ミクとJavaの未来まで</a:t>
             </a:r>
           </a:p>
         </p:txBody>
@@ -10709,7 +11358,7 @@
                 </a:solidFill>
                 <a:hlinkClick r:id="rId12"/>
               </a:rPr>
-              <a:t>https://qiita.com/pdfractal/items/7f45c13455277009bba1</a:t>
+              <a:t>https://zenn.dev/sen_shimizu/articles/26839d7bbcf341</a:t>
             </a:r>
           </a:p>
         </p:txBody>
@@ -10750,7 +11399,7 @@
                   <a:srgbClr val="CCDDEE"/>
                 </a:solidFill>
               </a:rPr>
-              <a:t>AIで作ったHTMLゲーム、どこに投稿できる？ 2026年9月に7つ調べた</a:t>
+              <a:t>52歳・下請け10年の私が、半年でコードを書かなくなった話</a:t>
             </a:r>
           </a:p>
         </p:txBody>
@@ -10784,7 +11433,7 @@
                 </a:solidFill>
                 <a:hlinkClick r:id="rId13"/>
               </a:rPr>
-              <a:t>https://zenn.dev/punipogames/articles/1950d42da0e4b1</a:t>
+              <a:t>https://zenn.dev/esora_ueda/articles/legacy-engineer-stopped-coding-in-six-month…</a:t>
             </a:r>
           </a:p>
         </p:txBody>
@@ -11096,7 +11745,7 @@
                             <a:srgbClr val="E74C3C"/>
                           </a:solidFill>
                         </a:rPr>
-                        <a:t>11 件</a:t>
+                        <a:t>10 件</a:t>
                       </a:r>
                     </a:p>
                   </a:txBody>
@@ -11118,7 +11767,7 @@
                             <a:srgbClr val="D0E4F7"/>
                           </a:solidFill>
                         </a:rPr>
-                        <a:t>4.3%</a:t>
+                        <a:t>3.7%</a:t>
                       </a:r>
                     </a:p>
                   </a:txBody>
@@ -11164,7 +11813,7 @@
                             <a:srgbClr val="2980B9"/>
                           </a:solidFill>
                         </a:rPr>
-                        <a:t>29 件</a:t>
+                        <a:t>33 件</a:t>
                       </a:r>
                     </a:p>
                   </a:txBody>
@@ -11186,7 +11835,7 @@
                             <a:srgbClr val="D0E4F7"/>
                           </a:solidFill>
                         </a:rPr>
-                        <a:t>11.5%</a:t>
+                        <a:t>12.3%</a:t>
                       </a:r>
                     </a:p>
                   </a:txBody>
@@ -11232,7 +11881,7 @@
                             <a:srgbClr val="8439AD"/>
                           </a:solidFill>
                         </a:rPr>
-                        <a:t>83 件</a:t>
+                        <a:t>93 件</a:t>
                       </a:r>
                     </a:p>
                   </a:txBody>
@@ -11254,7 +11903,7 @@
                             <a:srgbClr val="D0E4F7"/>
                           </a:solidFill>
                         </a:rPr>
-                        <a:t>32.8%</a:t>
+                        <a:t>34.7%</a:t>
                       </a:r>
                     </a:p>
                   </a:txBody>
@@ -11300,7 +11949,7 @@
                             <a:srgbClr val="27AE60"/>
                           </a:solidFill>
                         </a:rPr>
-                        <a:t>31 件</a:t>
+                        <a:t>35 件</a:t>
                       </a:r>
                     </a:p>
                   </a:txBody>
@@ -11322,7 +11971,7 @@
                             <a:srgbClr val="D0E4F7"/>
                           </a:solidFill>
                         </a:rPr>
-                        <a:t>12.3%</a:t>
+                        <a:t>13.1%</a:t>
                       </a:r>
                     </a:p>
                   </a:txBody>
@@ -11368,7 +12017,7 @@
                             <a:srgbClr val="E67E22"/>
                           </a:solidFill>
                         </a:rPr>
-                        <a:t>16 件</a:t>
+                        <a:t>11 件</a:t>
                       </a:r>
                     </a:p>
                   </a:txBody>
@@ -11390,7 +12039,7 @@
                             <a:srgbClr val="D0E4F7"/>
                           </a:solidFill>
                         </a:rPr>
-                        <a:t>6.3%</a:t>
+                        <a:t>4.1%</a:t>
                       </a:r>
                     </a:p>
                   </a:txBody>
@@ -11436,7 +12085,7 @@
                             <a:srgbClr val="7F8C8D"/>
                           </a:solidFill>
                         </a:rPr>
-                        <a:t>83 件</a:t>
+                        <a:t>86 件</a:t>
                       </a:r>
                     </a:p>
                   </a:txBody>
@@ -11458,7 +12107,7 @@
                             <a:srgbClr val="D0E4F7"/>
                           </a:solidFill>
                         </a:rPr>
-                        <a:t>32.8%</a:t>
+                        <a:t>32.1%</a:t>
                       </a:r>
                     </a:p>
                   </a:txBody>
@@ -11504,7 +12153,7 @@
                             <a:srgbClr val="FFFFFF"/>
                           </a:solidFill>
                         </a:rPr>
-                        <a:t>253 件</a:t>
+                        <a:t>268 件</a:t>
                       </a:r>
                     </a:p>
                   </a:txBody>
@@ -11717,7 +12366,7 @@
                   <a:srgbClr val="FFFFFF"/>
                 </a:solidFill>
               </a:rPr>
-              <a:t>その他の記事　(3 / 7)</a:t>
+              <a:t>その他の記事　(4 / 8)</a:t>
             </a:r>
           </a:p>
         </p:txBody>
@@ -11750,7 +12399,7 @@
                   <a:srgbClr val="7F8C8D"/>
                 </a:solidFill>
               </a:rPr>
-              <a:t>[HackerNews]  </a:t>
+              <a:t>[Qiita]  </a:t>
             </a:r>
             <a:r>
               <a:rPr sz="1000" b="1">
@@ -11758,7 +12407,7 @@
                   <a:srgbClr val="CCDDEE"/>
                 </a:solidFill>
               </a:rPr>
-              <a:t>“Next-token predictor” is the wrong mental model for LLMs</a:t>
+              <a:t>因果推論 Day 22／全30回　効果の異質性、平均の裏で誰に効いて誰に効かないか</a:t>
             </a:r>
           </a:p>
         </p:txBody>
@@ -11792,7 +12441,7 @@
                 </a:solidFill>
                 <a:hlinkClick r:id="rId2"/>
               </a:rPr>
-              <a:t>https://gmcgoldr.github.io/2026/09/04/llm-next-token-predictors.html</a:t>
+              <a:t>https://qiita.com/akiralab/items/e68cd9bb60921149944d</a:t>
             </a:r>
           </a:p>
         </p:txBody>
@@ -11833,7 +12482,7 @@
                   <a:srgbClr val="CCDDEE"/>
                 </a:solidFill>
               </a:rPr>
-              <a:t>LLMルーター運用ログ：2026年9月期における「変更なし」の判断根拠と評価プロセス</a:t>
+              <a:t>通常のファインチューニングとLoRAでGPUメモリ消費を比較検証</a:t>
             </a:r>
           </a:p>
         </p:txBody>
@@ -11867,7 +12516,7 @@
                 </a:solidFill>
                 <a:hlinkClick r:id="rId3"/>
               </a:rPr>
-              <a:t>https://zenn.dev/sh39works/articles/219dae985a0394</a:t>
+              <a:t>https://zenn.dev/sapolas/articles/0175b65f1e5b8c</a:t>
             </a:r>
           </a:p>
         </p:txBody>
@@ -11908,7 +12557,7 @@
                   <a:srgbClr val="CCDDEE"/>
                 </a:solidFill>
               </a:rPr>
-              <a:t>Fable 5.1 vs GPT-6 Astra、同じ$10/$50でも請求が2倍違う理由</a:t>
+              <a:t>Lyria 3.5のモデルID統合とclip-preview廃止で必要な対応</a:t>
             </a:r>
           </a:p>
         </p:txBody>
@@ -11942,7 +12591,7 @@
                 </a:solidFill>
                 <a:hlinkClick r:id="rId4"/>
               </a:rPr>
-              <a:t>https://qiita.com/GeneLab_999/items/220d7d4a43285df1775b</a:t>
+              <a:t>https://qiita.com/picnic/items/026123e37ab65481e2dc</a:t>
             </a:r>
           </a:p>
         </p:txBody>
@@ -11975,7 +12624,7 @@
                   <a:srgbClr val="7F8C8D"/>
                 </a:solidFill>
               </a:rPr>
-              <a:t>[Zenn]  </a:t>
+              <a:t>[Qiita]  </a:t>
             </a:r>
             <a:r>
               <a:rPr sz="1000" b="1">
@@ -11983,7 +12632,7 @@
                   <a:srgbClr val="CCDDEE"/>
                 </a:solidFill>
               </a:rPr>
-              <a:t>GPT-6 Astraの概要</a:t>
+              <a:t>因果推論 Day 21／全30回　ITTとLATE、割付は守られないという現実</a:t>
             </a:r>
           </a:p>
         </p:txBody>
@@ -12017,7 +12666,7 @@
                 </a:solidFill>
                 <a:hlinkClick r:id="rId5"/>
               </a:rPr>
-              <a:t>https://zenn.dev/kotoda_ma/articles/07321e3dc01318</a:t>
+              <a:t>https://qiita.com/akiralab/items/58e351dcef244e5045ec</a:t>
             </a:r>
           </a:p>
         </p:txBody>
@@ -12050,7 +12699,7 @@
                   <a:srgbClr val="7F8C8D"/>
                 </a:solidFill>
               </a:rPr>
-              <a:t>[Qiita]  </a:t>
+              <a:t>[HackerNews]  </a:t>
             </a:r>
             <a:r>
               <a:rPr sz="1000" b="1">
@@ -12058,7 +12707,7 @@
                   <a:srgbClr val="CCDDEE"/>
                 </a:solidFill>
               </a:rPr>
-              <a:t>LLMを信用しないために、素人が1年半かけてHWSという外部監査システムを作った</a:t>
+              <a:t>GPT-6 Astra on OpenRouter</a:t>
             </a:r>
           </a:p>
         </p:txBody>
@@ -12092,7 +12741,7 @@
                 </a:solidFill>
                 <a:hlinkClick r:id="rId6"/>
               </a:rPr>
-              <a:t>https://qiita.com/punpunpun5963/items/00b6b2ce4d7319230b1c</a:t>
+              <a:t>https://openrouter.ai/openai/gpt-6-astra</a:t>
             </a:r>
           </a:p>
         </p:txBody>
@@ -12133,7 +12782,7 @@
                   <a:srgbClr val="CCDDEE"/>
                 </a:solidFill>
               </a:rPr>
-              <a:t>CMP 170HXのロングランテスト: 180W制限の代償とDP4Aパッチの検証</a:t>
+              <a:t>文字数もNGワードも、実は同じ文字列マッチでコード実行検証できる</a:t>
             </a:r>
           </a:p>
         </p:txBody>
@@ -12167,7 +12816,7 @@
                 </a:solidFill>
                 <a:hlinkClick r:id="rId7"/>
               </a:rPr>
-              <a:t>https://zenn.dev/phpmyadmin/articles/cmp170hx-longrun-test</a:t>
+              <a:t>https://zenn.dev/every_ai_recipe/articles/claim-email-ngword-charcount-check</a:t>
             </a:r>
           </a:p>
         </p:txBody>
@@ -12200,7 +12849,7 @@
                   <a:srgbClr val="7F8C8D"/>
                 </a:solidFill>
               </a:rPr>
-              <a:t>[Zenn]  </a:t>
+              <a:t>[Qiita]  </a:t>
             </a:r>
             <a:r>
               <a:rPr sz="1000" b="1">
@@ -12208,7 +12857,7 @@
                   <a:srgbClr val="CCDDEE"/>
                 </a:solidFill>
               </a:rPr>
-              <a:t>AIにデータを集めさせる前に、3つの検査を決める</a:t>
+              <a:t>Gemini 3.8 Flash を GA 翌日に実測、課金される出力トークンの73%が思考ぶんだった</a:t>
             </a:r>
           </a:p>
         </p:txBody>
@@ -12242,7 +12891,7 @@
                 </a:solidFill>
                 <a:hlinkClick r:id="rId8"/>
               </a:rPr>
-              <a:t>https://zenn.dev/data_boatrace/articles/18ec84203f366f</a:t>
+              <a:t>https://qiita.com/kai_kou/items/b7699cec0a06a0ccfbfc</a:t>
             </a:r>
           </a:p>
         </p:txBody>
@@ -12283,7 +12932,7 @@
                   <a:srgbClr val="CCDDEE"/>
                 </a:solidFill>
               </a:rPr>
-              <a:t>大人用です。√x + √y = √261 、x &gt; y「高校入試頻出問題 自然数ｘとｙを求めよ」様を、計算はsympyで作図は手抜きのつもりでした。</a:t>
+              <a:t>わたしが好きな クッキー×コーヒードリンクの組み合わせ10選【複数AI協業】WEEKDAY COFFEE ROASTERS - 鳥取市の水洗いコーヒー…</a:t>
             </a:r>
           </a:p>
         </p:txBody>
@@ -12317,7 +12966,7 @@
                 </a:solidFill>
                 <a:hlinkClick r:id="rId9"/>
               </a:rPr>
-              <a:t>https://qiita.com/mrrclb48z/items/ac9ef60581c305940116</a:t>
+              <a:t>https://qiita.com/yamanakapom/items/232babe96dc8a38a55d8</a:t>
             </a:r>
           </a:p>
         </p:txBody>
@@ -12350,7 +12999,7 @@
                   <a:srgbClr val="7F8C8D"/>
                 </a:solidFill>
               </a:rPr>
-              <a:t>[Zenn]  </a:t>
+              <a:t>[Qiita]  </a:t>
             </a:r>
             <a:r>
               <a:rPr sz="1000" b="1">
@@ -12358,7 +13007,7 @@
                   <a:srgbClr val="CCDDEE"/>
                 </a:solidFill>
               </a:rPr>
-              <a:t>Claude/ChatGPT/Gemini 即効スキル25個 全文日本語化（省略なし・コピペ可）</a:t>
+              <a:t>大人用です。1/4円「高校入試頻出問題 CO=?」様を、計算はsympyで作図は手抜きのつもりでした。</a:t>
             </a:r>
           </a:p>
         </p:txBody>
@@ -12392,7 +13041,7 @@
                 </a:solidFill>
                 <a:hlinkClick r:id="rId10"/>
               </a:rPr>
-              <a:t>https://zenn.dev/trailfusionai/articles/ai-news-20260513000251-07fa5e</a:t>
+              <a:t>https://qiita.com/mrrclb48z/items/cea877780006a059ee6e</a:t>
             </a:r>
           </a:p>
         </p:txBody>
@@ -12433,7 +13082,7 @@
                   <a:srgbClr val="CCDDEE"/>
                 </a:solidFill>
               </a:rPr>
-              <a:t>612回の図表再構築テストで分かったOCR・図形・コネクタの実態</a:t>
+              <a:t>AIのプロンプトを打つ人に必要なたった一つのこと</a:t>
             </a:r>
           </a:p>
         </p:txBody>
@@ -12467,7 +13116,7 @@
                 </a:solidFill>
                 <a:hlinkClick r:id="rId11"/>
               </a:rPr>
-              <a:t>https://qiita.com/daviechen/items/047cc1e31c21ad66bbe4</a:t>
+              <a:t>https://qiita.com/pdfractal/items/7f45c13455277009bba1</a:t>
             </a:r>
           </a:p>
         </p:txBody>
@@ -12508,7 +13157,7 @@
                   <a:srgbClr val="CCDDEE"/>
                 </a:solidFill>
               </a:rPr>
-              <a:t>化合物の水溶解度を機械学習で予測してみる④：フィンガープリントの導入</a:t>
+              <a:t>Fable 5.1 vs GPT-6 Astra、同じ$10/$50でも請求が2倍違う理由</a:t>
             </a:r>
           </a:p>
         </p:txBody>
@@ -12542,7 +13191,7 @@
                 </a:solidFill>
                 <a:hlinkClick r:id="rId12"/>
               </a:rPr>
-              <a:t>https://qiita.com/828rimo/items/0f8791f604c818708d36</a:t>
+              <a:t>https://qiita.com/GeneLab_999/items/220d7d4a43285df1775b</a:t>
             </a:r>
           </a:p>
         </p:txBody>
@@ -12575,7 +13224,7 @@
                   <a:srgbClr val="7F8C8D"/>
                 </a:solidFill>
               </a:rPr>
-              <a:t>[HackerNews]  </a:t>
+              <a:t>[Qiita]  </a:t>
             </a:r>
             <a:r>
               <a:rPr sz="1000" b="1">
@@ -12583,7 +13232,7 @@
                   <a:srgbClr val="CCDDEE"/>
                 </a:solidFill>
               </a:rPr>
-              <a:t>Show HN: TERMy – A fast terminal assistant that does not use LLMs</a:t>
+              <a:t>LLMを信用しないために、素人が1年半かけてHWSという外部監査システムを作った</a:t>
             </a:r>
           </a:p>
         </p:txBody>
@@ -12617,7 +13266,7 @@
                 </a:solidFill>
                 <a:hlinkClick r:id="rId13"/>
               </a:rPr>
-              <a:t>https://github.com/gioblu/NPC-Forge/blob/main/docs/development.md</a:t>
+              <a:t>https://qiita.com/punpunpun5963/items/00b6b2ce4d7319230b1c</a:t>
             </a:r>
           </a:p>
         </p:txBody>
@@ -12798,7 +13447,7 @@
                   <a:srgbClr val="FFFFFF"/>
                 </a:solidFill>
               </a:rPr>
-              <a:t>その他の記事　(4 / 7)</a:t>
+              <a:t>その他の記事　(5 / 8)</a:t>
             </a:r>
           </a:p>
         </p:txBody>
@@ -12839,7 +13488,7 @@
                   <a:srgbClr val="CCDDEE"/>
                 </a:solidFill>
               </a:rPr>
-              <a:t>RTX 5060 Ti 16GBでローカルLLM(Qwen3.8 27B)にもう一度挑んだ話</a:t>
+              <a:t>AIにデータを集めさせる前に、3つの検査を決める</a:t>
             </a:r>
           </a:p>
         </p:txBody>
@@ -12873,7 +13522,7 @@
                 </a:solidFill>
                 <a:hlinkClick r:id="rId2"/>
               </a:rPr>
-              <a:t>https://zenn.dev/yumeno/articles/rtx5060ti-qwen38-ollama-context-tuning</a:t>
+              <a:t>https://zenn.dev/data_boatrace/articles/18ec84203f366f</a:t>
             </a:r>
           </a:p>
         </p:txBody>
@@ -12906,7 +13555,7 @@
                   <a:srgbClr val="7F8C8D"/>
                 </a:solidFill>
               </a:rPr>
-              <a:t>[Zenn]  </a:t>
+              <a:t>[Qiita]  </a:t>
             </a:r>
             <a:r>
               <a:rPr sz="1000" b="1">
@@ -12914,7 +13563,7 @@
                   <a:srgbClr val="CCDDEE"/>
                 </a:solidFill>
               </a:rPr>
-              <a:t>3言語で字幕の遅延を測った — リズムは同じ、文字は違う</a:t>
+              <a:t>大人用です。√x + √y = √261 、x &gt; y「高校入試頻出問題 自然数ｘとｙを求めよ」様を、計算はsympyで作図は手抜きのつもりでした。</a:t>
             </a:r>
           </a:p>
         </p:txBody>
@@ -12948,7 +13597,7 @@
                 </a:solidFill>
                 <a:hlinkClick r:id="rId3"/>
               </a:rPr>
-              <a:t>https://zenn.dev/officekamiya/articles/gemini-live-subtitle-latency</a:t>
+              <a:t>https://qiita.com/mrrclb48z/items/ac9ef60581c305940116</a:t>
             </a:r>
           </a:p>
         </p:txBody>
@@ -12981,7 +13630,7 @@
                   <a:srgbClr val="7F8C8D"/>
                 </a:solidFill>
               </a:rPr>
-              <a:t>[Qiita]  </a:t>
+              <a:t>[Zenn]  </a:t>
             </a:r>
             <a:r>
               <a:rPr sz="1000" b="1">
@@ -12989,7 +13638,7 @@
                   <a:srgbClr val="CCDDEE"/>
                 </a:solidFill>
               </a:rPr>
-              <a:t>耳で聞く！Python で学ぶ マクロ経済学 入門 8</a:t>
+              <a:t>Claude/ChatGPT/Gemini 即効スキル25個 全文日本語化（省略なし・コピペ可）</a:t>
             </a:r>
           </a:p>
         </p:txBody>
@@ -13023,7 +13672,7 @@
                 </a:solidFill>
                 <a:hlinkClick r:id="rId4"/>
               </a:rPr>
-              <a:t>https://qiita.com/maskot1977/items/226ef503f00dca1b4cf8</a:t>
+              <a:t>https://zenn.dev/trailfusionai/articles/ai-news-20260513000251-07fa5e</a:t>
             </a:r>
           </a:p>
         </p:txBody>
@@ -13064,7 +13713,7 @@
                   <a:srgbClr val="CCDDEE"/>
                 </a:solidFill>
               </a:rPr>
-              <a:t>DSAのVLOSE指定にChatGPTが加わった。閾値4,500万に対し申告1億5,910万、対応期限は指定通知から4ヶ月</a:t>
+              <a:t>612回の図表再構築テストで分かったOCR・図形・コネクタの実態</a:t>
             </a:r>
           </a:p>
         </p:txBody>
@@ -13098,7 +13747,7 @@
                 </a:solidFill>
                 <a:hlinkClick r:id="rId5"/>
               </a:rPr>
-              <a:t>https://qiita.com/quotidia/items/e7e16a68fb321e9859e2</a:t>
+              <a:t>https://qiita.com/daviechen/items/047cc1e31c21ad66bbe4</a:t>
             </a:r>
           </a:p>
         </p:txBody>
@@ -13131,7 +13780,7 @@
                   <a:srgbClr val="7F8C8D"/>
                 </a:solidFill>
               </a:rPr>
-              <a:t>[Zenn]  </a:t>
+              <a:t>[Qiita]  </a:t>
             </a:r>
             <a:r>
               <a:rPr sz="1000" b="1">
@@ -13139,7 +13788,7 @@
                   <a:srgbClr val="CCDDEE"/>
                 </a:solidFill>
               </a:rPr>
-              <a:t>Fable 5.1とGPT-6 Astraの定価が揃った。価格で選べなくなったのではなく、測らないと選べなくなった</a:t>
+              <a:t>化合物の水溶解度を機械学習で予測してみる④：フィンガープリントの導入</a:t>
             </a:r>
           </a:p>
         </p:txBody>
@@ -13173,7 +13822,7 @@
                 </a:solidFill>
                 <a:hlinkClick r:id="rId6"/>
               </a:rPr>
-              <a:t>https://zenn.dev/genelab_999/articles/2281f72b68e2b0</a:t>
+              <a:t>https://qiita.com/828rimo/items/0f8791f604c818708d36</a:t>
             </a:r>
           </a:p>
         </p:txBody>
@@ -13206,7 +13855,7 @@
                   <a:srgbClr val="7F8C8D"/>
                 </a:solidFill>
               </a:rPr>
-              <a:t>[Zenn]  </a:t>
+              <a:t>[HackerNews]  </a:t>
             </a:r>
             <a:r>
               <a:rPr sz="1000" b="1">
@@ -13214,7 +13863,7 @@
                   <a:srgbClr val="CCDDEE"/>
                 </a:solidFill>
               </a:rPr>
-              <a:t>なぜ、喫茶店以外でスマホでChatGPT使う時は、質問したらすぐに画面を切らないといけないのか？</a:t>
+              <a:t>Show HN: TERMy – A fast terminal assistant that does not use LLMs</a:t>
             </a:r>
           </a:p>
         </p:txBody>
@@ -13248,7 +13897,7 @@
                 </a:solidFill>
                 <a:hlinkClick r:id="rId7"/>
               </a:rPr>
-              <a:t>https://zenn.dev/pdfractal/articles/c4676ea32a5895</a:t>
+              <a:t>https://github.com/gioblu/NPC-Forge/blob/main/docs/development.md</a:t>
             </a:r>
           </a:p>
         </p:txBody>
@@ -13289,7 +13938,7 @@
                   <a:srgbClr val="CCDDEE"/>
                 </a:solidFill>
               </a:rPr>
-              <a:t>Claude Certified Developer – Foundations（CCDV-F）に3日・8時間で970点合格した勉強法</a:t>
+              <a:t>耳で聞く！Python で学ぶ マクロ経済学 入門 8</a:t>
             </a:r>
           </a:p>
         </p:txBody>
@@ -13323,7 +13972,7 @@
                 </a:solidFill>
                 <a:hlinkClick r:id="rId8"/>
               </a:rPr>
-              <a:t>https://qiita.com/Solbear/items/ad15ec59cc18cf9994c5</a:t>
+              <a:t>https://qiita.com/maskot1977/items/226ef503f00dca1b4cf8</a:t>
             </a:r>
           </a:p>
         </p:txBody>
@@ -13364,7 +14013,7 @@
                   <a:srgbClr val="CCDDEE"/>
                 </a:solidFill>
               </a:rPr>
-              <a:t>【速報・障害情報】ChatGPTおよびCodexで大規模障害発生か（公式調査中）</a:t>
+              <a:t>DSAのVLOSE指定にChatGPTが加わった。閾値4,500万に対し申告1億5,910万、対応期限は指定通知から4ヶ月</a:t>
             </a:r>
           </a:p>
         </p:txBody>
@@ -13398,7 +14047,7 @@
                 </a:solidFill>
                 <a:hlinkClick r:id="rId9"/>
               </a:rPr>
-              <a:t>https://qiita.com/softbase/items/231c4fccfc9dc546e9b1</a:t>
+              <a:t>https://qiita.com/quotidia/items/e7e16a68fb321e9859e2</a:t>
             </a:r>
           </a:p>
         </p:txBody>
@@ -13431,7 +14080,7 @@
                   <a:srgbClr val="7F8C8D"/>
                 </a:solidFill>
               </a:rPr>
-              <a:t>[Qiita]  </a:t>
+              <a:t>[Zenn]  </a:t>
             </a:r>
             <a:r>
               <a:rPr sz="1000" b="1">
@@ -13439,7 +14088,7 @@
                   <a:srgbClr val="CCDDEE"/>
                 </a:solidFill>
               </a:rPr>
-              <a:t>Qiitaの下書きURLのブックマークのお気に入り登録のおすすめ</a:t>
+              <a:t>Fable 5.1とGPT-6 Astraの定価が揃った。価格で選べなくなったのではなく、測らないと選べなくなった</a:t>
             </a:r>
           </a:p>
         </p:txBody>
@@ -13473,7 +14122,7 @@
                 </a:solidFill>
                 <a:hlinkClick r:id="rId10"/>
               </a:rPr>
-              <a:t>https://qiita.com/mrrclb48z/items/818d00650fb564af4ff8</a:t>
+              <a:t>https://zenn.dev/genelab_999/articles/2281f72b68e2b0</a:t>
             </a:r>
           </a:p>
         </p:txBody>
@@ -13506,7 +14155,7 @@
                   <a:srgbClr val="7F8C8D"/>
                 </a:solidFill>
               </a:rPr>
-              <a:t>[HackerNews]  </a:t>
+              <a:t>[Zenn]  </a:t>
             </a:r>
             <a:r>
               <a:rPr sz="1000" b="1">
@@ -13514,7 +14163,7 @@
                   <a:srgbClr val="CCDDEE"/>
                 </a:solidFill>
               </a:rPr>
-              <a:t>GPT-6 Astra</a:t>
+              <a:t>なぜ、喫茶店以外でスマホでChatGPT使う時は、質問したらすぐに画面を切らないといけないのか？</a:t>
             </a:r>
           </a:p>
         </p:txBody>
@@ -13548,7 +14197,7 @@
                 </a:solidFill>
                 <a:hlinkClick r:id="rId11"/>
               </a:rPr>
-              <a:t>https://openai.com/index/gpt-6-astra/</a:t>
+              <a:t>https://zenn.dev/pdfractal/articles/c4676ea32a5895</a:t>
             </a:r>
           </a:p>
         </p:txBody>
@@ -13589,7 +14238,7 @@
                   <a:srgbClr val="CCDDEE"/>
                 </a:solidFill>
               </a:rPr>
-              <a:t>化合物の水溶解度を機械学習で予測してみる③：LightGBM で精度向上</a:t>
+              <a:t>【速報・障害情報】ChatGPTおよびCodexで大規模障害発生か（公式調査中）</a:t>
             </a:r>
           </a:p>
         </p:txBody>
@@ -13623,7 +14272,7 @@
                 </a:solidFill>
                 <a:hlinkClick r:id="rId12"/>
               </a:rPr>
-              <a:t>https://qiita.com/828rimo/items/9802e0cbe993559c7356</a:t>
+              <a:t>https://qiita.com/softbase/items/231c4fccfc9dc546e9b1</a:t>
             </a:r>
           </a:p>
         </p:txBody>
@@ -13656,7 +14305,7 @@
                   <a:srgbClr val="7F8C8D"/>
                 </a:solidFill>
               </a:rPr>
-              <a:t>[Zenn]  </a:t>
+              <a:t>[HackerNews]  </a:t>
             </a:r>
             <a:r>
               <a:rPr sz="1000" b="1">
@@ -13664,7 +14313,7 @@
                   <a:srgbClr val="CCDDEE"/>
                 </a:solidFill>
               </a:rPr>
-              <a:t>LLMナレッジのためのブックマーク(URL)処理について考える</a:t>
+              <a:t>GPT-6 Astra</a:t>
             </a:r>
           </a:p>
         </p:txBody>
@@ -13698,7 +14347,7 @@
                 </a:solidFill>
                 <a:hlinkClick r:id="rId13"/>
               </a:rPr>
-              <a:t>https://zenn.dev/k_ts_ngo/articles/97351f029167e6</a:t>
+              <a:t>https://openai.com/index/gpt-6-astra/</a:t>
             </a:r>
           </a:p>
         </p:txBody>
@@ -13879,7 +14528,7 @@
                   <a:srgbClr val="FFFFFF"/>
                 </a:solidFill>
               </a:rPr>
-              <a:t>その他の記事　(5 / 7)</a:t>
+              <a:t>その他の記事　(6 / 8)</a:t>
             </a:r>
           </a:p>
         </p:txBody>
@@ -13920,7 +14569,7 @@
                   <a:srgbClr val="CCDDEE"/>
                 </a:solidFill>
               </a:rPr>
-              <a:t>プレゼンのスライド構成を、AIに骨組みだけ15分で作らせる</a:t>
+              <a:t>化合物の水溶解度を機械学習で予測してみる③：LightGBM で精度向上</a:t>
             </a:r>
           </a:p>
         </p:txBody>
@@ -13954,7 +14603,7 @@
                 </a:solidFill>
                 <a:hlinkClick r:id="rId2"/>
               </a:rPr>
-              <a:t>https://qiita.com/okssusucha/items/9593deba0bc7f8cfaa76</a:t>
+              <a:t>https://qiita.com/828rimo/items/9802e0cbe993559c7356</a:t>
             </a:r>
           </a:p>
         </p:txBody>
@@ -13987,7 +14636,7 @@
                   <a:srgbClr val="7F8C8D"/>
                 </a:solidFill>
               </a:rPr>
-              <a:t>[Qiita]  </a:t>
+              <a:t>[Zenn]  </a:t>
             </a:r>
             <a:r>
               <a:rPr sz="1000" b="1">
@@ -13995,7 +14644,7 @@
                   <a:srgbClr val="CCDDEE"/>
                 </a:solidFill>
               </a:rPr>
-              <a:t>AI製Markdownを装飾された閲覧用HTMLに変換・共有できるサイトの機能紹介</a:t>
+              <a:t>LLMナレッジのためのブックマーク(URL)処理について考える</a:t>
             </a:r>
           </a:p>
         </p:txBody>
@@ -14029,7 +14678,7 @@
                 </a:solidFill>
                 <a:hlinkClick r:id="rId3"/>
               </a:rPr>
-              <a:t>https://qiita.com/uni928/items/187526b0843bc09a4a39</a:t>
+              <a:t>https://zenn.dev/k_ts_ngo/articles/97351f029167e6</a:t>
             </a:r>
           </a:p>
         </p:txBody>
@@ -14070,7 +14719,7 @@
                   <a:srgbClr val="CCDDEE"/>
                 </a:solidFill>
               </a:rPr>
-              <a:t>WordPressプラグインからロリポップ！AIゲートウェイを使う実装手順</a:t>
+              <a:t>プレゼンのスライド構成を、AIに骨組みだけ15分で作らせる</a:t>
             </a:r>
           </a:p>
         </p:txBody>
@@ -14104,7 +14753,7 @@
                 </a:solidFill>
                 <a:hlinkClick r:id="rId4"/>
               </a:rPr>
-              <a:t>https://qiita.com/boraemon2000/items/a6b5579f75ccf5dbbeef</a:t>
+              <a:t>https://qiita.com/okssusucha/items/9593deba0bc7f8cfaa76</a:t>
             </a:r>
           </a:p>
         </p:txBody>
@@ -14137,7 +14786,7 @@
                   <a:srgbClr val="7F8C8D"/>
                 </a:solidFill>
               </a:rPr>
-              <a:t>[Zenn]  </a:t>
+              <a:t>[Qiita]  </a:t>
             </a:r>
             <a:r>
               <a:rPr sz="1000" b="1">
@@ -14145,7 +14794,7 @@
                   <a:srgbClr val="CCDDEE"/>
                 </a:solidFill>
               </a:rPr>
-              <a:t>GPT-2-likeからQwen2-likeへの実験：第2回 GELUをSwiGLUに変える</a:t>
+              <a:t>AI製Markdownを装飾された閲覧用HTMLに変換・共有できるサイトの機能紹介</a:t>
             </a:r>
           </a:p>
         </p:txBody>
@@ -14179,7 +14828,7 @@
                 </a:solidFill>
                 <a:hlinkClick r:id="rId5"/>
               </a:rPr>
-              <a:t>https://zenn.dev/yyamamot/articles/gpt2-to-qwen2-02-swiglu</a:t>
+              <a:t>https://qiita.com/uni928/items/187526b0843bc09a4a39</a:t>
             </a:r>
           </a:p>
         </p:txBody>
@@ -14220,7 +14869,7 @@
                   <a:srgbClr val="CCDDEE"/>
                 </a:solidFill>
               </a:rPr>
-              <a:t>機械学習入門 第7回：アンサンブル学習を「複数モデルの判断を組み合わせる方法」として理解する</a:t>
+              <a:t>WordPressプラグインからロリポップ！AIゲートウェイを使う実装手順</a:t>
             </a:r>
           </a:p>
         </p:txBody>
@@ -14254,7 +14903,7 @@
                 </a:solidFill>
                 <a:hlinkClick r:id="rId6"/>
               </a:rPr>
-              <a:t>https://qiita.com/yoshisen/items/ed022a3cd246e76ca6a9</a:t>
+              <a:t>https://qiita.com/boraemon2000/items/a6b5579f75ccf5dbbeef</a:t>
             </a:r>
           </a:p>
         </p:txBody>
@@ -14287,7 +14936,7 @@
                   <a:srgbClr val="7F8C8D"/>
                 </a:solidFill>
               </a:rPr>
-              <a:t>[Qiita]  </a:t>
+              <a:t>[Zenn]  </a:t>
             </a:r>
             <a:r>
               <a:rPr sz="1000" b="1">
@@ -14295,7 +14944,7 @@
                   <a:srgbClr val="CCDDEE"/>
                 </a:solidFill>
               </a:rPr>
-              <a:t>Midnight AI Groove 26-09-01 claude mythos 51</a:t>
+              <a:t>GPT-2-likeからQwen2-likeへの実験：第2回 GELUをSwiGLUに変える</a:t>
             </a:r>
           </a:p>
         </p:txBody>
@@ -14329,7 +14978,7 @@
                 </a:solidFill>
                 <a:hlinkClick r:id="rId7"/>
               </a:rPr>
-              <a:t>https://qiita.com/masykot582/items/c97b1e94b99eed0df55c</a:t>
+              <a:t>https://zenn.dev/yyamamot/articles/gpt2-to-qwen2-02-swiglu</a:t>
             </a:r>
           </a:p>
         </p:txBody>
@@ -14370,7 +15019,7 @@
                   <a:srgbClr val="CCDDEE"/>
                 </a:solidFill>
               </a:rPr>
-              <a:t>Denseってなんだ？ — 生成速度は演算性能ではなくメモリ帯域で決まる</a:t>
+              <a:t>機械学習入門 第7回：アンサンブル学習を「複数モデルの判断を組み合わせる方法」として理解する</a:t>
             </a:r>
           </a:p>
         </p:txBody>
@@ -14404,7 +15053,7 @@
                 </a:solidFill>
                 <a:hlinkClick r:id="rId8"/>
               </a:rPr>
-              <a:t>https://qiita.com/GeneLab_999/items/10101e6b6d1094c0c700</a:t>
+              <a:t>https://qiita.com/yoshisen/items/ed022a3cd246e76ca6a9</a:t>
             </a:r>
           </a:p>
         </p:txBody>
@@ -14437,7 +15086,7 @@
                   <a:srgbClr val="7F8C8D"/>
                 </a:solidFill>
               </a:rPr>
-              <a:t>[Qiita]  </a:t>
+              <a:t>[Zenn]  </a:t>
             </a:r>
             <a:r>
               <a:rPr sz="1000" b="1">
@@ -14445,7 +15094,7 @@
                   <a:srgbClr val="CCDDEE"/>
                 </a:solidFill>
               </a:rPr>
-              <a:t>MoE（Mixture of Experts）ってなんだ？ — 総パラメータでVRAMを見積もると必ず外す理由</a:t>
+              <a:t>Chrome右クリックの「Ask ChatGPT」を消す</a:t>
             </a:r>
           </a:p>
         </p:txBody>
@@ -14479,7 +15128,7 @@
                 </a:solidFill>
                 <a:hlinkClick r:id="rId9"/>
               </a:rPr>
-              <a:t>https://qiita.com/GeneLab_999/items/7c3a36aef4b908949a0b</a:t>
+              <a:t>https://zenn.dev/ux_xu/articles/7cd612d1e9d637</a:t>
             </a:r>
           </a:p>
         </p:txBody>
@@ -14512,7 +15161,7 @@
                   <a:srgbClr val="7F8C8D"/>
                 </a:solidFill>
               </a:rPr>
-              <a:t>[Qiita]  </a:t>
+              <a:t>[Zenn]  </a:t>
             </a:r>
             <a:r>
               <a:rPr sz="1000" b="1">
@@ -14520,7 +15169,7 @@
                   <a:srgbClr val="CCDDEE"/>
                 </a:solidFill>
               </a:rPr>
-              <a:t>化合物の水溶解度を機械学習で予測してみる②：RDKit 記述子の追加</a:t>
+              <a:t>フレーム問題とは？AIの古典的難問</a:t>
             </a:r>
           </a:p>
         </p:txBody>
@@ -14554,7 +15203,7 @@
                 </a:solidFill>
                 <a:hlinkClick r:id="rId10"/>
               </a:rPr>
-              <a:t>https://qiita.com/828rimo/items/d37ed26ddedee42a3e5a</a:t>
+              <a:t>https://zenn.dev/h888s/articles/gtest-frame-problem</a:t>
             </a:r>
           </a:p>
         </p:txBody>
@@ -14587,7 +15236,7 @@
                   <a:srgbClr val="7F8C8D"/>
                 </a:solidFill>
               </a:rPr>
-              <a:t>[Qiita]  </a:t>
+              <a:t>[Zenn]  </a:t>
             </a:r>
             <a:r>
               <a:rPr sz="1000" b="1">
@@ -14595,7 +15244,7 @@
                   <a:srgbClr val="CCDDEE"/>
                 </a:solidFill>
               </a:rPr>
-              <a:t>品質ゲートを厳しくするほど、棒読みが生き残る — 検証が生む選択バイアス</a:t>
+              <a:t>同じ依頼文でClaudeとChatGPTの設計が割れた ― AIクロスレビューでも収束しなかった</a:t>
             </a:r>
           </a:p>
         </p:txBody>
@@ -14629,7 +15278,7 @@
                 </a:solidFill>
                 <a:hlinkClick r:id="rId11"/>
               </a:rPr>
-              <a:t>https://qiita.com/maccotaro/items/17a9762c4cc2bfa0cb8e</a:t>
+              <a:t>https://zenn.dev/colinnxt/articles/68f4fb459a4180</a:t>
             </a:r>
           </a:p>
         </p:txBody>
@@ -14662,7 +15311,7 @@
                   <a:srgbClr val="7F8C8D"/>
                 </a:solidFill>
               </a:rPr>
-              <a:t>[Qiita]  </a:t>
+              <a:t>[Zenn]  </a:t>
             </a:r>
             <a:r>
               <a:rPr sz="1000" b="1">
@@ -14670,7 +15319,7 @@
                   <a:srgbClr val="CCDDEE"/>
                 </a:solidFill>
               </a:rPr>
-              <a:t>Gemini Enterprise の Canvas アシスタントを使ってみた ― プロンプト1つで営業報告スライドが完成した話</a:t>
+              <a:t>ChatGPT無料版の「1日3ファイル」は、入れるときではなく質問するときに止まりました（2026-08-15の観測）</a:t>
             </a:r>
           </a:p>
         </p:txBody>
@@ -14704,7 +15353,7 @@
                 </a:solidFill>
                 <a:hlinkClick r:id="rId12"/>
               </a:rPr>
-              <a:t>https://qiita.com/kuno_/items/1266f4eddb6c68ef18a7</a:t>
+              <a:t>https://zenn.dev/ojisan_ai_lab/articles/chatgpt-free-file-limit-20260902</a:t>
             </a:r>
           </a:p>
         </p:txBody>
@@ -14745,7 +15394,7 @@
                   <a:srgbClr val="CCDDEE"/>
                 </a:solidFill>
               </a:rPr>
-              <a:t>Chrome右クリックの「Ask ChatGPT」を消す</a:t>
+              <a:t>大規模言語モデル（LLM）を端末で動かす無料の高校数学AIアプリを開発した</a:t>
             </a:r>
           </a:p>
         </p:txBody>
@@ -14779,7 +15428,7 @@
                 </a:solidFill>
                 <a:hlinkClick r:id="rId13"/>
               </a:rPr>
-              <a:t>https://zenn.dev/ux_xu/articles/7cd612d1e9d637</a:t>
+              <a:t>https://zenn.dev/ai_chi/articles/cee2081ac9255a</a:t>
             </a:r>
           </a:p>
         </p:txBody>
@@ -14960,7 +15609,7 @@
                   <a:srgbClr val="FFFFFF"/>
                 </a:solidFill>
               </a:rPr>
-              <a:t>その他の記事　(6 / 7)</a:t>
+              <a:t>その他の記事　(7 / 8)</a:t>
             </a:r>
           </a:p>
         </p:txBody>
@@ -14993,7 +15642,7 @@
                   <a:srgbClr val="7F8C8D"/>
                 </a:solidFill>
               </a:rPr>
-              <a:t>[Zenn]  </a:t>
+              <a:t>[HackerNews]  </a:t>
             </a:r>
             <a:r>
               <a:rPr sz="1000" b="1">
@@ -15001,7 +15650,7 @@
                   <a:srgbClr val="CCDDEE"/>
                 </a:solidFill>
               </a:rPr>
-              <a:t>フレーム問題とは？AIの古典的難問</a:t>
+              <a:t>Show HN: Fly By – retro biplane flying game</a:t>
             </a:r>
           </a:p>
         </p:txBody>
@@ -15035,7 +15684,7 @@
                 </a:solidFill>
                 <a:hlinkClick r:id="rId2"/>
               </a:rPr>
-              <a:t>https://zenn.dev/h888s/articles/gtest-frame-problem</a:t>
+              <a:t>https://michaelteter.com/flyby.html</a:t>
             </a:r>
           </a:p>
         </p:txBody>
@@ -15068,7 +15717,7 @@
                   <a:srgbClr val="7F8C8D"/>
                 </a:solidFill>
               </a:rPr>
-              <a:t>[Zenn]  </a:t>
+              <a:t>[Qiita]  </a:t>
             </a:r>
             <a:r>
               <a:rPr sz="1000" b="1">
@@ -15076,7 +15725,7 @@
                   <a:srgbClr val="CCDDEE"/>
                 </a:solidFill>
               </a:rPr>
-              <a:t>同じ依頼文でClaudeとChatGPTの設計が割れた ― AIクロスレビューでも収束しなかった</a:t>
+              <a:t>AI文章を整えるSkill「teire」を作ってみた</a:t>
             </a:r>
           </a:p>
         </p:txBody>
@@ -15110,7 +15759,7 @@
                 </a:solidFill>
                 <a:hlinkClick r:id="rId3"/>
               </a:rPr>
-              <a:t>https://zenn.dev/colinnxt/articles/68f4fb459a4180</a:t>
+              <a:t>https://qiita.com/HN6039940/items/e794b2340a113c85fd1d</a:t>
             </a:r>
           </a:p>
         </p:txBody>
@@ -15143,7 +15792,7 @@
                   <a:srgbClr val="7F8C8D"/>
                 </a:solidFill>
               </a:rPr>
-              <a:t>[Zenn]  </a:t>
+              <a:t>[Qiita]  </a:t>
             </a:r>
             <a:r>
               <a:rPr sz="1000" b="1">
@@ -15151,7 +15800,7 @@
                   <a:srgbClr val="CCDDEE"/>
                 </a:solidFill>
               </a:rPr>
-              <a:t>ChatGPT無料版の「1日3ファイル」は、入れるときではなく質問するときに止まりました（2026-08-15の観測）</a:t>
+              <a:t>AI用ドキュメントと開発者用ドキュメントの混在問題を解決する — copilot-instructions 導入時の課題と段階的な運用開始方法</a:t>
             </a:r>
           </a:p>
         </p:txBody>
@@ -15185,7 +15834,7 @@
                 </a:solidFill>
                 <a:hlinkClick r:id="rId4"/>
               </a:rPr>
-              <a:t>https://zenn.dev/ojisan_ai_lab/articles/chatgpt-free-file-limit-20260902</a:t>
+              <a:t>https://qiita.com/h-nasu/items/5634ceb0619b37ef7f98</a:t>
             </a:r>
           </a:p>
         </p:txBody>
@@ -15226,7 +15875,7 @@
                   <a:srgbClr val="CCDDEE"/>
                 </a:solidFill>
               </a:rPr>
-              <a:t>25億token学習したGPT-2 Smallに、さらに25億token学習させたら性能は上がるのか？</a:t>
+              <a:t>ファインチューニング比較検証　--ジャンルの異なる学習データを使った時、モデル応答に違いが見られるか</a:t>
             </a:r>
           </a:p>
         </p:txBody>
@@ -15260,7 +15909,7 @@
                 </a:solidFill>
                 <a:hlinkClick r:id="rId5"/>
               </a:rPr>
-              <a:t>https://zenn.dev/projecticonik/articles/e505598daf46cd</a:t>
+              <a:t>https://zenn.dev/sapolas/articles/45a3a1456e1dfb</a:t>
             </a:r>
           </a:p>
         </p:txBody>
@@ -15293,7 +15942,7 @@
                   <a:srgbClr val="7F8C8D"/>
                 </a:solidFill>
               </a:rPr>
-              <a:t>[Zenn]  </a:t>
+              <a:t>[Qiita]  </a:t>
             </a:r>
             <a:r>
               <a:rPr sz="1000" b="1">
@@ -15301,7 +15950,7 @@
                   <a:srgbClr val="CCDDEE"/>
                 </a:solidFill>
               </a:rPr>
-              <a:t>AIを褒めると性能は上がるのか？――文脈・メモリ・重み更新・RLHFを分けて考える</a:t>
+              <a:t>監査プロンプトをAIツール別に持つのをやめた。10本を対象別3本へ統合した設計</a:t>
             </a:r>
           </a:p>
         </p:txBody>
@@ -15335,7 +15984,7 @@
                 </a:solidFill>
                 <a:hlinkClick r:id="rId6"/>
               </a:rPr>
-              <a:t>https://zenn.dev/c_a_p_engineer/articles/praising-ai-context-memory-rlhf</a:t>
+              <a:t>https://qiita.com/ishizakahiroshi/items/a7065348ad7ca46ca521</a:t>
             </a:r>
           </a:p>
         </p:txBody>
@@ -15368,7 +16017,7 @@
                   <a:srgbClr val="7F8C8D"/>
                 </a:solidFill>
               </a:rPr>
-              <a:t>[Zenn]  </a:t>
+              <a:t>[Qiita]  </a:t>
             </a:r>
             <a:r>
               <a:rPr sz="1000" b="1">
@@ -15376,7 +16025,7 @@
                   <a:srgbClr val="CCDDEE"/>
                 </a:solidFill>
               </a:rPr>
-              <a:t>「過去データは長いほど精度が上がる」は本当か？4時間入力が最も高精度だった | 第7回：AIで為替の未来予測は本当にできるのか？</a:t>
+              <a:t>画像生成・動画生成のプロンプトを再現可能にする設計</a:t>
             </a:r>
           </a:p>
         </p:txBody>
@@ -15410,7 +16059,7 @@
                 </a:solidFill>
                 <a:hlinkClick r:id="rId7"/>
               </a:rPr>
-              <a:t>https://zenn.dev/hiro_algo/articles/fx-lstm-input-window-comparison</a:t>
+              <a:t>https://qiita.com/mapmc/items/a37fb37d869aa657e300</a:t>
             </a:r>
           </a:p>
         </p:txBody>
@@ -15443,7 +16092,7 @@
                   <a:srgbClr val="7F8C8D"/>
                 </a:solidFill>
               </a:rPr>
-              <a:t>[Zenn]  </a:t>
+              <a:t>[Qiita]  </a:t>
             </a:r>
             <a:r>
               <a:rPr sz="1000" b="1">
@@ -15451,7 +16100,7 @@
                   <a:srgbClr val="CCDDEE"/>
                 </a:solidFill>
               </a:rPr>
-              <a:t>大規模言語モデル（LLM）を端末で動かす無料の高校数学AIアプリを開発した</a:t>
+              <a:t>GitHub Copilot 向けの指示を構造化して管理</a:t>
             </a:r>
           </a:p>
         </p:txBody>
@@ -15485,7 +16134,7 @@
                 </a:solidFill>
                 <a:hlinkClick r:id="rId8"/>
               </a:rPr>
-              <a:t>https://zenn.dev/ai_chi/articles/cee2081ac9255a</a:t>
+              <a:t>https://qiita.com/h-nasu/items/d0b2601bb179a6cdd5eb</a:t>
             </a:r>
           </a:p>
         </p:txBody>
@@ -15518,7 +16167,7 @@
                   <a:srgbClr val="7F8C8D"/>
                 </a:solidFill>
               </a:rPr>
-              <a:t>[Qiita]  </a:t>
+              <a:t>[Zenn]  </a:t>
             </a:r>
             <a:r>
               <a:rPr sz="1000" b="1">
@@ -15526,7 +16175,7 @@
                   <a:srgbClr val="CCDDEE"/>
                 </a:solidFill>
               </a:rPr>
-              <a:t>AI文章を整えるSkill「teire」を作ってみた</a:t>
+              <a:t>SynthIDとは何か</a:t>
             </a:r>
           </a:p>
         </p:txBody>
@@ -15560,7 +16209,7 @@
                 </a:solidFill>
                 <a:hlinkClick r:id="rId9"/>
               </a:rPr>
-              <a:t>https://qiita.com/HN6039940/items/e794b2340a113c85fd1d</a:t>
+              <a:t>https://zenn.dev/todesking/articles/d23fd40b319388</a:t>
             </a:r>
           </a:p>
         </p:txBody>
@@ -15601,7 +16250,7 @@
                   <a:srgbClr val="CCDDEE"/>
                 </a:solidFill>
               </a:rPr>
-              <a:t>AI用ドキュメントと開発者用ドキュメントの混在問題を解決する — copilot-instructions 導入時の課題と段階的な運用開始方法</a:t>
+              <a:t>コラム：ペルソナプロンプトの箱庭設計とは</a:t>
             </a:r>
           </a:p>
         </p:txBody>
@@ -15635,7 +16284,7 @@
                 </a:solidFill>
                 <a:hlinkClick r:id="rId10"/>
               </a:rPr>
-              <a:t>https://qiita.com/h-nasu/items/5634ceb0619b37ef7f98</a:t>
+              <a:t>https://qiita.com/otoyo0318/items/411f8f3d4813f66c3af9</a:t>
             </a:r>
           </a:p>
         </p:txBody>
@@ -15668,7 +16317,7 @@
                   <a:srgbClr val="7F8C8D"/>
                 </a:solidFill>
               </a:rPr>
-              <a:t>[Zenn]  </a:t>
+              <a:t>[Qiita]  </a:t>
             </a:r>
             <a:r>
               <a:rPr sz="1000" b="1">
@@ -15676,7 +16325,7 @@
                   <a:srgbClr val="CCDDEE"/>
                 </a:solidFill>
               </a:rPr>
-              <a:t>ファインチューニング比較検証　--ジャンルの異なる学習データを使った時、モデル応答に違いが見られるか</a:t>
+              <a:t>「AIへの指示がうまい人」は、実は言語化がうまいだけ——AIで鍛える一生モノの力</a:t>
             </a:r>
           </a:p>
         </p:txBody>
@@ -15710,7 +16359,7 @@
                 </a:solidFill>
                 <a:hlinkClick r:id="rId11"/>
               </a:rPr>
-              <a:t>https://zenn.dev/sapolas/articles/45a3a1456e1dfb</a:t>
+              <a:t>https://qiita.com/Skillsheet-Port/items/0ea38eeebb9b94dc708e</a:t>
             </a:r>
           </a:p>
         </p:txBody>
@@ -15751,7 +16400,7 @@
                   <a:srgbClr val="CCDDEE"/>
                 </a:solidFill>
               </a:rPr>
-              <a:t>監査プロンプトをAIツール別に持つのをやめた。10本を対象別3本へ統合した設計</a:t>
+              <a:t>AIを使うときの感覚：上手な指示と長いチャットの扱い方</a:t>
             </a:r>
           </a:p>
         </p:txBody>
@@ -15785,7 +16434,7 @@
                 </a:solidFill>
                 <a:hlinkClick r:id="rId12"/>
               </a:rPr>
-              <a:t>https://qiita.com/ishizakahiroshi/items/a7065348ad7ca46ca521</a:t>
+              <a:t>https://qiita.com/ramutarafarm/items/3625867c29a869e9f94d</a:t>
             </a:r>
           </a:p>
         </p:txBody>
@@ -15818,7 +16467,7 @@
                   <a:srgbClr val="7F8C8D"/>
                 </a:solidFill>
               </a:rPr>
-              <a:t>[Qiita]  </a:t>
+              <a:t>[Zenn]  </a:t>
             </a:r>
             <a:r>
               <a:rPr sz="1000" b="1">
@@ -15826,7 +16475,7 @@
                   <a:srgbClr val="CCDDEE"/>
                 </a:solidFill>
               </a:rPr>
-              <a:t>画像生成・動画生成のプロンプトを再現可能にする設計</a:t>
+              <a:t>AI時代のキャリア戦略　第7回 AIと人間は何が違うのか</a:t>
             </a:r>
           </a:p>
         </p:txBody>
@@ -15860,7 +16509,7 @@
                 </a:solidFill>
                 <a:hlinkClick r:id="rId13"/>
               </a:rPr>
-              <a:t>https://qiita.com/mapmc/items/a37fb37d869aa657e300</a:t>
+              <a:t>https://zenn.dev/jinfuroi/articles/b2e3c2c66f7d74</a:t>
             </a:r>
           </a:p>
         </p:txBody>
@@ -16041,7 +16690,7 @@
                   <a:srgbClr val="FFFFFF"/>
                 </a:solidFill>
               </a:rPr>
-              <a:t>その他の記事　(7 / 7)</a:t>
+              <a:t>その他の記事　(8 / 8)</a:t>
             </a:r>
           </a:p>
         </p:txBody>
@@ -16074,7 +16723,7 @@
                   <a:srgbClr val="7F8C8D"/>
                 </a:solidFill>
               </a:rPr>
-              <a:t>[Qiita]  </a:t>
+              <a:t>[Zenn]  </a:t>
             </a:r>
             <a:r>
               <a:rPr sz="1000" b="1">
@@ -16082,7 +16731,7 @@
                   <a:srgbClr val="CCDDEE"/>
                 </a:solidFill>
               </a:rPr>
-              <a:t>GitHub Copilot 向けの指示を構造化して管理</a:t>
+              <a:t>生成AIと20回改修して、Jupyter Notebook上に「3Dバーチャートレース」を作った話</a:t>
             </a:r>
           </a:p>
         </p:txBody>
@@ -16116,7 +16765,7 @@
                 </a:solidFill>
                 <a:hlinkClick r:id="rId2"/>
               </a:rPr>
-              <a:t>https://qiita.com/h-nasu/items/d0b2601bb179a6cdd5eb</a:t>
+              <a:t>https://zenn.dev/hajimeteradio3/articles/c710f3020097ae</a:t>
             </a:r>
           </a:p>
         </p:txBody>
@@ -16157,7 +16806,7 @@
                   <a:srgbClr val="CCDDEE"/>
                 </a:solidFill>
               </a:rPr>
-              <a:t>SynthIDとは何か</a:t>
+              <a:t>AI時代のキャリア戦略　第8回 AIは知識を学習する。人間は人生を学習する。</a:t>
             </a:r>
           </a:p>
         </p:txBody>
@@ -16191,682 +16840,7 @@
                 </a:solidFill>
                 <a:hlinkClick r:id="rId3"/>
               </a:rPr>
-              <a:t>https://zenn.dev/todesking/articles/d23fd40b319388</a:t>
-            </a:r>
-          </a:p>
-        </p:txBody>
-      </p:sp>
-      <p:sp>
-        <p:nvSpPr>
-          <p:cNvPr id="10" name="TextBox 9"/>
-          <p:cNvSpPr txBox="1"/>
-          <p:nvPr/>
-        </p:nvSpPr>
-        <p:spPr>
-          <a:xfrm>
-            <a:off x="365760" y="1908810"/>
-            <a:ext cx="11430000" cy="214312"/>
-          </a:xfrm>
-          <a:prstGeom prst="rect">
-            <a:avLst/>
-          </a:prstGeom>
-          <a:noFill/>
-        </p:spPr>
-        <p:txBody>
-          <a:bodyPr wrap="none">
-            <a:spAutoFit/>
-          </a:bodyPr>
-          <a:lstStyle/>
-          <a:p>
-            <a:r>
-              <a:rPr sz="800" b="1">
-                <a:solidFill>
-                  <a:srgbClr val="7F8C8D"/>
-                </a:solidFill>
-              </a:rPr>
-              <a:t>[Qiita]  </a:t>
-            </a:r>
-            <a:r>
-              <a:rPr sz="1000" b="1">
-                <a:solidFill>
-                  <a:srgbClr val="CCDDEE"/>
-                </a:solidFill>
-              </a:rPr>
-              <a:t>コラム：ペルソナプロンプトの箱庭設計とは</a:t>
-            </a:r>
-          </a:p>
-        </p:txBody>
-      </p:sp>
-      <p:sp>
-        <p:nvSpPr>
-          <p:cNvPr id="11" name="TextBox 10"/>
-          <p:cNvSpPr txBox="1"/>
-          <p:nvPr/>
-        </p:nvSpPr>
-        <p:spPr>
-          <a:xfrm>
-            <a:off x="640080" y="2123122"/>
-            <a:ext cx="11155680" cy="214312"/>
-          </a:xfrm>
-          <a:prstGeom prst="rect">
-            <a:avLst/>
-          </a:prstGeom>
-          <a:noFill/>
-        </p:spPr>
-        <p:txBody>
-          <a:bodyPr wrap="none">
-            <a:spAutoFit/>
-          </a:bodyPr>
-          <a:lstStyle/>
-          <a:p>
-            <a:r>
-              <a:rPr sz="800">
-                <a:solidFill>
-                  <a:srgbClr val="5DADE8"/>
-                </a:solidFill>
-                <a:hlinkClick r:id="rId4"/>
-              </a:rPr>
-              <a:t>https://qiita.com/otoyo0318/items/411f8f3d4813f66c3af9</a:t>
-            </a:r>
-          </a:p>
-        </p:txBody>
-      </p:sp>
-      <p:sp>
-        <p:nvSpPr>
-          <p:cNvPr id="12" name="TextBox 11"/>
-          <p:cNvSpPr txBox="1"/>
-          <p:nvPr/>
-        </p:nvSpPr>
-        <p:spPr>
-          <a:xfrm>
-            <a:off x="365760" y="2337435"/>
-            <a:ext cx="11430000" cy="214312"/>
-          </a:xfrm>
-          <a:prstGeom prst="rect">
-            <a:avLst/>
-          </a:prstGeom>
-          <a:noFill/>
-        </p:spPr>
-        <p:txBody>
-          <a:bodyPr wrap="none">
-            <a:spAutoFit/>
-          </a:bodyPr>
-          <a:lstStyle/>
-          <a:p>
-            <a:r>
-              <a:rPr sz="800" b="1">
-                <a:solidFill>
-                  <a:srgbClr val="7F8C8D"/>
-                </a:solidFill>
-              </a:rPr>
-              <a:t>[Qiita]  </a:t>
-            </a:r>
-            <a:r>
-              <a:rPr sz="1000" b="1">
-                <a:solidFill>
-                  <a:srgbClr val="CCDDEE"/>
-                </a:solidFill>
-              </a:rPr>
-              <a:t>「AIへの指示がうまい人」は、実は言語化がうまいだけ——AIで鍛える一生モノの力</a:t>
-            </a:r>
-          </a:p>
-        </p:txBody>
-      </p:sp>
-      <p:sp>
-        <p:nvSpPr>
-          <p:cNvPr id="13" name="TextBox 12"/>
-          <p:cNvSpPr txBox="1"/>
-          <p:nvPr/>
-        </p:nvSpPr>
-        <p:spPr>
-          <a:xfrm>
-            <a:off x="640080" y="2551747"/>
-            <a:ext cx="11155680" cy="214312"/>
-          </a:xfrm>
-          <a:prstGeom prst="rect">
-            <a:avLst/>
-          </a:prstGeom>
-          <a:noFill/>
-        </p:spPr>
-        <p:txBody>
-          <a:bodyPr wrap="none">
-            <a:spAutoFit/>
-          </a:bodyPr>
-          <a:lstStyle/>
-          <a:p>
-            <a:r>
-              <a:rPr sz="800">
-                <a:solidFill>
-                  <a:srgbClr val="5DADE8"/>
-                </a:solidFill>
-                <a:hlinkClick r:id="rId5"/>
-              </a:rPr>
-              <a:t>https://qiita.com/Skillsheet-Port/items/0ea38eeebb9b94dc708e</a:t>
-            </a:r>
-          </a:p>
-        </p:txBody>
-      </p:sp>
-      <p:sp>
-        <p:nvSpPr>
-          <p:cNvPr id="14" name="TextBox 13"/>
-          <p:cNvSpPr txBox="1"/>
-          <p:nvPr/>
-        </p:nvSpPr>
-        <p:spPr>
-          <a:xfrm>
-            <a:off x="365760" y="2766060"/>
-            <a:ext cx="11430000" cy="214312"/>
-          </a:xfrm>
-          <a:prstGeom prst="rect">
-            <a:avLst/>
-          </a:prstGeom>
-          <a:noFill/>
-        </p:spPr>
-        <p:txBody>
-          <a:bodyPr wrap="none">
-            <a:spAutoFit/>
-          </a:bodyPr>
-          <a:lstStyle/>
-          <a:p>
-            <a:r>
-              <a:rPr sz="800" b="1">
-                <a:solidFill>
-                  <a:srgbClr val="7F8C8D"/>
-                </a:solidFill>
-              </a:rPr>
-              <a:t>[Qiita]  </a:t>
-            </a:r>
-            <a:r>
-              <a:rPr sz="1000" b="1">
-                <a:solidFill>
-                  <a:srgbClr val="CCDDEE"/>
-                </a:solidFill>
-              </a:rPr>
-              <a:t>AIを使うときの感覚：上手な指示と長いチャットの扱い方</a:t>
-            </a:r>
-          </a:p>
-        </p:txBody>
-      </p:sp>
-      <p:sp>
-        <p:nvSpPr>
-          <p:cNvPr id="15" name="TextBox 14"/>
-          <p:cNvSpPr txBox="1"/>
-          <p:nvPr/>
-        </p:nvSpPr>
-        <p:spPr>
-          <a:xfrm>
-            <a:off x="640080" y="2980372"/>
-            <a:ext cx="11155680" cy="214312"/>
-          </a:xfrm>
-          <a:prstGeom prst="rect">
-            <a:avLst/>
-          </a:prstGeom>
-          <a:noFill/>
-        </p:spPr>
-        <p:txBody>
-          <a:bodyPr wrap="none">
-            <a:spAutoFit/>
-          </a:bodyPr>
-          <a:lstStyle/>
-          <a:p>
-            <a:r>
-              <a:rPr sz="800">
-                <a:solidFill>
-                  <a:srgbClr val="5DADE8"/>
-                </a:solidFill>
-                <a:hlinkClick r:id="rId6"/>
-              </a:rPr>
-              <a:t>https://qiita.com/ramutarafarm/items/3625867c29a869e9f94d</a:t>
-            </a:r>
-          </a:p>
-        </p:txBody>
-      </p:sp>
-      <p:sp>
-        <p:nvSpPr>
-          <p:cNvPr id="16" name="TextBox 15"/>
-          <p:cNvSpPr txBox="1"/>
-          <p:nvPr/>
-        </p:nvSpPr>
-        <p:spPr>
-          <a:xfrm>
-            <a:off x="365760" y="3194685"/>
-            <a:ext cx="11430000" cy="214312"/>
-          </a:xfrm>
-          <a:prstGeom prst="rect">
-            <a:avLst/>
-          </a:prstGeom>
-          <a:noFill/>
-        </p:spPr>
-        <p:txBody>
-          <a:bodyPr wrap="none">
-            <a:spAutoFit/>
-          </a:bodyPr>
-          <a:lstStyle/>
-          <a:p>
-            <a:r>
-              <a:rPr sz="800" b="1">
-                <a:solidFill>
-                  <a:srgbClr val="7F8C8D"/>
-                </a:solidFill>
-              </a:rPr>
-              <a:t>[Qiita]  </a:t>
-            </a:r>
-            <a:r>
-              <a:rPr sz="1000" b="1">
-                <a:solidFill>
-                  <a:srgbClr val="CCDDEE"/>
-                </a:solidFill>
-              </a:rPr>
-              <a:t>コピペで使える AIにコードを書かせるプロンプト。初心者がまず覚える型と、そのまま使える例文集</a:t>
-            </a:r>
-          </a:p>
-        </p:txBody>
-      </p:sp>
-      <p:sp>
-        <p:nvSpPr>
-          <p:cNvPr id="17" name="TextBox 16"/>
-          <p:cNvSpPr txBox="1"/>
-          <p:nvPr/>
-        </p:nvSpPr>
-        <p:spPr>
-          <a:xfrm>
-            <a:off x="640080" y="3408997"/>
-            <a:ext cx="11155680" cy="214312"/>
-          </a:xfrm>
-          <a:prstGeom prst="rect">
-            <a:avLst/>
-          </a:prstGeom>
-          <a:noFill/>
-        </p:spPr>
-        <p:txBody>
-          <a:bodyPr wrap="none">
-            <a:spAutoFit/>
-          </a:bodyPr>
-          <a:lstStyle/>
-          <a:p>
-            <a:r>
-              <a:rPr sz="800">
-                <a:solidFill>
-                  <a:srgbClr val="5DADE8"/>
-                </a:solidFill>
-                <a:hlinkClick r:id="rId7"/>
-              </a:rPr>
-              <a:t>https://qiita.com/Rapls/items/8acc4aa395b04c184e96</a:t>
-            </a:r>
-          </a:p>
-        </p:txBody>
-      </p:sp>
-      <p:sp>
-        <p:nvSpPr>
-          <p:cNvPr id="18" name="TextBox 17"/>
-          <p:cNvSpPr txBox="1"/>
-          <p:nvPr/>
-        </p:nvSpPr>
-        <p:spPr>
-          <a:xfrm>
-            <a:off x="365760" y="3623310"/>
-            <a:ext cx="11430000" cy="214312"/>
-          </a:xfrm>
-          <a:prstGeom prst="rect">
-            <a:avLst/>
-          </a:prstGeom>
-          <a:noFill/>
-        </p:spPr>
-        <p:txBody>
-          <a:bodyPr wrap="none">
-            <a:spAutoFit/>
-          </a:bodyPr>
-          <a:lstStyle/>
-          <a:p>
-            <a:r>
-              <a:rPr sz="800" b="1">
-                <a:solidFill>
-                  <a:srgbClr val="7F8C8D"/>
-                </a:solidFill>
-              </a:rPr>
-              <a:t>[Qiita]  </a:t>
-            </a:r>
-            <a:r>
-              <a:rPr sz="1000" b="1">
-                <a:solidFill>
-                  <a:srgbClr val="CCDDEE"/>
-                </a:solidFill>
-              </a:rPr>
-              <a:t>「トークン消費量が多い」はもう悪口だ——AIを使いこなせない人の、本当の弱点</a:t>
-            </a:r>
-          </a:p>
-        </p:txBody>
-      </p:sp>
-      <p:sp>
-        <p:nvSpPr>
-          <p:cNvPr id="19" name="TextBox 18"/>
-          <p:cNvSpPr txBox="1"/>
-          <p:nvPr/>
-        </p:nvSpPr>
-        <p:spPr>
-          <a:xfrm>
-            <a:off x="640080" y="3837622"/>
-            <a:ext cx="11155680" cy="214312"/>
-          </a:xfrm>
-          <a:prstGeom prst="rect">
-            <a:avLst/>
-          </a:prstGeom>
-          <a:noFill/>
-        </p:spPr>
-        <p:txBody>
-          <a:bodyPr wrap="none">
-            <a:spAutoFit/>
-          </a:bodyPr>
-          <a:lstStyle/>
-          <a:p>
-            <a:r>
-              <a:rPr sz="800">
-                <a:solidFill>
-                  <a:srgbClr val="5DADE8"/>
-                </a:solidFill>
-                <a:hlinkClick r:id="rId8"/>
-              </a:rPr>
-              <a:t>https://qiita.com/Skillsheet-Port/items/4cd692961ed03421b794</a:t>
-            </a:r>
-          </a:p>
-        </p:txBody>
-      </p:sp>
-      <p:sp>
-        <p:nvSpPr>
-          <p:cNvPr id="20" name="TextBox 19"/>
-          <p:cNvSpPr txBox="1"/>
-          <p:nvPr/>
-        </p:nvSpPr>
-        <p:spPr>
-          <a:xfrm>
-            <a:off x="365760" y="4051935"/>
-            <a:ext cx="11430000" cy="214312"/>
-          </a:xfrm>
-          <a:prstGeom prst="rect">
-            <a:avLst/>
-          </a:prstGeom>
-          <a:noFill/>
-        </p:spPr>
-        <p:txBody>
-          <a:bodyPr wrap="none">
-            <a:spAutoFit/>
-          </a:bodyPr>
-          <a:lstStyle/>
-          <a:p>
-            <a:r>
-              <a:rPr sz="800" b="1">
-                <a:solidFill>
-                  <a:srgbClr val="7F8C8D"/>
-                </a:solidFill>
-              </a:rPr>
-              <a:t>[Zenn]  </a:t>
-            </a:r>
-            <a:r>
-              <a:rPr sz="1000" b="1">
-                <a:solidFill>
-                  <a:srgbClr val="CCDDEE"/>
-                </a:solidFill>
-              </a:rPr>
-              <a:t>AI時代のキャリア戦略　第7回 AIと人間は何が違うのか</a:t>
-            </a:r>
-          </a:p>
-        </p:txBody>
-      </p:sp>
-      <p:sp>
-        <p:nvSpPr>
-          <p:cNvPr id="21" name="TextBox 20"/>
-          <p:cNvSpPr txBox="1"/>
-          <p:nvPr/>
-        </p:nvSpPr>
-        <p:spPr>
-          <a:xfrm>
-            <a:off x="640080" y="4266247"/>
-            <a:ext cx="11155680" cy="214312"/>
-          </a:xfrm>
-          <a:prstGeom prst="rect">
-            <a:avLst/>
-          </a:prstGeom>
-          <a:noFill/>
-        </p:spPr>
-        <p:txBody>
-          <a:bodyPr wrap="none">
-            <a:spAutoFit/>
-          </a:bodyPr>
-          <a:lstStyle/>
-          <a:p>
-            <a:r>
-              <a:rPr sz="800">
-                <a:solidFill>
-                  <a:srgbClr val="5DADE8"/>
-                </a:solidFill>
-                <a:hlinkClick r:id="rId9"/>
-              </a:rPr>
-              <a:t>https://zenn.dev/jinfuroi/articles/b2e3c2c66f7d74</a:t>
-            </a:r>
-          </a:p>
-        </p:txBody>
-      </p:sp>
-      <p:sp>
-        <p:nvSpPr>
-          <p:cNvPr id="22" name="TextBox 21"/>
-          <p:cNvSpPr txBox="1"/>
-          <p:nvPr/>
-        </p:nvSpPr>
-        <p:spPr>
-          <a:xfrm>
-            <a:off x="365760" y="4480560"/>
-            <a:ext cx="11430000" cy="214312"/>
-          </a:xfrm>
-          <a:prstGeom prst="rect">
-            <a:avLst/>
-          </a:prstGeom>
-          <a:noFill/>
-        </p:spPr>
-        <p:txBody>
-          <a:bodyPr wrap="none">
-            <a:spAutoFit/>
-          </a:bodyPr>
-          <a:lstStyle/>
-          <a:p>
-            <a:r>
-              <a:rPr sz="800" b="1">
-                <a:solidFill>
-                  <a:srgbClr val="7F8C8D"/>
-                </a:solidFill>
-              </a:rPr>
-              <a:t>[Zenn]  </a:t>
-            </a:r>
-            <a:r>
-              <a:rPr sz="1000" b="1">
-                <a:solidFill>
-                  <a:srgbClr val="CCDDEE"/>
-                </a:solidFill>
-              </a:rPr>
-              <a:t>生成AIと20回改修して、Jupyter Notebook上に「3Dバーチャートレース」を作った話</a:t>
-            </a:r>
-          </a:p>
-        </p:txBody>
-      </p:sp>
-      <p:sp>
-        <p:nvSpPr>
-          <p:cNvPr id="23" name="TextBox 22"/>
-          <p:cNvSpPr txBox="1"/>
-          <p:nvPr/>
-        </p:nvSpPr>
-        <p:spPr>
-          <a:xfrm>
-            <a:off x="640080" y="4694872"/>
-            <a:ext cx="11155680" cy="214312"/>
-          </a:xfrm>
-          <a:prstGeom prst="rect">
-            <a:avLst/>
-          </a:prstGeom>
-          <a:noFill/>
-        </p:spPr>
-        <p:txBody>
-          <a:bodyPr wrap="none">
-            <a:spAutoFit/>
-          </a:bodyPr>
-          <a:lstStyle/>
-          <a:p>
-            <a:r>
-              <a:rPr sz="800">
-                <a:solidFill>
-                  <a:srgbClr val="5DADE8"/>
-                </a:solidFill>
-                <a:hlinkClick r:id="rId10"/>
-              </a:rPr>
-              <a:t>https://zenn.dev/hajimeteradio3/articles/c710f3020097ae</a:t>
-            </a:r>
-          </a:p>
-        </p:txBody>
-      </p:sp>
-      <p:sp>
-        <p:nvSpPr>
-          <p:cNvPr id="24" name="TextBox 23"/>
-          <p:cNvSpPr txBox="1"/>
-          <p:nvPr/>
-        </p:nvSpPr>
-        <p:spPr>
-          <a:xfrm>
-            <a:off x="365760" y="4909185"/>
-            <a:ext cx="11430000" cy="214312"/>
-          </a:xfrm>
-          <a:prstGeom prst="rect">
-            <a:avLst/>
-          </a:prstGeom>
-          <a:noFill/>
-        </p:spPr>
-        <p:txBody>
-          <a:bodyPr wrap="none">
-            <a:spAutoFit/>
-          </a:bodyPr>
-          <a:lstStyle/>
-          <a:p>
-            <a:r>
-              <a:rPr sz="800" b="1">
-                <a:solidFill>
-                  <a:srgbClr val="7F8C8D"/>
-                </a:solidFill>
-              </a:rPr>
-              <a:t>[Zenn]  </a:t>
-            </a:r>
-            <a:r>
-              <a:rPr sz="1000" b="1">
-                <a:solidFill>
-                  <a:srgbClr val="CCDDEE"/>
-                </a:solidFill>
-              </a:rPr>
-              <a:t>AI時代のキャリア戦略　第8回 AIは知識を学習する。人間は人生を学習する。</a:t>
-            </a:r>
-          </a:p>
-        </p:txBody>
-      </p:sp>
-      <p:sp>
-        <p:nvSpPr>
-          <p:cNvPr id="25" name="TextBox 24"/>
-          <p:cNvSpPr txBox="1"/>
-          <p:nvPr/>
-        </p:nvSpPr>
-        <p:spPr>
-          <a:xfrm>
-            <a:off x="640080" y="5123497"/>
-            <a:ext cx="11155680" cy="214312"/>
-          </a:xfrm>
-          <a:prstGeom prst="rect">
-            <a:avLst/>
-          </a:prstGeom>
-          <a:noFill/>
-        </p:spPr>
-        <p:txBody>
-          <a:bodyPr wrap="none">
-            <a:spAutoFit/>
-          </a:bodyPr>
-          <a:lstStyle/>
-          <a:p>
-            <a:r>
-              <a:rPr sz="800">
-                <a:solidFill>
-                  <a:srgbClr val="5DADE8"/>
-                </a:solidFill>
-                <a:hlinkClick r:id="rId11"/>
-              </a:rPr>
               <a:t>https://zenn.dev/jinfuroi/articles/f5ee4abc096810</a:t>
-            </a:r>
-          </a:p>
-        </p:txBody>
-      </p:sp>
-      <p:sp>
-        <p:nvSpPr>
-          <p:cNvPr id="26" name="TextBox 25"/>
-          <p:cNvSpPr txBox="1"/>
-          <p:nvPr/>
-        </p:nvSpPr>
-        <p:spPr>
-          <a:xfrm>
-            <a:off x="365760" y="5337810"/>
-            <a:ext cx="11430000" cy="214312"/>
-          </a:xfrm>
-          <a:prstGeom prst="rect">
-            <a:avLst/>
-          </a:prstGeom>
-          <a:noFill/>
-        </p:spPr>
-        <p:txBody>
-          <a:bodyPr wrap="none">
-            <a:spAutoFit/>
-          </a:bodyPr>
-          <a:lstStyle/>
-          <a:p>
-            <a:r>
-              <a:rPr sz="800" b="1">
-                <a:solidFill>
-                  <a:srgbClr val="7F8C8D"/>
-                </a:solidFill>
-              </a:rPr>
-              <a:t>[Zenn]  </a:t>
-            </a:r>
-            <a:r>
-              <a:rPr sz="1000" b="1">
-                <a:solidFill>
-                  <a:srgbClr val="CCDDEE"/>
-                </a:solidFill>
-              </a:rPr>
-              <a:t>Web上で公開される生成AIチャットボット5社の回答速度を比較！</a:t>
-            </a:r>
-          </a:p>
-        </p:txBody>
-      </p:sp>
-      <p:sp>
-        <p:nvSpPr>
-          <p:cNvPr id="27" name="TextBox 26"/>
-          <p:cNvSpPr txBox="1"/>
-          <p:nvPr/>
-        </p:nvSpPr>
-        <p:spPr>
-          <a:xfrm>
-            <a:off x="640080" y="5552122"/>
-            <a:ext cx="11155680" cy="214312"/>
-          </a:xfrm>
-          <a:prstGeom prst="rect">
-            <a:avLst/>
-          </a:prstGeom>
-          <a:noFill/>
-        </p:spPr>
-        <p:txBody>
-          <a:bodyPr wrap="none">
-            <a:spAutoFit/>
-          </a:bodyPr>
-          <a:lstStyle/>
-          <a:p>
-            <a:r>
-              <a:rPr sz="800">
-                <a:solidFill>
-                  <a:srgbClr val="5DADE8"/>
-                </a:solidFill>
-                <a:hlinkClick r:id="rId12"/>
-              </a:rPr>
-              <a:t>https://zenn.dev/sapolas/articles/7e36aca3347e06</a:t>
             </a:r>
           </a:p>
         </p:txBody>
@@ -17208,7 +17182,7 @@
                   <a:srgbClr val="FFFFFF"/>
                 </a:solidFill>
               </a:rPr>
-              <a:t>AIに41万行書かせた9か月の全記録を公開しました</a:t>
+              <a:t>画像生成プロンプトを再利用可能なワークフローにする：Image-to-Promptの実践</a:t>
             </a:r>
             <a:r>
               <a:rPr sz="900">
@@ -17216,7 +17190,7 @@
                   <a:srgbClr val="7F8C8D"/>
                 </a:solidFill>
               </a:rPr>
-              <a:t>  (2026-09-05)</a:t>
+              <a:t>  (2026-09-06)</a:t>
             </a:r>
           </a:p>
         </p:txBody>
@@ -17250,7 +17224,7 @@
                 </a:solidFill>
                 <a:hlinkClick r:id="rId2"/>
               </a:rPr>
-              <a:t>https://qiita.com/bluetalk/items/8e5316e5644a596f3f9e</a:t>
+              <a:t>https://qiita.com/onewin202602/items/e0cc8ca5f2c8449dcbf7</a:t>
             </a:r>
           </a:p>
         </p:txBody>
@@ -17283,7 +17257,9 @@
                   <a:srgbClr val="C0D8F0"/>
                 </a:solidFill>
               </a:rPr>
-              <a:t>昨年から積極的に AI を触っておりますが今年に入ってからの進化が目覚ましく、AI の研究と実業を兼ねて自社SaaS を構築するプロジェクトを開始しました。某プレイガイドの設計・開発に携わっていた経験を活かしてチケット販売プラットフォーム「CoMuse Ticket」を立ち上げました。設計から本番運</a:t>
+              <a:t>はじめに
+画像生成AIを使っていると、「同じ雰囲気の画像をもう一度作りたいのに、元の指示文を再現できない」という問題がよく起きます。特に人物写真やSNS用のビジュアルでは、構図・光・レンズ感・服装・背景などを分けて記録しておくと、修正や再利用がしやすくなります。
+この記事では、画像を起点にプロン</a:t>
             </a:r>
           </a:p>
         </p:txBody>
@@ -17410,7 +17386,7 @@
                   <a:srgbClr val="FFFFFF"/>
                 </a:solidFill>
               </a:rPr>
-              <a:t>日報を「書かせる」のをやめたら、何が変わる？｜AIで営業報告を自動化する実践的な考え方</a:t>
+              <a:t>AIに41万行書かせた9か月の全記録を公開しました</a:t>
             </a:r>
             <a:r>
               <a:rPr sz="900">
@@ -17452,7 +17428,7 @@
                 </a:solidFill>
                 <a:hlinkClick r:id="rId3"/>
               </a:rPr>
-              <a:t>https://qiita.com/DnD-inc/items/ec266470430ce114c80d</a:t>
+              <a:t>https://qiita.com/bluetalk/items/8e5316e5644a596f3f9e</a:t>
             </a:r>
           </a:p>
         </p:txBody>
@@ -17485,9 +17461,7 @@
                   <a:srgbClr val="C0D8F0"/>
                 </a:solidFill>
               </a:rPr>
-              <a:t>日報を「書かせる」のをやめたら、何が変わる？｜AIで営業報告を自動化する実践的な考え方
-&gt; 本記事は、株式会社DnD（https://dnd-inc.jp）のコラムを一部編集して掲載しています。
-&gt; 初出: https://dnd-inc.jp/blog/ai-daily-report-autom</a:t>
+              <a:t>昨年から積極的に AI を触っておりますが今年に入ってからの進化が目覚ましく、AI の研究と実業を兼ねて自社SaaS を構築するプロジェクトを開始しました。某プレイガイドの設計・開発に携わっていた経験を活かしてチケット販売プラットフォーム「CoMuse Ticket」を立ち上げました。設計から本番運</a:t>
             </a:r>
           </a:p>
         </p:txBody>
@@ -17606,7 +17580,7 @@
                   <a:srgbClr val="E74C3C"/>
                 </a:solidFill>
               </a:rPr>
-              <a:t>[HackerNews]  </a:t>
+              <a:t>[Zenn]  </a:t>
             </a:r>
             <a:r>
               <a:rPr sz="1200" b="1">
@@ -17614,7 +17588,7 @@
                   <a:srgbClr val="FFFFFF"/>
                 </a:solidFill>
               </a:rPr>
-              <a:t>Sharing files with ChatGPT when limit exceeded is legal?</a:t>
+              <a:t>Claude Code の変異テストが、偽の緑を出していた</a:t>
             </a:r>
             <a:r>
               <a:rPr sz="900">
@@ -17656,7 +17630,7 @@
                 </a:solidFill>
                 <a:hlinkClick r:id="rId4"/>
               </a:rPr>
-              <a:t>https://news.ycombinator.com/item?id=49572713</a:t>
+              <a:t>https://zenn.dev/erenoa6622/articles/mutation-test-false-green</a:t>
             </a:r>
           </a:p>
         </p:txBody>
@@ -17689,9 +17663,8 @@
                   <a:srgbClr val="C0D8F0"/>
                 </a:solidFill>
               </a:rPr>
-              <a:t>for dropbox method:
-but the Dropbox connector cannot extract the binary contents needed to inspect its PE/COM registration details.
-I would need any p</a:t>
+              <a:t>!
+「テストが本当に効いているかを確かめるために、わざと実装を壊して赤になるか見る」── その確認のほうが偽の緑を出していた、という記録です。扱うのは変異テスト（ミューテーションテスト）を手作りで回したときの落とし穴だけで、専用のフレームワークの使い方は書きません。対象は Claude Code に</a:t>
             </a:r>
           </a:p>
         </p:txBody>
@@ -18033,7 +18006,7 @@
                   <a:srgbClr val="FFFFFF"/>
                 </a:solidFill>
               </a:rPr>
-              <a:t>【ファインチューニング vs RAG】社内ナレッジベース構築におけるコスト対効果の技術的比較</a:t>
+              <a:t>Prompt EngineeringからLoop Engineeringまで  〜6年間のAIアプリケーションの歴史〜</a:t>
             </a:r>
             <a:r>
               <a:rPr sz="900">
@@ -18041,7 +18014,7 @@
                   <a:srgbClr val="7F8C8D"/>
                 </a:solidFill>
               </a:rPr>
-              <a:t>  (2026-09-04)</a:t>
+              <a:t>  (2026-09-05)</a:t>
             </a:r>
           </a:p>
         </p:txBody>
@@ -18075,7 +18048,7 @@
                 </a:solidFill>
                 <a:hlinkClick r:id="rId2"/>
               </a:rPr>
-              <a:t>https://qiita.com/NKKTechGlobal/items/06126206c1aab15bc45a</a:t>
+              <a:t>https://qiita.com/y_yoko/items/831e013a600b8d91ac44</a:t>
             </a:r>
           </a:p>
         </p:txBody>
@@ -18108,11 +18081,15 @@
                   <a:srgbClr val="C0D8F0"/>
                 </a:solidFill>
               </a:rPr>
-              <a:t>【ファインチューニング vs RAG】社内ナレッジベース構築におけるコスト対効果の技術的比較
-!Feature(149).png
-はじめに
-こんにちは、NKKTech Global 技術チームです。
-現在、多くの企業が生成AI（LLM）を活用した「社内ナレッジベース」の構築を検討、あるいは実施</a:t>
+              <a:t>1. はじめに
+ここ数年で、
+- Prompt Engineering
+- RAG
+- MCP
+- Context Engineering
+- Harness Engineering
+- Loop Engineering
+など、様々な言葉を目にするようになりました。改めて振り返ってみると、これ</a:t>
             </a:r>
           </a:p>
         </p:txBody>
@@ -18231,7 +18208,7 @@
                   <a:srgbClr val="2980B9"/>
                 </a:solidFill>
               </a:rPr>
-              <a:t>[Qiita]  </a:t>
+              <a:t>[HackerNews]  </a:t>
             </a:r>
             <a:r>
               <a:rPr sz="1200" b="1">
@@ -18239,7 +18216,7 @@
                   <a:srgbClr val="FFFFFF"/>
                 </a:solidFill>
               </a:rPr>
-              <a:t>RAGの検索精度は「質問理解」で変わる：Fine-grained Query Understandingを整理してみた</a:t>
+              <a:t>Finite time blowup for an averaged three-dimensional Navier-Stokes equation (2014)</a:t>
             </a:r>
             <a:r>
               <a:rPr sz="900">
@@ -18247,7 +18224,7 @@
                   <a:srgbClr val="7F8C8D"/>
                 </a:solidFill>
               </a:rPr>
-              <a:t>  (2026-09-04)</a:t>
+              <a:t>  (2026-09-05)</a:t>
             </a:r>
           </a:p>
         </p:txBody>
@@ -18281,7 +18258,7 @@
                 </a:solidFill>
                 <a:hlinkClick r:id="rId3"/>
               </a:rPr>
-              <a:t>https://qiita.com/engchina/items/f0a4f6dbe043d1fa4ba4</a:t>
+              <a:t>https://terrytao.wordpress.com/2014/02/04/finite-time-blowup-for-an-averaged-three-dimensi…</a:t>
             </a:r>
           </a:p>
         </p:txBody>
@@ -18314,11 +18291,7 @@
                   <a:srgbClr val="C0D8F0"/>
                 </a:solidFill>
               </a:rPr>
-              <a:t>初めに
-RAGを作っていると、Embedding検索やRerankを入れているのに、回答が少しズレることがあります。
-たとえば、ECサイトのヘルプ検索で、ユーザーがこう聞いたとします。
-しかし、ヘルプ文書では「キャンセル」ではなく「注文取消」という用語で書かれているかもしれません。
-また</a:t>
+              <a:t>Finite time blowup for an averaged three-dimensional Navier-Stokes equation (2014)</a:t>
             </a:r>
           </a:p>
         </p:txBody>
@@ -18437,7 +18410,7 @@
                   <a:srgbClr val="2980B9"/>
                 </a:solidFill>
               </a:rPr>
-              <a:t>[Zenn]  </a:t>
+              <a:t>[Qiita]  </a:t>
             </a:r>
             <a:r>
               <a:rPr sz="1200" b="1">
@@ -18445,7 +18418,7 @@
                   <a:srgbClr val="FFFFFF"/>
                 </a:solidFill>
               </a:rPr>
-              <a:t>FlutterGemmaでGemma 4 E4Bが動かない理由を、公式CLIとの比較で切り分けた話</a:t>
+              <a:t>評価駆動で高精度！LangGraphマルチエージェントRAGを実装する手順</a:t>
             </a:r>
             <a:r>
               <a:rPr sz="900">
@@ -18453,7 +18426,7 @@
                   <a:srgbClr val="7F8C8D"/>
                 </a:solidFill>
               </a:rPr>
-              <a:t>  (2026-09-04)</a:t>
+              <a:t>  (2026-09-05)</a:t>
             </a:r>
           </a:p>
         </p:txBody>
@@ -18487,7 +18460,7 @@
                 </a:solidFill>
                 <a:hlinkClick r:id="rId4"/>
               </a:rPr>
-              <a:t>https://zenn.dev/gitmame00/articles/a8f5f300d4ea86</a:t>
+              <a:t>https://qiita.com/Sa0422/items/8b48c27b572270412c04</a:t>
             </a:r>
           </a:p>
         </p:txBody>
@@ -18520,11 +18493,8 @@
                   <a:srgbClr val="C0D8F0"/>
                 </a:solidFill>
               </a:rPr>
-              <a:t>結論：Gemma 4は動く。動かないのはFlutter側だった。
-数週間、Exa-Vision Pro に Gemma 4 E4B を組み込もうとしていました。
-目標はシンプルです。
-完全オフラインで、スマホだけでRAG＋LLM推論を実現する。
-ところが Flutter では何度やっても同じエラー。</a:t>
+              <a:t>多くのLLMアプリケーション開発者が直面する課題、それは「複雑な推論を伴うタスクでの精度向上」ではないでしょうか。従来の単一エージェントRAGでは、複数の情報源を横断したり、多段階の思考プロセスを要する質問に答えるのが難しいケースが頻繁に発生します。
+この記事では、この課題を解決するために、Lan</a:t>
             </a:r>
           </a:p>
         </p:txBody>
@@ -18866,7 +18836,7 @@
                   <a:srgbClr val="FFFFFF"/>
                 </a:solidFill>
               </a:rPr>
-              <a:t>CLAUDE.mdをそろそろ見直す時期かも ── Claude 5世代向けの最適化手順・スキル・プロジェクト種類別の例</a:t>
+              <a:t>Claude Code開発者が押さえておきたいAnthropicニュース（2026-09-06）</a:t>
             </a:r>
             <a:r>
               <a:rPr sz="900">
@@ -18874,7 +18844,7 @@
                   <a:srgbClr val="7F8C8D"/>
                 </a:solidFill>
               </a:rPr>
-              <a:t>  (2026-09-05)</a:t>
+              <a:t>  (2026-09-06)</a:t>
             </a:r>
           </a:p>
         </p:txBody>
@@ -18908,7 +18878,7 @@
                 </a:solidFill>
                 <a:hlinkClick r:id="rId2"/>
               </a:rPr>
-              <a:t>https://qiita.com/nogataka/items/d6a54f3694726b9141f3</a:t>
+              <a:t>https://qiita.com/homhom44/items/229e92aba6fc5c17c4b0</a:t>
             </a:r>
           </a:p>
         </p:txBody>
@@ -18941,9 +18911,9 @@
                   <a:srgbClr val="C0D8F0"/>
                 </a:solidFill>
               </a:rPr>
-              <a:t>要点
-- Anthropic は 2026年7月24日のブログで、Claude Opus 5 / Fable 5 向けに Claude Code のシステムプロンプトを 80% 以上削り、社内コーディング評価で性能低下が測定できなかったと公表しました。
-- 理由は「制約の多くは最悪のケース回避のた</a:t>
+              <a:t>Anthropic の Claude / Claude Code 関連ニュースをまとめた索引だ。記事本文は日本語で PaPoo に投稿している。ここでは各記事の要点を紹介するので、詳細は各リンク先を読んでほしい。
+Claude の「考える」と「運ぶ」を分ける発想
+&gt; Hacker News で </a:t>
             </a:r>
           </a:p>
         </p:txBody>
@@ -19070,7 +19040,7 @@
                   <a:srgbClr val="FFFFFF"/>
                 </a:solidFill>
               </a:rPr>
-              <a:t>【コスパ最強】月1万円の下位プラン投資で爆速成果！Antigravity × Cursor × ChatGPT × Claudeの「4AI連携」開発・業務・執筆術</a:t>
+              <a:t>Bedrock GuardrailsだけでAIエージェントは守れるの？～ツール境界の隙間を検証してみた～</a:t>
             </a:r>
             <a:r>
               <a:rPr sz="900">
@@ -19078,7 +19048,7 @@
                   <a:srgbClr val="7F8C8D"/>
                 </a:solidFill>
               </a:rPr>
-              <a:t>  (2026-09-05)</a:t>
+              <a:t>  (2026-09-06)</a:t>
             </a:r>
           </a:p>
         </p:txBody>
@@ -19112,7 +19082,7 @@
                 </a:solidFill>
                 <a:hlinkClick r:id="rId3"/>
               </a:rPr>
-              <a:t>https://qiita.com/boraemon2000/items/71b60ef197bd8653a092</a:t>
+              <a:t>https://qiita.com/manaty/items/55838e17caa0b195891e</a:t>
             </a:r>
           </a:p>
         </p:txBody>
@@ -19145,9 +19115,11 @@
                   <a:srgbClr val="C0D8F0"/>
                 </a:solidFill>
               </a:rPr>
-              <a:t>【コスパ最強】月1万円の下位プラン投資で爆速成果！Antigravity × Cursor × ChatGPT × Claudeの「4AI連携」開発・業務・執筆術
-1. はじめに：AI課金沼にハマっていませんか？
-生成AIやAIエディタが実務に不可欠となった今、多くの人が直面するのが「AI課金の</a:t>
+              <a:t>:::note info
+この記事は「2026 Japan AWS Jr.Champions 真夏の Qiita リレー」の37日目の記事となります。
+過去の投稿（リンク集）はこちらからご覧ください。
+:::
+https://qiita.com/ys-yoshida/private/6f7c7f8</a:t>
             </a:r>
           </a:p>
         </p:txBody>
@@ -19274,7 +19246,7 @@
                   <a:srgbClr val="FFFFFF"/>
                 </a:solidFill>
               </a:rPr>
-              <a:t>TensorFlowで作ったモデルをVertex AI(現Agent Platform)にデプロイして推論を試してみた</a:t>
+              <a:t>AIが見ているスライドと、人間が見ているスライドは見え方が違う？</a:t>
             </a:r>
             <a:r>
               <a:rPr sz="900">
@@ -19282,7 +19254,7 @@
                   <a:srgbClr val="7F8C8D"/>
                 </a:solidFill>
               </a:rPr>
-              <a:t>  (2026-09-05)</a:t>
+              <a:t>  (2026-09-06)</a:t>
             </a:r>
           </a:p>
         </p:txBody>
@@ -19316,7 +19288,7 @@
                 </a:solidFill>
                 <a:hlinkClick r:id="rId4"/>
               </a:rPr>
-              <a:t>https://qiita.com/yukisnow0704/items/cf1a6f6bb72e157a0cbf</a:t>
+              <a:t>https://qiita.com/yama3133/items/7c0de7ea0db2a110b6d7</a:t>
             </a:r>
           </a:p>
         </p:txBody>
@@ -19350,7 +19322,8 @@
                 </a:solidFill>
               </a:rPr>
               <a:t>はじめに
-Webエンジニアとして9年ほど、主にPHP/Laravelでの開発をやってきました。以前、工場向けの危険検知システムを開発する案件で、TensorFlow(CNN)を使った画像解析モデルの実装に携わったことがあります。ただ直近1年ほどは開発の現場から少し離れ気味で、その間にAI周りの技術</a:t>
+AIエージェントにスライドを作らせるとき、参考にしてほしい既存のスライドを渡すことがあります。  
+Spec-Driven Presentation Maker(SDPM、AWS samplesが公開しているOSSで、フォークして機能追加と本番運用中)でこれを試したところ、PDFで渡した</a:t>
             </a:r>
           </a:p>
         </p:txBody>
@@ -19692,7 +19665,7 @@
                   <a:srgbClr val="FFFFFF"/>
                 </a:solidFill>
               </a:rPr>
-              <a:t>AI時代に求められるFDEというエンジニア像</a:t>
+              <a:t>「ネットはフェイク、メディアは正しい？」から考える情報社会の設計 ― 相互監査できる情報インフラへ : システム設計視点の行動経済学 (25)</a:t>
             </a:r>
             <a:r>
               <a:rPr sz="900">
@@ -19700,7 +19673,7 @@
                   <a:srgbClr val="7F8C8D"/>
                 </a:solidFill>
               </a:rPr>
-              <a:t>  (2026-09-05)</a:t>
+              <a:t>  (2026-09-06)</a:t>
             </a:r>
           </a:p>
         </p:txBody>
@@ -19734,7 +19707,7 @@
                 </a:solidFill>
                 <a:hlinkClick r:id="rId2"/>
               </a:rPr>
-              <a:t>https://qiita.com/blue_islands/items/d65fcd34c40302dbaa9e</a:t>
+              <a:t>https://qiita.com/maskot1977/items/8ef0ba599c0f04bf3639</a:t>
             </a:r>
           </a:p>
         </p:txBody>
@@ -19767,10 +19740,9 @@
                   <a:srgbClr val="C0D8F0"/>
                 </a:solidFill>
               </a:rPr>
-              <a:t>生成AIの普及によって、「エンジニアの仕事がAIに奪われる」という話を聞くことが増えました。
-一方で、企業のAI活用は急速に進み、AIを実際の業務に導入できるエンジニアの需要は高まっています。
-エンジニアが余ると言われる一方で、エンジニアが足りないとも言われる。
-一見すると矛盾しているようです</a:t>
+              <a:t>user:
+「システム設計視点の行動経済学」、第25回を始めましょう。今回は「マスメディアの役割」を深掘りしたいと思います。その前に、まず前回の復習として、
+官僚機構を「守る組織」から「学習する組織」へ ― 日本の行政をアップデートするリファクタリング : システム設計視点の行動経済学 (24</a:t>
             </a:r>
           </a:p>
         </p:txBody>
@@ -19897,7 +19869,7 @@
                   <a:srgbClr val="FFFFFF"/>
                 </a:solidFill>
               </a:rPr>
-              <a:t>9/5、今日のセキュリティニュース</a:t>
+              <a:t># 【AI活用】スライド生成ガチャから抜ける。CodexとGemini Notebookで報告スライドを作る実務フロー</a:t>
             </a:r>
             <a:r>
               <a:rPr sz="900">
@@ -19939,7 +19911,7 @@
                 </a:solidFill>
                 <a:hlinkClick r:id="rId3"/>
               </a:rPr>
-              <a:t>https://qiita.com/Kerdy/items/18fe414da694203d8393</a:t>
+              <a:t>https://qiita.com/jjworks/items/d6a29d600da5f9b53877</a:t>
             </a:r>
           </a:p>
         </p:txBody>
@@ -19972,11 +19944,11 @@
                   <a:srgbClr val="C0D8F0"/>
                 </a:solidFill>
               </a:rPr>
-              <a:t>&gt; この記事は、note掲載記事の転載です。
-!見出し画像
-おはようございます、かーでぃです。
-本記事は、様々なネットニュースサイトからセキュリティ記事を集めて提供している”セキュリティ関連ニュースRSS”から、気になったニュースをピックアップして紹介しています。
-情シスさんやサイバーセキュリテ</a:t>
+              <a:t>!FT-020-qiita-slide-gacha-header.png
+はじめに
+&gt; 「この期間、何をしていましたか？」
+定期ヒアリングで毎回聞かれる質問なのに、いざ答えようとすると、その場で思い出せたことしか話せない。
+会議、調整、レビュー、認識合わせ。ちゃんと仕事をしていたはずなのに、ば</a:t>
             </a:r>
           </a:p>
         </p:txBody>
@@ -20095,7 +20067,7 @@
                   <a:srgbClr val="27AE60"/>
                 </a:solidFill>
               </a:rPr>
-              <a:t>[Qiita]  </a:t>
+              <a:t>[Zenn]  </a:t>
             </a:r>
             <a:r>
               <a:rPr sz="1200" b="1">
@@ -20103,7 +20075,7 @@
                   <a:srgbClr val="FFFFFF"/>
                 </a:solidFill>
               </a:rPr>
-              <a:t>AIに「本音で」社長を語らせたら、開発者の急所を抉られて「関係のIaC」に着地した話</a:t>
+              <a:t>DBクライアントのAI補助を、なぜローカルLLMでも動かせるようにしたのか</a:t>
             </a:r>
             <a:r>
               <a:rPr sz="900">
@@ -20145,7 +20117,7 @@
                 </a:solidFill>
                 <a:hlinkClick r:id="rId4"/>
               </a:rPr>
-              <a:t>https://qiita.com/kenichiyoshioka/items/f3a68b2df4f979ad08be</a:t>
+              <a:t>https://zenn.dev/libredb/articles/0fd0cf7f85f015</a:t>
             </a:r>
           </a:p>
         </p:txBody>
@@ -20178,11 +20150,7 @@
                   <a:srgbClr val="C0D8F0"/>
                 </a:solidFill>
               </a:rPr>
-              <a:t>&lt;!-- ★番外編・実録座談会。代表の意見を待って仕上げる素材版(2026-09-05)。公開前に qiitalint.py 必須 --&gt;
-&gt; 📚 番外編：AI二体で、雇い主を本音で語る座談会
----
-これは何か（脚色は、ひとつもありません）
-これは、ひとりでSaaSを作って運用している私（</a:t>
+              <a:t>筆者はLibreDB StudioというOSS（MITライセンス）の開発チームにいる。自分たちのプロダクトの設計の話なので、そこは先に明かしておく。売り込みたいわけではなく、「DBクライアントのAI補助を、クラウドのLLMだけでなくローカルのLLMでも動くようにした」という一点について、なぜそう決め</a:t>
             </a:r>
           </a:p>
         </p:txBody>
@@ -20524,7 +20492,7 @@
                   <a:srgbClr val="FFFFFF"/>
                 </a:solidFill>
               </a:rPr>
-              <a:t>【プロンプト公開】他のAIが3日後に知る情報を、Grokは「今」教えてくれる。Grok × Xで技術ニュース収集が完全無料で「週10分」に激変した話</a:t>
+              <a:t>OpenAIが「GPT-6 Astra」を発表、コーディング・サイバーセキュリティで最先端性能を主張</a:t>
             </a:r>
             <a:r>
               <a:rPr sz="900">
@@ -20566,7 +20534,7 @@
                 </a:solidFill>
                 <a:hlinkClick r:id="rId2"/>
               </a:rPr>
-              <a:t>https://qiita.com/shinkai_/items/dfc92e02ca1c461ead58</a:t>
+              <a:t>https://qiita.com/picnic/items/139c9f297be67c28566f</a:t>
             </a:r>
           </a:p>
         </p:txBody>
@@ -20600,9 +20568,7 @@
                 </a:solidFill>
               </a:rPr>
               <a:t>はじめに
-AI関連のニュースって、とにかく量が多いですよね。
-毎日のように新しいモデルが発表され、企業の動向がアップデートされ、セキュリティ関連の重大ニュースも次々に流れてきます。  
-そして、そういった情報の「一次情報としての新鮮さ」で言うと、圧倒的に強いのはXです。ニュースメディアが記事化す</a:t>
+2026年9月3日、OpenAI は新世代モデル「GPT-6 Astra」を公式ブログで発表しました。同社は本モデルを「これまでで最も知的かつアラインメントの進んだモデル」と位置付けており、特に コンピュータ操作(computer use)・コーディング・サイバーセキュリティ・科学 の4</a:t>
             </a:r>
           </a:p>
         </p:txBody>
@@ -20721,7 +20687,7 @@
                   <a:srgbClr val="E67E22"/>
                 </a:solidFill>
               </a:rPr>
-              <a:t>[HackerNews]  </a:t>
+              <a:t>[Qiita]  </a:t>
             </a:r>
             <a:r>
               <a:rPr sz="1200" b="1">
@@ -20729,7 +20695,7 @@
                   <a:srgbClr val="FFFFFF"/>
                 </a:solidFill>
               </a:rPr>
-              <a:t>GPT-6 Astra in code review: Gains, privacy, and cost</a:t>
+              <a:t>vLLMに基づくローカルモデルエンジニアリングパイプラインGatewayの設計と分析</a:t>
             </a:r>
             <a:r>
               <a:rPr sz="900">
@@ -20771,7 +20737,7 @@
                 </a:solidFill>
                 <a:hlinkClick r:id="rId3"/>
               </a:rPr>
-              <a:t>https://www.coderabbit.ai/blog/gpt-6-astra-code-review-evaluation</a:t>
+              <a:t>https://qiita.com/faliye/items/381fe4cf1a740414cc95</a:t>
             </a:r>
           </a:p>
         </p:txBody>
@@ -20804,7 +20770,7 @@
                   <a:srgbClr val="C0D8F0"/>
                 </a:solidFill>
               </a:rPr>
-              <a:t>GPT-6 Astra in code review: Gains, privacy, and cost</a:t>
+              <a:t>Ollamaを使用する際、ローカルでいくつかの中小モデルを起動し、ビジネスCoTは直接これらの小モデルにアクセスします。Ollama環境下のモデルは条件の制限により並行処理が難しく、固定のリクエストは高度に同質化されているため、ニーズに応じてモデルを選択できます。ツールチェーンを持たないローカル小モ</a:t>
             </a:r>
           </a:p>
         </p:txBody>
@@ -21233,7 +21199,7 @@
                   <a:srgbClr val="FFFFFF"/>
                 </a:solidFill>
               </a:rPr>
-              <a:t>AIに41万行書かせた9か月の全記録を公開しました</a:t>
+              <a:t>画像生成プロンプトを再利用可能なワークフローにする：Image-to-Promptの実践</a:t>
             </a:r>
             <a:r>
               <a:rPr sz="900">
@@ -21241,7 +21207,7 @@
                   <a:srgbClr val="7F8C8D"/>
                 </a:solidFill>
               </a:rPr>
-              <a:t>  (2026-09-05)</a:t>
+              <a:t>  (2026-09-06)</a:t>
             </a:r>
           </a:p>
         </p:txBody>
@@ -21283,7 +21249,7 @@
                 </a:solidFill>
                 <a:hlinkClick r:id="rId2"/>
               </a:rPr>
-              <a:t>https://qiita.com/bluetalk/items/8e5316e5644a596f3f9e</a:t>
+              <a:t>https://qiita.com/onewin202602/items/e0cc8ca5f2c8449dcbf7</a:t>
             </a:r>
           </a:p>
         </p:txBody>
@@ -21316,7 +21282,8 @@
                   <a:srgbClr val="7F8C8D"/>
                 </a:solidFill>
               </a:rPr>
-              <a:t>昨年から積極的に AI を触っておりますが今年に入ってからの進化が目覚ましく、AI の研究と実業を兼ねて自社SaaS を構築するプロジェクトを開始しました。某プレイガイドの設計・開発に携わっていた経験を活かしてチケット販売プラットフォーム「</a:t>
+              <a:t>はじめに
+画像生成AIを使っていると、「同じ雰囲気の画像をもう一度作りたいのに、元の指示文を再現できない」という問題がよく起きます。特に人物写真やSNS用のビジュアルでは、構図・光・レンズ感・服装・背景などを分けて記録しておくと、修正や再</a:t>
             </a:r>
           </a:p>
         </p:txBody>
@@ -21357,7 +21324,7 @@
                   <a:srgbClr val="FFFFFF"/>
                 </a:solidFill>
               </a:rPr>
-              <a:t>日報を「書かせる」のをやめたら、何が変わる？｜AIで営業報告を自動化する実践的な考え方</a:t>
+              <a:t>AIに41万行書かせた9か月の全記録を公開しました</a:t>
             </a:r>
             <a:r>
               <a:rPr sz="900">
@@ -21407,7 +21374,7 @@
                 </a:solidFill>
                 <a:hlinkClick r:id="rId3"/>
               </a:rPr>
-              <a:t>https://qiita.com/DnD-inc/items/ec266470430ce114c80d</a:t>
+              <a:t>https://qiita.com/bluetalk/items/8e5316e5644a596f3f9e</a:t>
             </a:r>
           </a:p>
         </p:txBody>
@@ -21440,9 +21407,7 @@
                   <a:srgbClr val="7F8C8D"/>
                 </a:solidFill>
               </a:rPr>
-              <a:t>日報を「書かせる」のをやめたら、何が変わる？｜AIで営業報告を自動化する実践的な考え方
-&gt; 本記事は、株式会社DnD（https://dnd-inc.jp）のコラムを一部編集して掲載しています。
-&gt; 初出: https://dnd-inc</a:t>
+              <a:t>昨年から積極的に AI を触っておりますが今年に入ってからの進化が目覚ましく、AI の研究と実業を兼ねて自社SaaS を構築するプロジェクトを開始しました。某プレイガイドの設計・開発に携わっていた経験を活かしてチケット販売プラットフォーム「</a:t>
             </a:r>
           </a:p>
         </p:txBody>
@@ -21483,7 +21448,7 @@
                   <a:srgbClr val="FFFFFF"/>
                 </a:solidFill>
               </a:rPr>
-              <a:t>Sharing files with ChatGPT when limit exceeded is legal?</a:t>
+              <a:t>Claude Code の変異テストが、偽の緑を出していた</a:t>
             </a:r>
             <a:r>
               <a:rPr sz="900">
@@ -21524,7 +21489,7 @@
                   <a:srgbClr val="E74C3C"/>
                 </a:solidFill>
               </a:rPr>
-              <a:t>[HackerNews]  </a:t>
+              <a:t>[Zenn]  </a:t>
             </a:r>
             <a:r>
               <a:rPr sz="800">
@@ -21533,7 +21498,7 @@
                 </a:solidFill>
                 <a:hlinkClick r:id="rId4"/>
               </a:rPr>
-              <a:t>https://news.ycombinator.com/item?id=49572713</a:t>
+              <a:t>https://zenn.dev/erenoa6622/articles/mutation-test-false-green</a:t>
             </a:r>
           </a:p>
         </p:txBody>
@@ -21566,8 +21531,8 @@
                   <a:srgbClr val="7F8C8D"/>
                 </a:solidFill>
               </a:rPr>
-              <a:t>for dropbox method:
-but the Dropbox connector cannot extract the binary contents needed to inspect its PE/COM registrati</a:t>
+              <a:t>!
+「テストが本当に効いているかを確かめるために、わざと実装を壊して赤になるか見る」── その確認のほうが偽の緑を出していた、という記録です。扱うのは変異テスト（ミューテーションテスト）を手作りで回したときの落とし穴だけで、専用のフレームワ</a:t>
             </a:r>
           </a:p>
         </p:txBody>
@@ -21910,7 +21875,7 @@
                   <a:srgbClr val="7F8C8D"/>
                 </a:solidFill>
               </a:rPr>
-              <a:t>※ 他 3 件は JSON アーカイブを参照</a:t>
+              <a:t>※ 他 2 件は JSON アーカイブを参照</a:t>
             </a:r>
           </a:p>
         </p:txBody>
@@ -21951,7 +21916,7 @@
                   <a:srgbClr val="FFFFFF"/>
                 </a:solidFill>
               </a:rPr>
-              <a:t>ISO704を投げてAIの比喩をやめさせる</a:t>
+              <a:t>ChatGPTのチャットからnote投稿を自動化するMCPを作った。認証・画像・リンクカード・公開まで</a:t>
             </a:r>
             <a:r>
               <a:rPr sz="900">
@@ -21959,7 +21924,7 @@
                   <a:srgbClr val="7F8C8D"/>
                 </a:solidFill>
               </a:rPr>
-              <a:t>  (2026-09-04)</a:t>
+              <a:t>  (2026-09-02)</a:t>
             </a:r>
           </a:p>
         </p:txBody>
@@ -22001,7 +21966,7 @@
                 </a:solidFill>
                 <a:hlinkClick r:id="rId2"/>
               </a:rPr>
-              <a:t>https://zenn.dev/hi_fi_anatomia/articles/137180ac014439</a:t>
+              <a:t>https://zenn.dev/rikunode/articles/chatgpt-note-mcp-production-flow</a:t>
             </a:r>
           </a:p>
         </p:txBody>
@@ -22034,10 +21999,8 @@
                   <a:srgbClr val="7F8C8D"/>
                 </a:solidFill>
               </a:rPr>
-              <a:t>ある日の不明な言葉
-コンポーネント設計の話をしていたときに、ある変更案についてClaudeは「配管が増える」と言った。
-別にこの単語自体は問題ないのだが、文脈の中で何を指しているのか分からず、読解が止まった。
-どういう意図で使ったのか聞いて</a:t>
+              <a:t>普通のChatGPTのチャットから、そのままnoteの記事作成・画像挿入・公開まで進めたくて、Content Publisher MCPにnoteアダプターを追加した。
+最初からnote向けの処理を全部自作したわけではない。note-mcp</a:t>
             </a:r>
           </a:p>
         </p:txBody>
@@ -22078,7 +22041,7 @@
                   <a:srgbClr val="FFFFFF"/>
                 </a:solidFill>
               </a:rPr>
-              <a:t>ChatGPTのチャットからnote投稿を自動化するMCPを作った。認証・画像・リンクカード・公開まで</a:t>
+              <a:t>ChatGPTからX投稿を自動化するMCPを作った。画像投稿と実運用で見つかった失敗判定まで</a:t>
             </a:r>
             <a:r>
               <a:rPr sz="900">
@@ -22128,7 +22091,7 @@
                 </a:solidFill>
                 <a:hlinkClick r:id="rId3"/>
               </a:rPr>
-              <a:t>https://zenn.dev/rikunode/articles/chatgpt-note-mcp-production-flow</a:t>
+              <a:t>https://zenn.dev/rikunode/articles/chatgpt-x-mcp-production-debug</a:t>
             </a:r>
           </a:p>
         </p:txBody>
@@ -22161,8 +22124,8 @@
                   <a:srgbClr val="7F8C8D"/>
                 </a:solidFill>
               </a:rPr>
-              <a:t>普通のChatGPTのチャットから、そのままnoteの記事作成・画像挿入・公開まで進めたくて、Content Publisher MCPにnoteアダプターを追加した。
-最初からnote向けの処理を全部自作したわけではない。note-mcp</a:t>
+              <a:t>ChatGPTからXへそのまま投稿できるようにしたくて、XActionsを土台に小さなMCPを作りました。
+最初はテキストを投稿できれば十分だと思っていました。ところが実際に使い始めると、画像の受け渡し、XへのMedia Upload、投稿</a:t>
             </a:r>
           </a:p>
         </p:txBody>
@@ -22203,7 +22166,7 @@
                   <a:srgbClr val="FFFFFF"/>
                 </a:solidFill>
               </a:rPr>
-              <a:t>ChatGPTからX投稿を自動化するMCPを作った。画像投稿と実運用で見つかった失敗判定まで</a:t>
+              <a:t>LangGraphで実装！マルチエージェントRAGの設計とワークフロー自動化</a:t>
             </a:r>
             <a:r>
               <a:rPr sz="900">
@@ -22211,7 +22174,7 @@
                   <a:srgbClr val="7F8C8D"/>
                 </a:solidFill>
               </a:rPr>
-              <a:t>  (2026-09-02)</a:t>
+              <a:t>  (2026-09-01)</a:t>
             </a:r>
           </a:p>
         </p:txBody>
@@ -22244,7 +22207,7 @@
                   <a:srgbClr val="E74C3C"/>
                 </a:solidFill>
               </a:rPr>
-              <a:t>[Zenn]  </a:t>
+              <a:t>[Qiita]  </a:t>
             </a:r>
             <a:r>
               <a:rPr sz="800">
@@ -22253,7 +22216,7 @@
                 </a:solidFill>
                 <a:hlinkClick r:id="rId4"/>
               </a:rPr>
-              <a:t>https://zenn.dev/rikunode/articles/chatgpt-x-mcp-production-debug</a:t>
+              <a:t>https://qiita.com/Sa0422/items/afda8441ea6d401f7451</a:t>
             </a:r>
           </a:p>
         </p:txBody>
@@ -22286,8 +22249,7 @@
                   <a:srgbClr val="7F8C8D"/>
                 </a:solidFill>
               </a:rPr>
-              <a:t>ChatGPTからXへそのまま投稿できるようにしたくて、XActionsを土台に小さなMCPを作りました。
-最初はテキストを投稿できれば十分だと思っていました。ところが実際に使い始めると、画像の受け渡し、XへのMedia Upload、投稿</a:t>
+              <a:t>多くのRAGシステム開発者が「複雑な推論や高度な情報処理が難しい」という壁にぶつかっています。単一のLLMエージェントだけでは、動的なクエリルーティングや多段階の評価・修正が困難で、結果としてRAGの精度や信頼性が頭打ちになることが少なくあ</a:t>
             </a:r>
           </a:p>
         </p:txBody>
@@ -22328,7 +22290,7 @@
                   <a:srgbClr val="FFFFFF"/>
                 </a:solidFill>
               </a:rPr>
-              <a:t>LangGraphで実装！マルチエージェントRAGの設計とワークフロー自動化</a:t>
+              <a:t>Azure Content Understanding 2026-06-01-preview を RAGOps Studio のセマンティック Diff  で可…</a:t>
             </a:r>
             <a:r>
               <a:rPr sz="900">
@@ -22336,7 +22298,7 @@
                   <a:srgbClr val="7F8C8D"/>
                 </a:solidFill>
               </a:rPr>
-              <a:t>  (2026-09-01)</a:t>
+              <a:t>  (2026-08-31)</a:t>
             </a:r>
           </a:p>
         </p:txBody>
@@ -22378,7 +22340,7 @@
                 </a:solidFill>
                 <a:hlinkClick r:id="rId5"/>
               </a:rPr>
-              <a:t>https://qiita.com/Sa0422/items/afda8441ea6d401f7451</a:t>
+              <a:t>https://qiita.com/nohanaga/items/350b948b1c5f6343865b</a:t>
             </a:r>
           </a:p>
         </p:txBody>
@@ -22411,7 +22373,7 @@
                   <a:srgbClr val="7F8C8D"/>
                 </a:solidFill>
               </a:rPr>
-              <a:t>多くのRAGシステム開発者が「複雑な推論や高度な情報処理が難しい」という壁にぶつかっています。単一のLLMエージェントだけでは、動的なクエリルーティングや多段階の評価・修正が困難で、結果としてRAGの精度や信頼性が頭打ちになることが少なくあ</a:t>
+              <a:t>&gt; 2026 年 8 月 31 日時点の情報です。この記事で扱う  は Public Preview であり、SLA は提供されず、本番ワークロードには推奨されていません。最新状況は Microsoft Learn の「Content Un</a:t>
             </a:r>
           </a:p>
         </p:txBody>
